--- a/fall/sem_9_overload/presentations/Семинар_9.pptx
+++ b/fall/sem_9_overload/presentations/Семинар_9.pptx
@@ -4,6 +4,9 @@
   <p:sldMasterIdLst>
     <p:sldMasterId id="2147483648" r:id="rId1"/>
   </p:sldMasterIdLst>
+  <p:notesMasterIdLst>
+    <p:notesMasterId r:id="rId23"/>
+  </p:notesMasterIdLst>
   <p:sldIdLst>
     <p:sldId id="256" r:id="rId2"/>
     <p:sldId id="262" r:id="rId3"/>
@@ -11,9 +14,21 @@
     <p:sldId id="257" r:id="rId5"/>
     <p:sldId id="258" r:id="rId6"/>
     <p:sldId id="264" r:id="rId7"/>
-    <p:sldId id="259" r:id="rId8"/>
-    <p:sldId id="260" r:id="rId9"/>
-    <p:sldId id="261" r:id="rId10"/>
+    <p:sldId id="265" r:id="rId8"/>
+    <p:sldId id="266" r:id="rId9"/>
+    <p:sldId id="267" r:id="rId10"/>
+    <p:sldId id="268" r:id="rId11"/>
+    <p:sldId id="269" r:id="rId12"/>
+    <p:sldId id="270" r:id="rId13"/>
+    <p:sldId id="271" r:id="rId14"/>
+    <p:sldId id="272" r:id="rId15"/>
+    <p:sldId id="273" r:id="rId16"/>
+    <p:sldId id="274" r:id="rId17"/>
+    <p:sldId id="275" r:id="rId18"/>
+    <p:sldId id="276" r:id="rId19"/>
+    <p:sldId id="259" r:id="rId20"/>
+    <p:sldId id="260" r:id="rId21"/>
+    <p:sldId id="261" r:id="rId22"/>
   </p:sldIdLst>
   <p:sldSz cx="12192000" cy="6858000"/>
   <p:notesSz cx="12192000" cy="6858000"/>
@@ -39,6 +54,440 @@
     </p:ext>
   </p:extLst>
 </p:presentation>
+</file>
+
+<file path=ppt/notesMasters/notesMaster1.xml><?xml version="1.0" encoding="utf-8"?>
+<p:notesMaster xmlns:a="http://schemas.openxmlformats.org/drawingml/2006/main" xmlns:r="http://schemas.openxmlformats.org/officeDocument/2006/relationships" xmlns:p="http://schemas.openxmlformats.org/presentationml/2006/main">
+  <p:cSld>
+    <p:bg>
+      <p:bgRef idx="1001">
+        <a:schemeClr val="bg1"/>
+      </p:bgRef>
+    </p:bg>
+    <p:spTree>
+      <p:nvGrpSpPr>
+        <p:cNvPr id="1" name=""/>
+        <p:cNvGrpSpPr/>
+        <p:nvPr/>
+      </p:nvGrpSpPr>
+      <p:grpSpPr>
+        <a:xfrm>
+          <a:off x="0" y="0"/>
+          <a:ext cx="0" cy="0"/>
+          <a:chOff x="0" y="0"/>
+          <a:chExt cx="0" cy="0"/>
+        </a:xfrm>
+      </p:grpSpPr>
+      <p:sp>
+        <p:nvSpPr>
+          <p:cNvPr id="2" name="Header Placeholder 1"/>
+          <p:cNvSpPr>
+            <a:spLocks noGrp="1"/>
+          </p:cNvSpPr>
+          <p:nvPr>
+            <p:ph type="hdr" sz="quarter"/>
+          </p:nvPr>
+        </p:nvSpPr>
+        <p:spPr>
+          <a:xfrm>
+            <a:off x="0" y="0"/>
+            <a:ext cx="5283200" cy="344488"/>
+          </a:xfrm>
+          <a:prstGeom prst="rect">
+            <a:avLst/>
+          </a:prstGeom>
+        </p:spPr>
+        <p:txBody>
+          <a:bodyPr vert="horz" lIns="91440" tIns="45720" rIns="91440" bIns="45720" rtlCol="0"/>
+          <a:lstStyle>
+            <a:lvl1pPr algn="l">
+              <a:defRPr sz="1200"/>
+            </a:lvl1pPr>
+          </a:lstStyle>
+          <a:p>
+            <a:endParaRPr lang="ru-RU"/>
+          </a:p>
+        </p:txBody>
+      </p:sp>
+      <p:sp>
+        <p:nvSpPr>
+          <p:cNvPr id="3" name="Date Placeholder 2"/>
+          <p:cNvSpPr>
+            <a:spLocks noGrp="1"/>
+          </p:cNvSpPr>
+          <p:nvPr>
+            <p:ph type="dt" idx="1"/>
+          </p:nvPr>
+        </p:nvSpPr>
+        <p:spPr>
+          <a:xfrm>
+            <a:off x="6905625" y="0"/>
+            <a:ext cx="5283200" cy="344488"/>
+          </a:xfrm>
+          <a:prstGeom prst="rect">
+            <a:avLst/>
+          </a:prstGeom>
+        </p:spPr>
+        <p:txBody>
+          <a:bodyPr vert="horz" lIns="91440" tIns="45720" rIns="91440" bIns="45720" rtlCol="0"/>
+          <a:lstStyle>
+            <a:lvl1pPr algn="r">
+              <a:defRPr sz="1200"/>
+            </a:lvl1pPr>
+          </a:lstStyle>
+          <a:p>
+            <a:fld id="{59192C6E-9E75-4843-94F2-CF6452F881E4}" type="datetimeFigureOut">
+              <a:rPr lang="ru-RU" smtClean="0"/>
+              <a:t>07.11.2024</a:t>
+            </a:fld>
+            <a:endParaRPr lang="ru-RU"/>
+          </a:p>
+        </p:txBody>
+      </p:sp>
+      <p:sp>
+        <p:nvSpPr>
+          <p:cNvPr id="4" name="Slide Image Placeholder 3"/>
+          <p:cNvSpPr>
+            <a:spLocks noGrp="1" noRot="1" noChangeAspect="1"/>
+          </p:cNvSpPr>
+          <p:nvPr>
+            <p:ph type="sldImg" idx="2"/>
+          </p:nvPr>
+        </p:nvSpPr>
+        <p:spPr>
+          <a:xfrm>
+            <a:off x="4038600" y="857250"/>
+            <a:ext cx="4114800" cy="2314575"/>
+          </a:xfrm>
+          <a:prstGeom prst="rect">
+            <a:avLst/>
+          </a:prstGeom>
+          <a:noFill/>
+          <a:ln w="12700">
+            <a:solidFill>
+              <a:prstClr val="black"/>
+            </a:solidFill>
+          </a:ln>
+        </p:spPr>
+        <p:txBody>
+          <a:bodyPr vert="horz" lIns="91440" tIns="45720" rIns="91440" bIns="45720" rtlCol="0" anchor="ctr"/>
+          <a:lstStyle/>
+          <a:p>
+            <a:endParaRPr lang="ru-RU"/>
+          </a:p>
+        </p:txBody>
+      </p:sp>
+      <p:sp>
+        <p:nvSpPr>
+          <p:cNvPr id="5" name="Notes Placeholder 4"/>
+          <p:cNvSpPr>
+            <a:spLocks noGrp="1"/>
+          </p:cNvSpPr>
+          <p:nvPr>
+            <p:ph type="body" sz="quarter" idx="3"/>
+          </p:nvPr>
+        </p:nvSpPr>
+        <p:spPr>
+          <a:xfrm>
+            <a:off x="1219200" y="3300413"/>
+            <a:ext cx="9753600" cy="2700337"/>
+          </a:xfrm>
+          <a:prstGeom prst="rect">
+            <a:avLst/>
+          </a:prstGeom>
+        </p:spPr>
+        <p:txBody>
+          <a:bodyPr vert="horz" lIns="91440" tIns="45720" rIns="91440" bIns="45720" rtlCol="0"/>
+          <a:lstStyle/>
+          <a:p>
+            <a:pPr lvl="0"/>
+            <a:r>
+              <a:rPr lang="en-US"/>
+              <a:t>Click to edit Master text styles</a:t>
+            </a:r>
+          </a:p>
+          <a:p>
+            <a:pPr lvl="1"/>
+            <a:r>
+              <a:rPr lang="en-US"/>
+              <a:t>Second level</a:t>
+            </a:r>
+          </a:p>
+          <a:p>
+            <a:pPr lvl="2"/>
+            <a:r>
+              <a:rPr lang="en-US"/>
+              <a:t>Third level</a:t>
+            </a:r>
+          </a:p>
+          <a:p>
+            <a:pPr lvl="3"/>
+            <a:r>
+              <a:rPr lang="en-US"/>
+              <a:t>Fourth level</a:t>
+            </a:r>
+          </a:p>
+          <a:p>
+            <a:pPr lvl="4"/>
+            <a:r>
+              <a:rPr lang="en-US"/>
+              <a:t>Fifth level</a:t>
+            </a:r>
+            <a:endParaRPr lang="ru-RU"/>
+          </a:p>
+        </p:txBody>
+      </p:sp>
+      <p:sp>
+        <p:nvSpPr>
+          <p:cNvPr id="6" name="Footer Placeholder 5"/>
+          <p:cNvSpPr>
+            <a:spLocks noGrp="1"/>
+          </p:cNvSpPr>
+          <p:nvPr>
+            <p:ph type="ftr" sz="quarter" idx="4"/>
+          </p:nvPr>
+        </p:nvSpPr>
+        <p:spPr>
+          <a:xfrm>
+            <a:off x="0" y="6513513"/>
+            <a:ext cx="5283200" cy="344487"/>
+          </a:xfrm>
+          <a:prstGeom prst="rect">
+            <a:avLst/>
+          </a:prstGeom>
+        </p:spPr>
+        <p:txBody>
+          <a:bodyPr vert="horz" lIns="91440" tIns="45720" rIns="91440" bIns="45720" rtlCol="0" anchor="b"/>
+          <a:lstStyle>
+            <a:lvl1pPr algn="l">
+              <a:defRPr sz="1200"/>
+            </a:lvl1pPr>
+          </a:lstStyle>
+          <a:p>
+            <a:endParaRPr lang="ru-RU"/>
+          </a:p>
+        </p:txBody>
+      </p:sp>
+      <p:sp>
+        <p:nvSpPr>
+          <p:cNvPr id="7" name="Slide Number Placeholder 6"/>
+          <p:cNvSpPr>
+            <a:spLocks noGrp="1"/>
+          </p:cNvSpPr>
+          <p:nvPr>
+            <p:ph type="sldNum" sz="quarter" idx="5"/>
+          </p:nvPr>
+        </p:nvSpPr>
+        <p:spPr>
+          <a:xfrm>
+            <a:off x="6905625" y="6513513"/>
+            <a:ext cx="5283200" cy="344487"/>
+          </a:xfrm>
+          <a:prstGeom prst="rect">
+            <a:avLst/>
+          </a:prstGeom>
+        </p:spPr>
+        <p:txBody>
+          <a:bodyPr vert="horz" lIns="91440" tIns="45720" rIns="91440" bIns="45720" rtlCol="0" anchor="b"/>
+          <a:lstStyle>
+            <a:lvl1pPr algn="r">
+              <a:defRPr sz="1200"/>
+            </a:lvl1pPr>
+          </a:lstStyle>
+          <a:p>
+            <a:fld id="{F8C41038-2FBE-437D-B04A-F907DEB27294}" type="slidenum">
+              <a:rPr lang="ru-RU" smtClean="0"/>
+              <a:t>‹#›</a:t>
+            </a:fld>
+            <a:endParaRPr lang="ru-RU"/>
+          </a:p>
+        </p:txBody>
+      </p:sp>
+    </p:spTree>
+    <p:extLst>
+      <p:ext uri="{BB962C8B-B14F-4D97-AF65-F5344CB8AC3E}">
+        <p14:creationId xmlns:p14="http://schemas.microsoft.com/office/powerpoint/2010/main" val="4123741593"/>
+      </p:ext>
+    </p:extLst>
+  </p:cSld>
+  <p:clrMap bg1="lt1" tx1="dk1" bg2="lt2" tx2="dk2" accent1="accent1" accent2="accent2" accent3="accent3" accent4="accent4" accent5="accent5" accent6="accent6" hlink="hlink" folHlink="folHlink"/>
+  <p:notesStyle>
+    <a:lvl1pPr marL="0" algn="l" defTabSz="914400" rtl="0" eaLnBrk="1" latinLnBrk="0" hangingPunct="1">
+      <a:defRPr sz="1200" kern="1200">
+        <a:solidFill>
+          <a:schemeClr val="tx1"/>
+        </a:solidFill>
+        <a:latin typeface="+mn-lt"/>
+        <a:ea typeface="+mn-ea"/>
+        <a:cs typeface="+mn-cs"/>
+      </a:defRPr>
+    </a:lvl1pPr>
+    <a:lvl2pPr marL="457200" algn="l" defTabSz="914400" rtl="0" eaLnBrk="1" latinLnBrk="0" hangingPunct="1">
+      <a:defRPr sz="1200" kern="1200">
+        <a:solidFill>
+          <a:schemeClr val="tx1"/>
+        </a:solidFill>
+        <a:latin typeface="+mn-lt"/>
+        <a:ea typeface="+mn-ea"/>
+        <a:cs typeface="+mn-cs"/>
+      </a:defRPr>
+    </a:lvl2pPr>
+    <a:lvl3pPr marL="914400" algn="l" defTabSz="914400" rtl="0" eaLnBrk="1" latinLnBrk="0" hangingPunct="1">
+      <a:defRPr sz="1200" kern="1200">
+        <a:solidFill>
+          <a:schemeClr val="tx1"/>
+        </a:solidFill>
+        <a:latin typeface="+mn-lt"/>
+        <a:ea typeface="+mn-ea"/>
+        <a:cs typeface="+mn-cs"/>
+      </a:defRPr>
+    </a:lvl3pPr>
+    <a:lvl4pPr marL="1371600" algn="l" defTabSz="914400" rtl="0" eaLnBrk="1" latinLnBrk="0" hangingPunct="1">
+      <a:defRPr sz="1200" kern="1200">
+        <a:solidFill>
+          <a:schemeClr val="tx1"/>
+        </a:solidFill>
+        <a:latin typeface="+mn-lt"/>
+        <a:ea typeface="+mn-ea"/>
+        <a:cs typeface="+mn-cs"/>
+      </a:defRPr>
+    </a:lvl4pPr>
+    <a:lvl5pPr marL="1828800" algn="l" defTabSz="914400" rtl="0" eaLnBrk="1" latinLnBrk="0" hangingPunct="1">
+      <a:defRPr sz="1200" kern="1200">
+        <a:solidFill>
+          <a:schemeClr val="tx1"/>
+        </a:solidFill>
+        <a:latin typeface="+mn-lt"/>
+        <a:ea typeface="+mn-ea"/>
+        <a:cs typeface="+mn-cs"/>
+      </a:defRPr>
+    </a:lvl5pPr>
+    <a:lvl6pPr marL="2286000" algn="l" defTabSz="914400" rtl="0" eaLnBrk="1" latinLnBrk="0" hangingPunct="1">
+      <a:defRPr sz="1200" kern="1200">
+        <a:solidFill>
+          <a:schemeClr val="tx1"/>
+        </a:solidFill>
+        <a:latin typeface="+mn-lt"/>
+        <a:ea typeface="+mn-ea"/>
+        <a:cs typeface="+mn-cs"/>
+      </a:defRPr>
+    </a:lvl6pPr>
+    <a:lvl7pPr marL="2743200" algn="l" defTabSz="914400" rtl="0" eaLnBrk="1" latinLnBrk="0" hangingPunct="1">
+      <a:defRPr sz="1200" kern="1200">
+        <a:solidFill>
+          <a:schemeClr val="tx1"/>
+        </a:solidFill>
+        <a:latin typeface="+mn-lt"/>
+        <a:ea typeface="+mn-ea"/>
+        <a:cs typeface="+mn-cs"/>
+      </a:defRPr>
+    </a:lvl7pPr>
+    <a:lvl8pPr marL="3200400" algn="l" defTabSz="914400" rtl="0" eaLnBrk="1" latinLnBrk="0" hangingPunct="1">
+      <a:defRPr sz="1200" kern="1200">
+        <a:solidFill>
+          <a:schemeClr val="tx1"/>
+        </a:solidFill>
+        <a:latin typeface="+mn-lt"/>
+        <a:ea typeface="+mn-ea"/>
+        <a:cs typeface="+mn-cs"/>
+      </a:defRPr>
+    </a:lvl8pPr>
+    <a:lvl9pPr marL="3657600" algn="l" defTabSz="914400" rtl="0" eaLnBrk="1" latinLnBrk="0" hangingPunct="1">
+      <a:defRPr sz="1200" kern="1200">
+        <a:solidFill>
+          <a:schemeClr val="tx1"/>
+        </a:solidFill>
+        <a:latin typeface="+mn-lt"/>
+        <a:ea typeface="+mn-ea"/>
+        <a:cs typeface="+mn-cs"/>
+      </a:defRPr>
+    </a:lvl9pPr>
+  </p:notesStyle>
+</p:notesMaster>
+</file>
+
+<file path=ppt/notesSlides/notesSlide1.xml><?xml version="1.0" encoding="utf-8"?>
+<p:notes xmlns:a="http://schemas.openxmlformats.org/drawingml/2006/main" xmlns:r="http://schemas.openxmlformats.org/officeDocument/2006/relationships" xmlns:p="http://schemas.openxmlformats.org/presentationml/2006/main">
+  <p:cSld>
+    <p:spTree>
+      <p:nvGrpSpPr>
+        <p:cNvPr id="1" name=""/>
+        <p:cNvGrpSpPr/>
+        <p:nvPr/>
+      </p:nvGrpSpPr>
+      <p:grpSpPr>
+        <a:xfrm>
+          <a:off x="0" y="0"/>
+          <a:ext cx="0" cy="0"/>
+          <a:chOff x="0" y="0"/>
+          <a:chExt cx="0" cy="0"/>
+        </a:xfrm>
+      </p:grpSpPr>
+      <p:sp>
+        <p:nvSpPr>
+          <p:cNvPr id="2" name="Slide Image Placeholder 1"/>
+          <p:cNvSpPr>
+            <a:spLocks noGrp="1" noRot="1" noChangeAspect="1"/>
+          </p:cNvSpPr>
+          <p:nvPr>
+            <p:ph type="sldImg"/>
+          </p:nvPr>
+        </p:nvSpPr>
+        <p:spPr/>
+      </p:sp>
+      <p:sp>
+        <p:nvSpPr>
+          <p:cNvPr id="3" name="Notes Placeholder 2"/>
+          <p:cNvSpPr>
+            <a:spLocks noGrp="1"/>
+          </p:cNvSpPr>
+          <p:nvPr>
+            <p:ph type="body" idx="1"/>
+          </p:nvPr>
+        </p:nvSpPr>
+        <p:spPr/>
+        <p:txBody>
+          <a:bodyPr/>
+          <a:lstStyle/>
+          <a:p>
+            <a:endParaRPr lang="ru-RU" dirty="0"/>
+          </a:p>
+        </p:txBody>
+      </p:sp>
+      <p:sp>
+        <p:nvSpPr>
+          <p:cNvPr id="4" name="Slide Number Placeholder 3"/>
+          <p:cNvSpPr>
+            <a:spLocks noGrp="1"/>
+          </p:cNvSpPr>
+          <p:nvPr>
+            <p:ph type="sldNum" sz="quarter" idx="5"/>
+          </p:nvPr>
+        </p:nvSpPr>
+        <p:spPr/>
+        <p:txBody>
+          <a:bodyPr/>
+          <a:lstStyle/>
+          <a:p>
+            <a:fld id="{F8C41038-2FBE-437D-B04A-F907DEB27294}" type="slidenum">
+              <a:rPr lang="ru-RU" smtClean="0"/>
+              <a:t>8</a:t>
+            </a:fld>
+            <a:endParaRPr lang="ru-RU"/>
+          </a:p>
+        </p:txBody>
+      </p:sp>
+    </p:spTree>
+    <p:extLst>
+      <p:ext uri="{BB962C8B-B14F-4D97-AF65-F5344CB8AC3E}">
+        <p14:creationId xmlns:p14="http://schemas.microsoft.com/office/powerpoint/2010/main" val="208903839"/>
+      </p:ext>
+    </p:extLst>
+  </p:cSld>
+  <p:clrMapOvr>
+    <a:masterClrMapping/>
+  </p:clrMapOvr>
+</p:notes>
 </file>
 
 <file path=ppt/slideLayouts/slideLayout1.xml><?xml version="1.0" encoding="utf-8"?>
@@ -192,7 +641,7 @@
           <a:p>
             <a:fld id="{1D8BD707-D9CF-40AE-B4C6-C98DA3205C09}" type="datetimeFigureOut">
               <a:rPr lang="en-US"/>
-              <a:t>10/30/2024</a:t>
+              <a:t>11/7/2024</a:t>
             </a:fld>
             <a:endParaRPr lang="en-US"/>
           </a:p>
@@ -369,7 +818,7 @@
           <a:p>
             <a:fld id="{1D8BD707-D9CF-40AE-B4C6-C98DA3205C09}" type="datetimeFigureOut">
               <a:rPr lang="en-US"/>
-              <a:t>10/30/2024</a:t>
+              <a:t>11/7/2024</a:t>
             </a:fld>
             <a:endParaRPr lang="en-US"/>
           </a:p>
@@ -583,7 +1032,7 @@
           <a:p>
             <a:fld id="{1D8BD707-D9CF-40AE-B4C6-C98DA3205C09}" type="datetimeFigureOut">
               <a:rPr lang="en-US"/>
-              <a:t>10/30/2024</a:t>
+              <a:t>11/7/2024</a:t>
             </a:fld>
             <a:endParaRPr lang="en-US"/>
           </a:p>
@@ -731,7 +1180,7 @@
           <a:p>
             <a:fld id="{1D8BD707-D9CF-40AE-B4C6-C98DA3205C09}" type="datetimeFigureOut">
               <a:rPr lang="en-US"/>
-              <a:t>10/30/2024</a:t>
+              <a:t>11/7/2024</a:t>
             </a:fld>
             <a:endParaRPr lang="en-US"/>
           </a:p>
@@ -880,7 +1329,7 @@
           <a:p>
             <a:fld id="{1D8BD707-D9CF-40AE-B4C6-C98DA3205C09}" type="datetimeFigureOut">
               <a:rPr lang="en-US"/>
-              <a:t>10/30/2024</a:t>
+              <a:t>11/7/2024</a:t>
             </a:fld>
             <a:endParaRPr lang="en-US"/>
           </a:p>
@@ -1105,7 +1554,7 @@
           <a:p>
             <a:fld id="{1D8BD707-D9CF-40AE-B4C6-C98DA3205C09}" type="datetimeFigureOut">
               <a:rPr lang="en-US"/>
-              <a:t>10/30/2024</a:t>
+              <a:t>11/7/2024</a:t>
             </a:fld>
             <a:endParaRPr lang="en-US"/>
           </a:p>
@@ -1375,22 +1824,18 @@
             </a:r>
             <a:r>
               <a:rPr sz="5650" dirty="0"/>
-              <a:t>C</a:t>
-            </a:r>
-            <a:r>
-              <a:rPr sz="5650"/>
-              <a:t>++</a:t>
-            </a:r>
-            <a:r>
-              <a:rPr sz="5650" spc="-65"/>
-              <a:t> </a:t>
-            </a:r>
-            <a:r>
-              <a:rPr sz="5650" spc="170"/>
+              <a:t>C++</a:t>
+            </a:r>
+            <a:r>
+              <a:rPr sz="5650" spc="-65" dirty="0"/>
+              <a:t> </a:t>
+            </a:r>
+            <a:r>
+              <a:rPr sz="5650" spc="170" dirty="0"/>
               <a:t>№</a:t>
             </a:r>
             <a:r>
-              <a:rPr lang="en-US" sz="5650" spc="170"/>
+              <a:rPr lang="en-US" sz="5650" spc="170" dirty="0"/>
               <a:t>9</a:t>
             </a:r>
             <a:endParaRPr sz="5650" dirty="0"/>
@@ -1417,6 +1862,1977 @@
               <a:t>операторов</a:t>
             </a:r>
             <a:endParaRPr sz="5650" dirty="0"/>
+          </a:p>
+        </p:txBody>
+      </p:sp>
+    </p:spTree>
+  </p:cSld>
+  <p:clrMapOvr>
+    <a:masterClrMapping/>
+  </p:clrMapOvr>
+</p:sld>
+</file>
+
+<file path=ppt/slides/slide10.xml><?xml version="1.0" encoding="utf-8"?>
+<p:sld xmlns:a="http://schemas.openxmlformats.org/drawingml/2006/main" xmlns:r="http://schemas.openxmlformats.org/officeDocument/2006/relationships" xmlns:p="http://schemas.openxmlformats.org/presentationml/2006/main">
+  <p:cSld>
+    <p:spTree>
+      <p:nvGrpSpPr>
+        <p:cNvPr id="1" name=""/>
+        <p:cNvGrpSpPr/>
+        <p:nvPr/>
+      </p:nvGrpSpPr>
+      <p:grpSpPr>
+        <a:xfrm>
+          <a:off x="0" y="0"/>
+          <a:ext cx="0" cy="0"/>
+          <a:chOff x="0" y="0"/>
+          <a:chExt cx="0" cy="0"/>
+        </a:xfrm>
+      </p:grpSpPr>
+      <p:sp>
+        <p:nvSpPr>
+          <p:cNvPr id="2" name="Title 1">
+            <a:extLst>
+              <a:ext uri="{FF2B5EF4-FFF2-40B4-BE49-F238E27FC236}">
+                <a16:creationId xmlns:a16="http://schemas.microsoft.com/office/drawing/2014/main" id="{D7A87F9A-B0D7-42C0-B082-317DFE473CC0}"/>
+              </a:ext>
+            </a:extLst>
+          </p:cNvPr>
+          <p:cNvSpPr>
+            <a:spLocks noGrp="1"/>
+          </p:cNvSpPr>
+          <p:nvPr>
+            <p:ph type="title"/>
+          </p:nvPr>
+        </p:nvSpPr>
+        <p:spPr/>
+        <p:txBody>
+          <a:bodyPr/>
+          <a:lstStyle/>
+          <a:p>
+            <a:r>
+              <a:rPr lang="en-US" dirty="0"/>
+              <a:t>&lt;=&gt;: orderings</a:t>
+            </a:r>
+            <a:endParaRPr lang="ru-RU" dirty="0"/>
+          </a:p>
+        </p:txBody>
+      </p:sp>
+      <p:sp>
+        <p:nvSpPr>
+          <p:cNvPr id="3" name="Text Placeholder 2">
+            <a:extLst>
+              <a:ext uri="{FF2B5EF4-FFF2-40B4-BE49-F238E27FC236}">
+                <a16:creationId xmlns:a16="http://schemas.microsoft.com/office/drawing/2014/main" id="{63A2FE1A-1867-4FE2-9DFC-9E87F6EAEB73}"/>
+              </a:ext>
+            </a:extLst>
+          </p:cNvPr>
+          <p:cNvSpPr>
+            <a:spLocks noGrp="1"/>
+          </p:cNvSpPr>
+          <p:nvPr>
+            <p:ph type="body" idx="1"/>
+          </p:nvPr>
+        </p:nvSpPr>
+        <p:spPr>
+          <a:xfrm>
+            <a:off x="685800" y="2286000"/>
+            <a:ext cx="10259060" cy="1661993"/>
+          </a:xfrm>
+        </p:spPr>
+        <p:txBody>
+          <a:bodyPr/>
+          <a:lstStyle/>
+          <a:p>
+            <a:r>
+              <a:rPr lang="en-US" sz="3600" b="0" i="0" dirty="0">
+                <a:solidFill>
+                  <a:srgbClr val="000000"/>
+                </a:solidFill>
+                <a:effectLst/>
+                <a:latin typeface="DejaVuSansMono"/>
+                <a:hlinkClick r:id="rId2"/>
+              </a:rPr>
+              <a:t>std::</a:t>
+            </a:r>
+            <a:r>
+              <a:rPr lang="en-US" sz="3600" b="0" i="0" dirty="0" err="1">
+                <a:solidFill>
+                  <a:srgbClr val="000000"/>
+                </a:solidFill>
+                <a:effectLst/>
+                <a:latin typeface="DejaVuSansMono"/>
+                <a:hlinkClick r:id="rId2"/>
+              </a:rPr>
+              <a:t>strong_ordering</a:t>
+            </a:r>
+            <a:r>
+              <a:rPr lang="en-US" sz="3600" b="0" i="0" dirty="0">
+                <a:solidFill>
+                  <a:srgbClr val="000000"/>
+                </a:solidFill>
+                <a:effectLst/>
+                <a:latin typeface="DejaVuSansMono"/>
+              </a:rPr>
+              <a:t> – </a:t>
+            </a:r>
+            <a:r>
+              <a:rPr lang="ru-RU" sz="3600" dirty="0">
+                <a:solidFill>
+                  <a:srgbClr val="000000"/>
+                </a:solidFill>
+                <a:latin typeface="DejaVuSansMono"/>
+              </a:rPr>
+              <a:t>ЛУМ с </a:t>
+            </a:r>
+            <a:r>
+              <a:rPr lang="en-US" sz="3600" dirty="0">
+                <a:solidFill>
+                  <a:srgbClr val="000000"/>
+                </a:solidFill>
+                <a:latin typeface="DejaVuSansMono"/>
+              </a:rPr>
+              <a:t>equality</a:t>
+            </a:r>
+            <a:endParaRPr lang="en-US" sz="3600" b="0" i="0" dirty="0">
+              <a:solidFill>
+                <a:srgbClr val="000000"/>
+              </a:solidFill>
+              <a:effectLst/>
+              <a:latin typeface="DejaVuSansMono"/>
+            </a:endParaRPr>
+          </a:p>
+          <a:p>
+            <a:r>
+              <a:rPr lang="en-US" sz="3600" b="0" i="0" dirty="0">
+                <a:solidFill>
+                  <a:srgbClr val="000000"/>
+                </a:solidFill>
+                <a:effectLst/>
+                <a:latin typeface="DejaVuSansMono"/>
+              </a:rPr>
+              <a:t>std::</a:t>
+            </a:r>
+            <a:r>
+              <a:rPr lang="en-US" sz="3600" dirty="0" err="1">
+                <a:solidFill>
+                  <a:srgbClr val="000000"/>
+                </a:solidFill>
+                <a:latin typeface="DejaVuSansMono"/>
+              </a:rPr>
+              <a:t>weak</a:t>
+            </a:r>
+            <a:r>
+              <a:rPr lang="en-US" sz="3600" b="0" i="0" dirty="0" err="1">
+                <a:solidFill>
+                  <a:srgbClr val="000000"/>
+                </a:solidFill>
+                <a:effectLst/>
+                <a:latin typeface="DejaVuSansMono"/>
+              </a:rPr>
+              <a:t>_ordering</a:t>
+            </a:r>
+            <a:r>
+              <a:rPr lang="en-US" sz="3600" b="0" i="0" dirty="0">
+                <a:solidFill>
+                  <a:srgbClr val="000000"/>
+                </a:solidFill>
+                <a:effectLst/>
+                <a:latin typeface="DejaVuSansMono"/>
+              </a:rPr>
+              <a:t> - </a:t>
+            </a:r>
+            <a:r>
+              <a:rPr lang="ru-RU" sz="3600" b="0" i="0" dirty="0">
+                <a:solidFill>
+                  <a:srgbClr val="000000"/>
+                </a:solidFill>
+                <a:effectLst/>
+                <a:latin typeface="DejaVuSansMono"/>
+              </a:rPr>
+              <a:t>ЛУМ</a:t>
+            </a:r>
+            <a:endParaRPr lang="en-US" sz="3600" b="0" i="0" dirty="0">
+              <a:solidFill>
+                <a:srgbClr val="000000"/>
+              </a:solidFill>
+              <a:effectLst/>
+              <a:latin typeface="DejaVuSansMono"/>
+            </a:endParaRPr>
+          </a:p>
+          <a:p>
+            <a:r>
+              <a:rPr lang="en-US" sz="3600" b="0" i="0" dirty="0">
+                <a:solidFill>
+                  <a:srgbClr val="000000"/>
+                </a:solidFill>
+                <a:effectLst/>
+                <a:latin typeface="DejaVuSansMono"/>
+              </a:rPr>
+              <a:t>std::</a:t>
+            </a:r>
+            <a:r>
+              <a:rPr lang="en-US" sz="3600" dirty="0" err="1">
+                <a:solidFill>
+                  <a:srgbClr val="000000"/>
+                </a:solidFill>
+                <a:latin typeface="DejaVuSansMono"/>
+              </a:rPr>
+              <a:t>partial</a:t>
+            </a:r>
+            <a:r>
+              <a:rPr lang="en-US" sz="3600" b="0" i="0" dirty="0" err="1">
+                <a:solidFill>
+                  <a:srgbClr val="000000"/>
+                </a:solidFill>
+                <a:effectLst/>
+                <a:latin typeface="DejaVuSansMono"/>
+              </a:rPr>
+              <a:t>_ordering</a:t>
+            </a:r>
+            <a:r>
+              <a:rPr lang="ru-RU" sz="3600" b="0" i="0" dirty="0">
+                <a:solidFill>
+                  <a:srgbClr val="000000"/>
+                </a:solidFill>
+                <a:effectLst/>
+                <a:latin typeface="DejaVuSansMono"/>
+              </a:rPr>
+              <a:t> - ЧУМ</a:t>
+            </a:r>
+            <a:endParaRPr lang="en-US" sz="3600" b="0" i="0" dirty="0">
+              <a:solidFill>
+                <a:srgbClr val="000000"/>
+              </a:solidFill>
+              <a:effectLst/>
+              <a:latin typeface="DejaVuSansMono"/>
+            </a:endParaRPr>
+          </a:p>
+        </p:txBody>
+      </p:sp>
+    </p:spTree>
+    <p:extLst>
+      <p:ext uri="{BB962C8B-B14F-4D97-AF65-F5344CB8AC3E}">
+        <p14:creationId xmlns:p14="http://schemas.microsoft.com/office/powerpoint/2010/main" val="1285223150"/>
+      </p:ext>
+    </p:extLst>
+  </p:cSld>
+  <p:clrMapOvr>
+    <a:masterClrMapping/>
+  </p:clrMapOvr>
+</p:sld>
+</file>
+
+<file path=ppt/slides/slide11.xml><?xml version="1.0" encoding="utf-8"?>
+<p:sld xmlns:a="http://schemas.openxmlformats.org/drawingml/2006/main" xmlns:r="http://schemas.openxmlformats.org/officeDocument/2006/relationships" xmlns:p="http://schemas.openxmlformats.org/presentationml/2006/main">
+  <p:cSld>
+    <p:spTree>
+      <p:nvGrpSpPr>
+        <p:cNvPr id="1" name=""/>
+        <p:cNvGrpSpPr/>
+        <p:nvPr/>
+      </p:nvGrpSpPr>
+      <p:grpSpPr>
+        <a:xfrm>
+          <a:off x="0" y="0"/>
+          <a:ext cx="0" cy="0"/>
+          <a:chOff x="0" y="0"/>
+          <a:chExt cx="0" cy="0"/>
+        </a:xfrm>
+      </p:grpSpPr>
+      <p:sp>
+        <p:nvSpPr>
+          <p:cNvPr id="2" name="Title 1">
+            <a:extLst>
+              <a:ext uri="{FF2B5EF4-FFF2-40B4-BE49-F238E27FC236}">
+                <a16:creationId xmlns:a16="http://schemas.microsoft.com/office/drawing/2014/main" id="{0A0F21CF-1EF4-4EB3-8F44-AA3D5C508EDE}"/>
+              </a:ext>
+            </a:extLst>
+          </p:cNvPr>
+          <p:cNvSpPr>
+            <a:spLocks noGrp="1"/>
+          </p:cNvSpPr>
+          <p:nvPr>
+            <p:ph type="title"/>
+          </p:nvPr>
+        </p:nvSpPr>
+        <p:spPr>
+          <a:xfrm>
+            <a:off x="871218" y="642446"/>
+            <a:ext cx="5224781" cy="1354217"/>
+          </a:xfrm>
+        </p:spPr>
+        <p:txBody>
+          <a:bodyPr/>
+          <a:lstStyle/>
+          <a:p>
+            <a:r>
+              <a:rPr lang="en-US" dirty="0"/>
+              <a:t>std::</a:t>
+            </a:r>
+            <a:r>
+              <a:rPr lang="en-US" dirty="0" err="1"/>
+              <a:t>strong_ordering</a:t>
+            </a:r>
+            <a:endParaRPr lang="ru-RU" dirty="0"/>
+          </a:p>
+        </p:txBody>
+      </p:sp>
+      <p:sp>
+        <p:nvSpPr>
+          <p:cNvPr id="3" name="Text Placeholder 2">
+            <a:extLst>
+              <a:ext uri="{FF2B5EF4-FFF2-40B4-BE49-F238E27FC236}">
+                <a16:creationId xmlns:a16="http://schemas.microsoft.com/office/drawing/2014/main" id="{316F7BCC-BE61-4ABC-A29C-2B4A2A59003A}"/>
+              </a:ext>
+            </a:extLst>
+          </p:cNvPr>
+          <p:cNvSpPr>
+            <a:spLocks noGrp="1"/>
+          </p:cNvSpPr>
+          <p:nvPr>
+            <p:ph type="body" idx="1"/>
+          </p:nvPr>
+        </p:nvSpPr>
+        <p:spPr>
+          <a:xfrm>
+            <a:off x="966469" y="2667000"/>
+            <a:ext cx="10259060" cy="1723549"/>
+          </a:xfrm>
+        </p:spPr>
+        <p:txBody>
+          <a:bodyPr/>
+          <a:lstStyle/>
+          <a:p>
+            <a:r>
+              <a:rPr lang="en-US" dirty="0"/>
+              <a:t>std::</a:t>
+            </a:r>
+            <a:r>
+              <a:rPr lang="en-US" dirty="0" err="1"/>
+              <a:t>strong_ordering</a:t>
+            </a:r>
+            <a:r>
+              <a:rPr lang="en-US" dirty="0"/>
+              <a:t>::less</a:t>
+            </a:r>
+          </a:p>
+          <a:p>
+            <a:r>
+              <a:rPr lang="en-US" dirty="0"/>
+              <a:t>std::</a:t>
+            </a:r>
+            <a:r>
+              <a:rPr lang="en-US" dirty="0" err="1"/>
+              <a:t>strong_ordering</a:t>
+            </a:r>
+            <a:r>
+              <a:rPr lang="en-US" dirty="0"/>
+              <a:t>::greater</a:t>
+            </a:r>
+            <a:endParaRPr lang="ru-RU" dirty="0"/>
+          </a:p>
+          <a:p>
+            <a:r>
+              <a:rPr lang="en-US" dirty="0"/>
+              <a:t>std::</a:t>
+            </a:r>
+            <a:r>
+              <a:rPr lang="en-US" dirty="0" err="1"/>
+              <a:t>strong_ordering</a:t>
+            </a:r>
+            <a:r>
+              <a:rPr lang="en-US" dirty="0"/>
+              <a:t>::equal</a:t>
+            </a:r>
+            <a:endParaRPr lang="ru-RU" dirty="0"/>
+          </a:p>
+          <a:p>
+            <a:r>
+              <a:rPr lang="en-US" dirty="0"/>
+              <a:t>std::</a:t>
+            </a:r>
+            <a:r>
+              <a:rPr lang="en-US" dirty="0" err="1"/>
+              <a:t>strong_ordering</a:t>
+            </a:r>
+            <a:r>
+              <a:rPr lang="en-US" dirty="0"/>
+              <a:t>::equivalent</a:t>
+            </a:r>
+            <a:endParaRPr lang="ru-RU" dirty="0"/>
+          </a:p>
+        </p:txBody>
+      </p:sp>
+    </p:spTree>
+    <p:extLst>
+      <p:ext uri="{BB962C8B-B14F-4D97-AF65-F5344CB8AC3E}">
+        <p14:creationId xmlns:p14="http://schemas.microsoft.com/office/powerpoint/2010/main" val="624609028"/>
+      </p:ext>
+    </p:extLst>
+  </p:cSld>
+  <p:clrMapOvr>
+    <a:masterClrMapping/>
+  </p:clrMapOvr>
+</p:sld>
+</file>
+
+<file path=ppt/slides/slide12.xml><?xml version="1.0" encoding="utf-8"?>
+<p:sld xmlns:a="http://schemas.openxmlformats.org/drawingml/2006/main" xmlns:r="http://schemas.openxmlformats.org/officeDocument/2006/relationships" xmlns:p="http://schemas.openxmlformats.org/presentationml/2006/main">
+  <p:cSld>
+    <p:spTree>
+      <p:nvGrpSpPr>
+        <p:cNvPr id="1" name=""/>
+        <p:cNvGrpSpPr/>
+        <p:nvPr/>
+      </p:nvGrpSpPr>
+      <p:grpSpPr>
+        <a:xfrm>
+          <a:off x="0" y="0"/>
+          <a:ext cx="0" cy="0"/>
+          <a:chOff x="0" y="0"/>
+          <a:chExt cx="0" cy="0"/>
+        </a:xfrm>
+      </p:grpSpPr>
+      <p:sp>
+        <p:nvSpPr>
+          <p:cNvPr id="2" name="Title 1">
+            <a:extLst>
+              <a:ext uri="{FF2B5EF4-FFF2-40B4-BE49-F238E27FC236}">
+                <a16:creationId xmlns:a16="http://schemas.microsoft.com/office/drawing/2014/main" id="{0A0F21CF-1EF4-4EB3-8F44-AA3D5C508EDE}"/>
+              </a:ext>
+            </a:extLst>
+          </p:cNvPr>
+          <p:cNvSpPr>
+            <a:spLocks noGrp="1"/>
+          </p:cNvSpPr>
+          <p:nvPr>
+            <p:ph type="title"/>
+          </p:nvPr>
+        </p:nvSpPr>
+        <p:spPr>
+          <a:xfrm>
+            <a:off x="871218" y="642446"/>
+            <a:ext cx="5224781" cy="677108"/>
+          </a:xfrm>
+        </p:spPr>
+        <p:txBody>
+          <a:bodyPr/>
+          <a:lstStyle/>
+          <a:p>
+            <a:r>
+              <a:rPr lang="en-US" dirty="0"/>
+              <a:t>std::</a:t>
+            </a:r>
+            <a:r>
+              <a:rPr lang="en-US" dirty="0" err="1"/>
+              <a:t>weak_ordering</a:t>
+            </a:r>
+            <a:endParaRPr lang="ru-RU" dirty="0"/>
+          </a:p>
+        </p:txBody>
+      </p:sp>
+      <p:sp>
+        <p:nvSpPr>
+          <p:cNvPr id="3" name="Text Placeholder 2">
+            <a:extLst>
+              <a:ext uri="{FF2B5EF4-FFF2-40B4-BE49-F238E27FC236}">
+                <a16:creationId xmlns:a16="http://schemas.microsoft.com/office/drawing/2014/main" id="{316F7BCC-BE61-4ABC-A29C-2B4A2A59003A}"/>
+              </a:ext>
+            </a:extLst>
+          </p:cNvPr>
+          <p:cNvSpPr>
+            <a:spLocks noGrp="1"/>
+          </p:cNvSpPr>
+          <p:nvPr>
+            <p:ph type="body" idx="1"/>
+          </p:nvPr>
+        </p:nvSpPr>
+        <p:spPr>
+          <a:xfrm>
+            <a:off x="966469" y="2667000"/>
+            <a:ext cx="10259060" cy="2154436"/>
+          </a:xfrm>
+        </p:spPr>
+        <p:txBody>
+          <a:bodyPr/>
+          <a:lstStyle/>
+          <a:p>
+            <a:r>
+              <a:rPr lang="en-US" dirty="0"/>
+              <a:t>std::</a:t>
+            </a:r>
+            <a:r>
+              <a:rPr lang="en-US" dirty="0" err="1"/>
+              <a:t>weak_ordering</a:t>
+            </a:r>
+            <a:r>
+              <a:rPr lang="en-US" dirty="0"/>
+              <a:t>::less</a:t>
+            </a:r>
+          </a:p>
+          <a:p>
+            <a:r>
+              <a:rPr lang="en-US" dirty="0"/>
+              <a:t>std::</a:t>
+            </a:r>
+            <a:r>
+              <a:rPr lang="en-US" dirty="0" err="1"/>
+              <a:t>weak_ordering</a:t>
+            </a:r>
+            <a:r>
+              <a:rPr lang="en-US" dirty="0"/>
+              <a:t>::greater</a:t>
+            </a:r>
+            <a:endParaRPr lang="ru-RU" dirty="0"/>
+          </a:p>
+          <a:p>
+            <a:r>
+              <a:rPr lang="en-US" dirty="0"/>
+              <a:t>std::</a:t>
+            </a:r>
+            <a:r>
+              <a:rPr lang="en-US" dirty="0" err="1"/>
+              <a:t>weak_ordering</a:t>
+            </a:r>
+            <a:r>
+              <a:rPr lang="en-US" dirty="0"/>
+              <a:t>::equivalent</a:t>
+            </a:r>
+          </a:p>
+          <a:p>
+            <a:endParaRPr lang="en-US" dirty="0"/>
+          </a:p>
+          <a:p>
+            <a:r>
+              <a:rPr lang="en-US" dirty="0"/>
+              <a:t>(</a:t>
+            </a:r>
+            <a:r>
+              <a:rPr lang="ru-RU" dirty="0"/>
+              <a:t>Не существует </a:t>
+            </a:r>
+            <a:r>
+              <a:rPr lang="en-US" dirty="0"/>
+              <a:t>std::</a:t>
+            </a:r>
+            <a:r>
+              <a:rPr lang="en-US" dirty="0" err="1"/>
+              <a:t>weak_ordering</a:t>
+            </a:r>
+            <a:r>
+              <a:rPr lang="en-US" dirty="0"/>
+              <a:t>::equal)</a:t>
+            </a:r>
+            <a:endParaRPr lang="ru-RU" dirty="0"/>
+          </a:p>
+        </p:txBody>
+      </p:sp>
+    </p:spTree>
+    <p:extLst>
+      <p:ext uri="{BB962C8B-B14F-4D97-AF65-F5344CB8AC3E}">
+        <p14:creationId xmlns:p14="http://schemas.microsoft.com/office/powerpoint/2010/main" val="1209403610"/>
+      </p:ext>
+    </p:extLst>
+  </p:cSld>
+  <p:clrMapOvr>
+    <a:masterClrMapping/>
+  </p:clrMapOvr>
+</p:sld>
+</file>
+
+<file path=ppt/slides/slide13.xml><?xml version="1.0" encoding="utf-8"?>
+<p:sld xmlns:a="http://schemas.openxmlformats.org/drawingml/2006/main" xmlns:r="http://schemas.openxmlformats.org/officeDocument/2006/relationships" xmlns:p="http://schemas.openxmlformats.org/presentationml/2006/main">
+  <p:cSld>
+    <p:spTree>
+      <p:nvGrpSpPr>
+        <p:cNvPr id="1" name=""/>
+        <p:cNvGrpSpPr/>
+        <p:nvPr/>
+      </p:nvGrpSpPr>
+      <p:grpSpPr>
+        <a:xfrm>
+          <a:off x="0" y="0"/>
+          <a:ext cx="0" cy="0"/>
+          <a:chOff x="0" y="0"/>
+          <a:chExt cx="0" cy="0"/>
+        </a:xfrm>
+      </p:grpSpPr>
+      <p:sp>
+        <p:nvSpPr>
+          <p:cNvPr id="2" name="Title 1">
+            <a:extLst>
+              <a:ext uri="{FF2B5EF4-FFF2-40B4-BE49-F238E27FC236}">
+                <a16:creationId xmlns:a16="http://schemas.microsoft.com/office/drawing/2014/main" id="{0A0F21CF-1EF4-4EB3-8F44-AA3D5C508EDE}"/>
+              </a:ext>
+            </a:extLst>
+          </p:cNvPr>
+          <p:cNvSpPr>
+            <a:spLocks noGrp="1"/>
+          </p:cNvSpPr>
+          <p:nvPr>
+            <p:ph type="title"/>
+          </p:nvPr>
+        </p:nvSpPr>
+        <p:spPr>
+          <a:xfrm>
+            <a:off x="871218" y="642446"/>
+            <a:ext cx="5224781" cy="677108"/>
+          </a:xfrm>
+        </p:spPr>
+        <p:txBody>
+          <a:bodyPr/>
+          <a:lstStyle/>
+          <a:p>
+            <a:r>
+              <a:rPr lang="en-US" dirty="0"/>
+              <a:t>std::</a:t>
+            </a:r>
+            <a:r>
+              <a:rPr lang="en-US" dirty="0" err="1"/>
+              <a:t>partial_ordering</a:t>
+            </a:r>
+            <a:endParaRPr lang="ru-RU" dirty="0"/>
+          </a:p>
+        </p:txBody>
+      </p:sp>
+      <p:sp>
+        <p:nvSpPr>
+          <p:cNvPr id="3" name="Text Placeholder 2">
+            <a:extLst>
+              <a:ext uri="{FF2B5EF4-FFF2-40B4-BE49-F238E27FC236}">
+                <a16:creationId xmlns:a16="http://schemas.microsoft.com/office/drawing/2014/main" id="{316F7BCC-BE61-4ABC-A29C-2B4A2A59003A}"/>
+              </a:ext>
+            </a:extLst>
+          </p:cNvPr>
+          <p:cNvSpPr>
+            <a:spLocks noGrp="1"/>
+          </p:cNvSpPr>
+          <p:nvPr>
+            <p:ph type="body" idx="1"/>
+          </p:nvPr>
+        </p:nvSpPr>
+        <p:spPr>
+          <a:xfrm>
+            <a:off x="966469" y="2667000"/>
+            <a:ext cx="10259060" cy="3016210"/>
+          </a:xfrm>
+        </p:spPr>
+        <p:txBody>
+          <a:bodyPr/>
+          <a:lstStyle/>
+          <a:p>
+            <a:r>
+              <a:rPr lang="en-US" dirty="0"/>
+              <a:t>std::</a:t>
+            </a:r>
+            <a:r>
+              <a:rPr lang="en-US" dirty="0" err="1"/>
+              <a:t>partial_ordering</a:t>
+            </a:r>
+            <a:r>
+              <a:rPr lang="en-US" dirty="0"/>
+              <a:t>::less</a:t>
+            </a:r>
+          </a:p>
+          <a:p>
+            <a:r>
+              <a:rPr lang="en-US" dirty="0"/>
+              <a:t>std::</a:t>
+            </a:r>
+            <a:r>
+              <a:rPr lang="en-US" dirty="0" err="1"/>
+              <a:t>partial_ordering</a:t>
+            </a:r>
+            <a:r>
+              <a:rPr lang="en-US" dirty="0"/>
+              <a:t>::greater</a:t>
+            </a:r>
+          </a:p>
+          <a:p>
+            <a:r>
+              <a:rPr lang="en-US" dirty="0"/>
+              <a:t>std::</a:t>
+            </a:r>
+            <a:r>
+              <a:rPr lang="en-US" dirty="0" err="1"/>
+              <a:t>partial_ordering</a:t>
+            </a:r>
+            <a:r>
+              <a:rPr lang="en-US" dirty="0"/>
+              <a:t>::equivalent</a:t>
+            </a:r>
+          </a:p>
+          <a:p>
+            <a:r>
+              <a:rPr lang="en-US" dirty="0">
+                <a:solidFill>
+                  <a:srgbClr val="00B050"/>
+                </a:solidFill>
+              </a:rPr>
+              <a:t>std::</a:t>
+            </a:r>
+            <a:r>
+              <a:rPr lang="en-US" dirty="0" err="1">
+                <a:solidFill>
+                  <a:srgbClr val="00B050"/>
+                </a:solidFill>
+              </a:rPr>
+              <a:t>partial_ordering</a:t>
+            </a:r>
+            <a:r>
+              <a:rPr lang="en-US" dirty="0">
+                <a:solidFill>
+                  <a:srgbClr val="00B050"/>
+                </a:solidFill>
+              </a:rPr>
+              <a:t>::unordered</a:t>
+            </a:r>
+          </a:p>
+          <a:p>
+            <a:endParaRPr lang="en-US" dirty="0"/>
+          </a:p>
+          <a:p>
+            <a:r>
+              <a:rPr lang="en-US" dirty="0"/>
+              <a:t>(</a:t>
+            </a:r>
+            <a:r>
+              <a:rPr lang="ru-RU" dirty="0"/>
+              <a:t>Не существует </a:t>
+            </a:r>
+            <a:r>
+              <a:rPr lang="en-US" dirty="0"/>
+              <a:t>std::</a:t>
+            </a:r>
+            <a:r>
+              <a:rPr lang="en-US" dirty="0" err="1"/>
+              <a:t>partial_ordering</a:t>
+            </a:r>
+            <a:r>
+              <a:rPr lang="en-US" dirty="0"/>
+              <a:t>::equal, </a:t>
+            </a:r>
+            <a:r>
+              <a:rPr lang="ru-RU" dirty="0"/>
+              <a:t>зато есть </a:t>
+            </a:r>
+            <a:r>
+              <a:rPr lang="en-US" dirty="0"/>
+              <a:t>unordered)</a:t>
+            </a:r>
+            <a:endParaRPr lang="ru-RU" dirty="0"/>
+          </a:p>
+        </p:txBody>
+      </p:sp>
+    </p:spTree>
+    <p:extLst>
+      <p:ext uri="{BB962C8B-B14F-4D97-AF65-F5344CB8AC3E}">
+        <p14:creationId xmlns:p14="http://schemas.microsoft.com/office/powerpoint/2010/main" val="1511520986"/>
+      </p:ext>
+    </p:extLst>
+  </p:cSld>
+  <p:clrMapOvr>
+    <a:masterClrMapping/>
+  </p:clrMapOvr>
+</p:sld>
+</file>
+
+<file path=ppt/slides/slide14.xml><?xml version="1.0" encoding="utf-8"?>
+<p:sld xmlns:a="http://schemas.openxmlformats.org/drawingml/2006/main" xmlns:r="http://schemas.openxmlformats.org/officeDocument/2006/relationships" xmlns:p="http://schemas.openxmlformats.org/presentationml/2006/main">
+  <p:cSld>
+    <p:spTree>
+      <p:nvGrpSpPr>
+        <p:cNvPr id="1" name=""/>
+        <p:cNvGrpSpPr/>
+        <p:nvPr/>
+      </p:nvGrpSpPr>
+      <p:grpSpPr>
+        <a:xfrm>
+          <a:off x="0" y="0"/>
+          <a:ext cx="0" cy="0"/>
+          <a:chOff x="0" y="0"/>
+          <a:chExt cx="0" cy="0"/>
+        </a:xfrm>
+      </p:grpSpPr>
+      <p:sp>
+        <p:nvSpPr>
+          <p:cNvPr id="2" name="Title 1">
+            <a:extLst>
+              <a:ext uri="{FF2B5EF4-FFF2-40B4-BE49-F238E27FC236}">
+                <a16:creationId xmlns:a16="http://schemas.microsoft.com/office/drawing/2014/main" id="{DF1CE44A-AEB0-4263-99F9-8734472F5706}"/>
+              </a:ext>
+            </a:extLst>
+          </p:cNvPr>
+          <p:cNvSpPr>
+            <a:spLocks noGrp="1"/>
+          </p:cNvSpPr>
+          <p:nvPr>
+            <p:ph type="title"/>
+          </p:nvPr>
+        </p:nvSpPr>
+        <p:spPr/>
+        <p:txBody>
+          <a:bodyPr/>
+          <a:lstStyle/>
+          <a:p>
+            <a:r>
+              <a:rPr lang="ru-RU" dirty="0"/>
+              <a:t>Сравнения</a:t>
+            </a:r>
+          </a:p>
+        </p:txBody>
+      </p:sp>
+      <p:sp>
+        <p:nvSpPr>
+          <p:cNvPr id="3" name="Text Placeholder 2">
+            <a:extLst>
+              <a:ext uri="{FF2B5EF4-FFF2-40B4-BE49-F238E27FC236}">
+                <a16:creationId xmlns:a16="http://schemas.microsoft.com/office/drawing/2014/main" id="{54B0941B-B7C2-4B2D-85F1-5FE9E8E2CBBE}"/>
+              </a:ext>
+            </a:extLst>
+          </p:cNvPr>
+          <p:cNvSpPr>
+            <a:spLocks noGrp="1"/>
+          </p:cNvSpPr>
+          <p:nvPr>
+            <p:ph type="body" idx="1"/>
+          </p:nvPr>
+        </p:nvSpPr>
+        <p:spPr>
+          <a:xfrm>
+            <a:off x="966470" y="1338406"/>
+            <a:ext cx="10259060" cy="5601533"/>
+          </a:xfrm>
+        </p:spPr>
+        <p:txBody>
+          <a:bodyPr/>
+          <a:lstStyle/>
+          <a:p>
+            <a:pPr marL="457200" indent="-457200">
+              <a:buFont typeface="Arial" panose="020B0604020202020204" pitchFamily="34" charset="0"/>
+              <a:buChar char="•"/>
+            </a:pPr>
+            <a:r>
+              <a:rPr lang="ru-RU" dirty="0"/>
+              <a:t>Умеем выражать все сравнения через </a:t>
+            </a:r>
+            <a:r>
+              <a:rPr lang="en-US" dirty="0">
+                <a:sym typeface="Wingdings" panose="05000000000000000000" pitchFamily="2" charset="2"/>
+              </a:rPr>
+              <a:t>&lt;=&gt; </a:t>
+            </a:r>
+            <a:r>
+              <a:rPr lang="ru-RU" dirty="0">
+                <a:sym typeface="Wingdings" panose="05000000000000000000" pitchFamily="2" charset="2"/>
+              </a:rPr>
+              <a:t>и </a:t>
+            </a:r>
+            <a:r>
+              <a:rPr lang="en-US" dirty="0">
+                <a:sym typeface="Wingdings" panose="05000000000000000000" pitchFamily="2" charset="2"/>
+              </a:rPr>
+              <a:t>==:</a:t>
+            </a:r>
+          </a:p>
+          <a:p>
+            <a:pPr marL="457200" indent="-457200">
+              <a:buFont typeface="Arial" panose="020B0604020202020204" pitchFamily="34" charset="0"/>
+              <a:buChar char="•"/>
+            </a:pPr>
+            <a:endParaRPr lang="en-US" dirty="0">
+              <a:sym typeface="Wingdings" panose="05000000000000000000" pitchFamily="2" charset="2"/>
+            </a:endParaRPr>
+          </a:p>
+          <a:p>
+            <a:pPr marL="457200" indent="-457200">
+              <a:buFont typeface="Arial" panose="020B0604020202020204" pitchFamily="34" charset="0"/>
+              <a:buChar char="•"/>
+            </a:pPr>
+            <a:endParaRPr lang="en-US" dirty="0">
+              <a:sym typeface="Wingdings" panose="05000000000000000000" pitchFamily="2" charset="2"/>
+            </a:endParaRPr>
+          </a:p>
+          <a:p>
+            <a:pPr marL="457200" indent="-457200">
+              <a:buFont typeface="Arial" panose="020B0604020202020204" pitchFamily="34" charset="0"/>
+              <a:buChar char="•"/>
+            </a:pPr>
+            <a:endParaRPr lang="en-US" dirty="0">
+              <a:sym typeface="Wingdings" panose="05000000000000000000" pitchFamily="2" charset="2"/>
+            </a:endParaRPr>
+          </a:p>
+          <a:p>
+            <a:pPr marL="457200" indent="-457200">
+              <a:buFont typeface="Arial" panose="020B0604020202020204" pitchFamily="34" charset="0"/>
+              <a:buChar char="•"/>
+            </a:pPr>
+            <a:endParaRPr lang="en-US" dirty="0">
+              <a:sym typeface="Wingdings" panose="05000000000000000000" pitchFamily="2" charset="2"/>
+            </a:endParaRPr>
+          </a:p>
+          <a:p>
+            <a:pPr marL="457200" indent="-457200">
+              <a:buFont typeface="Arial" panose="020B0604020202020204" pitchFamily="34" charset="0"/>
+              <a:buChar char="•"/>
+            </a:pPr>
+            <a:endParaRPr lang="en-US" dirty="0"/>
+          </a:p>
+          <a:p>
+            <a:pPr marL="457200" indent="-457200">
+              <a:buFont typeface="Arial" panose="020B0604020202020204" pitchFamily="34" charset="0"/>
+              <a:buChar char="•"/>
+            </a:pPr>
+            <a:endParaRPr lang="en-US" dirty="0"/>
+          </a:p>
+          <a:p>
+            <a:pPr marL="457200" indent="-457200">
+              <a:buFont typeface="Arial" panose="020B0604020202020204" pitchFamily="34" charset="0"/>
+              <a:buChar char="•"/>
+            </a:pPr>
+            <a:endParaRPr lang="en-US" dirty="0"/>
+          </a:p>
+          <a:p>
+            <a:pPr marL="457200" indent="-457200">
+              <a:buFont typeface="Arial" panose="020B0604020202020204" pitchFamily="34" charset="0"/>
+              <a:buChar char="•"/>
+            </a:pPr>
+            <a:endParaRPr lang="en-US" dirty="0"/>
+          </a:p>
+          <a:p>
+            <a:pPr marL="457200" indent="-457200">
+              <a:buFont typeface="Arial" panose="020B0604020202020204" pitchFamily="34" charset="0"/>
+              <a:buChar char="•"/>
+            </a:pPr>
+            <a:endParaRPr lang="en-US" dirty="0"/>
+          </a:p>
+          <a:p>
+            <a:pPr marL="457200" indent="-457200">
+              <a:buFont typeface="Arial" panose="020B0604020202020204" pitchFamily="34" charset="0"/>
+              <a:buChar char="•"/>
+            </a:pPr>
+            <a:endParaRPr lang="en-US" dirty="0"/>
+          </a:p>
+          <a:p>
+            <a:pPr marL="457200" indent="-457200">
+              <a:buFont typeface="Arial" panose="020B0604020202020204" pitchFamily="34" charset="0"/>
+              <a:buChar char="•"/>
+            </a:pPr>
+            <a:r>
+              <a:rPr lang="ru-RU" dirty="0">
+                <a:hlinkClick r:id="rId2"/>
+              </a:rPr>
+              <a:t>Пример</a:t>
+            </a:r>
+            <a:r>
+              <a:rPr lang="ru-RU" dirty="0"/>
+              <a:t> (совет</a:t>
+            </a:r>
+            <a:r>
+              <a:rPr lang="en-US" dirty="0"/>
+              <a:t>: </a:t>
+            </a:r>
+            <a:r>
+              <a:rPr lang="ru-RU" dirty="0"/>
+              <a:t>перейти в </a:t>
+            </a:r>
+            <a:r>
+              <a:rPr lang="en-US" dirty="0" err="1"/>
+              <a:t>cpp</a:t>
+            </a:r>
+            <a:r>
+              <a:rPr lang="en-US" dirty="0"/>
+              <a:t> insights</a:t>
+            </a:r>
+            <a:r>
+              <a:rPr lang="ru-RU" dirty="0"/>
+              <a:t>)</a:t>
+            </a:r>
+          </a:p>
+          <a:p>
+            <a:pPr marL="457200" indent="-457200">
+              <a:buFont typeface="Arial" panose="020B0604020202020204" pitchFamily="34" charset="0"/>
+              <a:buChar char="•"/>
+            </a:pPr>
+            <a:endParaRPr lang="ru-RU" dirty="0"/>
+          </a:p>
+        </p:txBody>
+      </p:sp>
+      <p:pic>
+        <p:nvPicPr>
+          <p:cNvPr id="5" name="Picture 4">
+            <a:extLst>
+              <a:ext uri="{FF2B5EF4-FFF2-40B4-BE49-F238E27FC236}">
+                <a16:creationId xmlns:a16="http://schemas.microsoft.com/office/drawing/2014/main" id="{2B284C13-DEE9-482A-9C4F-B0BC20B0681C}"/>
+              </a:ext>
+            </a:extLst>
+          </p:cNvPr>
+          <p:cNvPicPr>
+            <a:picLocks noChangeAspect="1"/>
+          </p:cNvPicPr>
+          <p:nvPr/>
+        </p:nvPicPr>
+        <p:blipFill>
+          <a:blip r:embed="rId3"/>
+          <a:stretch>
+            <a:fillRect/>
+          </a:stretch>
+        </p:blipFill>
+        <p:spPr>
+          <a:xfrm>
+            <a:off x="3676328" y="1905000"/>
+            <a:ext cx="4839343" cy="3739492"/>
+          </a:xfrm>
+          <a:prstGeom prst="rect">
+            <a:avLst/>
+          </a:prstGeom>
+        </p:spPr>
+      </p:pic>
+    </p:spTree>
+    <p:extLst>
+      <p:ext uri="{BB962C8B-B14F-4D97-AF65-F5344CB8AC3E}">
+        <p14:creationId xmlns:p14="http://schemas.microsoft.com/office/powerpoint/2010/main" val="705093346"/>
+      </p:ext>
+    </p:extLst>
+  </p:cSld>
+  <p:clrMapOvr>
+    <a:masterClrMapping/>
+  </p:clrMapOvr>
+</p:sld>
+</file>
+
+<file path=ppt/slides/slide15.xml><?xml version="1.0" encoding="utf-8"?>
+<p:sld xmlns:a="http://schemas.openxmlformats.org/drawingml/2006/main" xmlns:r="http://schemas.openxmlformats.org/officeDocument/2006/relationships" xmlns:p="http://schemas.openxmlformats.org/presentationml/2006/main">
+  <p:cSld>
+    <p:spTree>
+      <p:nvGrpSpPr>
+        <p:cNvPr id="1" name=""/>
+        <p:cNvGrpSpPr/>
+        <p:nvPr/>
+      </p:nvGrpSpPr>
+      <p:grpSpPr>
+        <a:xfrm>
+          <a:off x="0" y="0"/>
+          <a:ext cx="0" cy="0"/>
+          <a:chOff x="0" y="0"/>
+          <a:chExt cx="0" cy="0"/>
+        </a:xfrm>
+      </p:grpSpPr>
+      <p:sp>
+        <p:nvSpPr>
+          <p:cNvPr id="2" name="Title 1">
+            <a:extLst>
+              <a:ext uri="{FF2B5EF4-FFF2-40B4-BE49-F238E27FC236}">
+                <a16:creationId xmlns:a16="http://schemas.microsoft.com/office/drawing/2014/main" id="{1B32E1C4-B00A-4C61-BBCB-25C4895EC0CB}"/>
+              </a:ext>
+            </a:extLst>
+          </p:cNvPr>
+          <p:cNvSpPr>
+            <a:spLocks noGrp="1"/>
+          </p:cNvSpPr>
+          <p:nvPr>
+            <p:ph type="title"/>
+          </p:nvPr>
+        </p:nvSpPr>
+        <p:spPr>
+          <a:xfrm>
+            <a:off x="871218" y="642447"/>
+            <a:ext cx="9949181" cy="881554"/>
+          </a:xfrm>
+        </p:spPr>
+        <p:txBody>
+          <a:bodyPr/>
+          <a:lstStyle/>
+          <a:p>
+            <a:r>
+              <a:rPr lang="ru-RU" dirty="0"/>
+              <a:t>Базовые и производные операторы</a:t>
+            </a:r>
+          </a:p>
+        </p:txBody>
+      </p:sp>
+      <p:pic>
+        <p:nvPicPr>
+          <p:cNvPr id="5" name="Picture 4">
+            <a:extLst>
+              <a:ext uri="{FF2B5EF4-FFF2-40B4-BE49-F238E27FC236}">
+                <a16:creationId xmlns:a16="http://schemas.microsoft.com/office/drawing/2014/main" id="{5A7309D9-1C2B-4669-99EB-7CA72B1A02E2}"/>
+              </a:ext>
+            </a:extLst>
+          </p:cNvPr>
+          <p:cNvPicPr>
+            <a:picLocks noChangeAspect="1"/>
+          </p:cNvPicPr>
+          <p:nvPr/>
+        </p:nvPicPr>
+        <p:blipFill>
+          <a:blip r:embed="rId2"/>
+          <a:stretch>
+            <a:fillRect/>
+          </a:stretch>
+        </p:blipFill>
+        <p:spPr>
+          <a:xfrm>
+            <a:off x="504498" y="2057400"/>
+            <a:ext cx="11183004" cy="2357565"/>
+          </a:xfrm>
+          <a:prstGeom prst="rect">
+            <a:avLst/>
+          </a:prstGeom>
+        </p:spPr>
+      </p:pic>
+    </p:spTree>
+    <p:extLst>
+      <p:ext uri="{BB962C8B-B14F-4D97-AF65-F5344CB8AC3E}">
+        <p14:creationId xmlns:p14="http://schemas.microsoft.com/office/powerpoint/2010/main" val="779518578"/>
+      </p:ext>
+    </p:extLst>
+  </p:cSld>
+  <p:clrMapOvr>
+    <a:masterClrMapping/>
+  </p:clrMapOvr>
+</p:sld>
+</file>
+
+<file path=ppt/slides/slide16.xml><?xml version="1.0" encoding="utf-8"?>
+<p:sld xmlns:a="http://schemas.openxmlformats.org/drawingml/2006/main" xmlns:r="http://schemas.openxmlformats.org/officeDocument/2006/relationships" xmlns:p="http://schemas.openxmlformats.org/presentationml/2006/main">
+  <p:cSld>
+    <p:spTree>
+      <p:nvGrpSpPr>
+        <p:cNvPr id="1" name=""/>
+        <p:cNvGrpSpPr/>
+        <p:nvPr/>
+      </p:nvGrpSpPr>
+      <p:grpSpPr>
+        <a:xfrm>
+          <a:off x="0" y="0"/>
+          <a:ext cx="0" cy="0"/>
+          <a:chOff x="0" y="0"/>
+          <a:chExt cx="0" cy="0"/>
+        </a:xfrm>
+      </p:grpSpPr>
+      <p:sp>
+        <p:nvSpPr>
+          <p:cNvPr id="2" name="Title 1">
+            <a:extLst>
+              <a:ext uri="{FF2B5EF4-FFF2-40B4-BE49-F238E27FC236}">
+                <a16:creationId xmlns:a16="http://schemas.microsoft.com/office/drawing/2014/main" id="{CA1CD7A5-906B-4681-9354-19E83A403B02}"/>
+              </a:ext>
+            </a:extLst>
+          </p:cNvPr>
+          <p:cNvSpPr>
+            <a:spLocks noGrp="1"/>
+          </p:cNvSpPr>
+          <p:nvPr>
+            <p:ph type="title"/>
+          </p:nvPr>
+        </p:nvSpPr>
+        <p:spPr/>
+        <p:txBody>
+          <a:bodyPr/>
+          <a:lstStyle/>
+          <a:p>
+            <a:r>
+              <a:rPr lang="ru-RU" dirty="0"/>
+              <a:t>Правила</a:t>
+            </a:r>
+            <a:r>
+              <a:rPr lang="en-US" dirty="0"/>
+              <a:t>:</a:t>
+            </a:r>
+            <a:endParaRPr lang="ru-RU" dirty="0"/>
+          </a:p>
+        </p:txBody>
+      </p:sp>
+      <p:sp>
+        <p:nvSpPr>
+          <p:cNvPr id="3" name="Text Placeholder 2">
+            <a:extLst>
+              <a:ext uri="{FF2B5EF4-FFF2-40B4-BE49-F238E27FC236}">
+                <a16:creationId xmlns:a16="http://schemas.microsoft.com/office/drawing/2014/main" id="{98034169-A389-4267-882D-F4228B1217DF}"/>
+              </a:ext>
+            </a:extLst>
+          </p:cNvPr>
+          <p:cNvSpPr>
+            <a:spLocks noGrp="1"/>
+          </p:cNvSpPr>
+          <p:nvPr>
+            <p:ph type="body" idx="1"/>
+          </p:nvPr>
+        </p:nvSpPr>
+        <p:spPr>
+          <a:xfrm>
+            <a:off x="871219" y="1822455"/>
+            <a:ext cx="10259060" cy="4308872"/>
+          </a:xfrm>
+        </p:spPr>
+        <p:txBody>
+          <a:bodyPr/>
+          <a:lstStyle/>
+          <a:p>
+            <a:pPr algn="l">
+              <a:buFont typeface="Arial" panose="020B0604020202020204" pitchFamily="34" charset="0"/>
+              <a:buChar char="•"/>
+            </a:pPr>
+            <a:r>
+              <a:rPr lang="ru-RU" b="0" i="0" dirty="0">
+                <a:solidFill>
+                  <a:srgbClr val="333333"/>
+                </a:solidFill>
+                <a:effectLst/>
+                <a:latin typeface="-apple-system"/>
+              </a:rPr>
+              <a:t>Обращение доступно только для базовых операторов</a:t>
+            </a:r>
+          </a:p>
+          <a:p>
+            <a:pPr algn="l">
+              <a:buFont typeface="Arial" panose="020B0604020202020204" pitchFamily="34" charset="0"/>
+              <a:buChar char="•"/>
+            </a:pPr>
+            <a:r>
+              <a:rPr lang="ru-RU" b="0" i="0" dirty="0">
+                <a:solidFill>
+                  <a:srgbClr val="333333"/>
+                </a:solidFill>
+                <a:effectLst/>
+                <a:latin typeface="-apple-system"/>
+              </a:rPr>
+              <a:t>Переписываться могут только производные операторы (через соответствующие базовые)</a:t>
+            </a:r>
+          </a:p>
+          <a:p>
+            <a:pPr algn="l">
+              <a:buFont typeface="Arial" panose="020B0604020202020204" pitchFamily="34" charset="0"/>
+              <a:buChar char="•"/>
+            </a:pPr>
+            <a:r>
+              <a:rPr lang="ru-RU" b="0" i="0" dirty="0">
+                <a:solidFill>
+                  <a:srgbClr val="333333"/>
+                </a:solidFill>
+                <a:effectLst/>
+                <a:latin typeface="-apple-system"/>
+              </a:rPr>
+              <a:t>При поиске кандидатов за один проход ищутся все операторы с данным именем, а также все их обращённые и переписанные версии</a:t>
+            </a:r>
+          </a:p>
+          <a:p>
+            <a:pPr algn="l">
+              <a:buFont typeface="Arial" panose="020B0604020202020204" pitchFamily="34" charset="0"/>
+              <a:buChar char="•"/>
+            </a:pPr>
+            <a:r>
+              <a:rPr lang="ru-RU" b="0" i="0" dirty="0">
+                <a:solidFill>
+                  <a:srgbClr val="333333"/>
+                </a:solidFill>
+                <a:effectLst/>
+                <a:latin typeface="-apple-system"/>
+              </a:rPr>
+              <a:t>Если наилучший кандидат является переписанной или обращённой версией и при этом такая замена является недопустимой, программа считается некорректной.</a:t>
+            </a:r>
+          </a:p>
+          <a:p>
+            <a:endParaRPr lang="ru-RU" dirty="0"/>
+          </a:p>
+        </p:txBody>
+      </p:sp>
+    </p:spTree>
+    <p:extLst>
+      <p:ext uri="{BB962C8B-B14F-4D97-AF65-F5344CB8AC3E}">
+        <p14:creationId xmlns:p14="http://schemas.microsoft.com/office/powerpoint/2010/main" val="1079826632"/>
+      </p:ext>
+    </p:extLst>
+  </p:cSld>
+  <p:clrMapOvr>
+    <a:masterClrMapping/>
+  </p:clrMapOvr>
+</p:sld>
+</file>
+
+<file path=ppt/slides/slide17.xml><?xml version="1.0" encoding="utf-8"?>
+<p:sld xmlns:a="http://schemas.openxmlformats.org/drawingml/2006/main" xmlns:r="http://schemas.openxmlformats.org/officeDocument/2006/relationships" xmlns:p="http://schemas.openxmlformats.org/presentationml/2006/main">
+  <p:cSld>
+    <p:spTree>
+      <p:nvGrpSpPr>
+        <p:cNvPr id="1" name=""/>
+        <p:cNvGrpSpPr/>
+        <p:nvPr/>
+      </p:nvGrpSpPr>
+      <p:grpSpPr>
+        <a:xfrm>
+          <a:off x="0" y="0"/>
+          <a:ext cx="0" cy="0"/>
+          <a:chOff x="0" y="0"/>
+          <a:chExt cx="0" cy="0"/>
+        </a:xfrm>
+      </p:grpSpPr>
+      <p:sp>
+        <p:nvSpPr>
+          <p:cNvPr id="2" name="Title 1">
+            <a:extLst>
+              <a:ext uri="{FF2B5EF4-FFF2-40B4-BE49-F238E27FC236}">
+                <a16:creationId xmlns:a16="http://schemas.microsoft.com/office/drawing/2014/main" id="{AB6285B3-16B8-453A-94CB-538D318E0712}"/>
+              </a:ext>
+            </a:extLst>
+          </p:cNvPr>
+          <p:cNvSpPr>
+            <a:spLocks noGrp="1"/>
+          </p:cNvSpPr>
+          <p:nvPr>
+            <p:ph type="title"/>
+          </p:nvPr>
+        </p:nvSpPr>
+        <p:spPr>
+          <a:xfrm>
+            <a:off x="871218" y="642446"/>
+            <a:ext cx="4691381" cy="1354217"/>
+          </a:xfrm>
+        </p:spPr>
+        <p:txBody>
+          <a:bodyPr/>
+          <a:lstStyle/>
+          <a:p>
+            <a:r>
+              <a:rPr lang="ru-RU" dirty="0"/>
+              <a:t>Поиск кандидата</a:t>
+            </a:r>
+          </a:p>
+        </p:txBody>
+      </p:sp>
+      <p:sp>
+        <p:nvSpPr>
+          <p:cNvPr id="3" name="Text Placeholder 2">
+            <a:extLst>
+              <a:ext uri="{FF2B5EF4-FFF2-40B4-BE49-F238E27FC236}">
+                <a16:creationId xmlns:a16="http://schemas.microsoft.com/office/drawing/2014/main" id="{F2F293E0-FE3E-47EF-958F-3CF1876ACC20}"/>
+              </a:ext>
+            </a:extLst>
+          </p:cNvPr>
+          <p:cNvSpPr>
+            <a:spLocks noGrp="1"/>
+          </p:cNvSpPr>
+          <p:nvPr>
+            <p:ph type="body" idx="1"/>
+          </p:nvPr>
+        </p:nvSpPr>
+        <p:spPr>
+          <a:xfrm>
+            <a:off x="609600" y="5048891"/>
+            <a:ext cx="11092182" cy="1723549"/>
+          </a:xfrm>
+        </p:spPr>
+        <p:txBody>
+          <a:bodyPr/>
+          <a:lstStyle/>
+          <a:p>
+            <a:pPr marL="457200" indent="-457200">
+              <a:buFont typeface="Arial" panose="020B0604020202020204" pitchFamily="34" charset="0"/>
+              <a:buChar char="•"/>
+            </a:pPr>
+            <a:r>
+              <a:rPr lang="ru-RU" dirty="0"/>
+              <a:t>Столбец слева имеет больший приоритет чем столбец справа</a:t>
+            </a:r>
+          </a:p>
+          <a:p>
+            <a:pPr marL="457200" indent="-457200">
+              <a:buFont typeface="Arial" panose="020B0604020202020204" pitchFamily="34" charset="0"/>
+              <a:buChar char="•"/>
+            </a:pPr>
+            <a:r>
+              <a:rPr lang="ru-RU" dirty="0"/>
+              <a:t>Второй и третий столбец содержат только базовые операторы</a:t>
+            </a:r>
+          </a:p>
+        </p:txBody>
+      </p:sp>
+      <p:pic>
+        <p:nvPicPr>
+          <p:cNvPr id="5" name="Picture 4">
+            <a:extLst>
+              <a:ext uri="{FF2B5EF4-FFF2-40B4-BE49-F238E27FC236}">
+                <a16:creationId xmlns:a16="http://schemas.microsoft.com/office/drawing/2014/main" id="{AF0B3149-853D-412F-85DE-28FC282900D4}"/>
+              </a:ext>
+            </a:extLst>
+          </p:cNvPr>
+          <p:cNvPicPr>
+            <a:picLocks noChangeAspect="1"/>
+          </p:cNvPicPr>
+          <p:nvPr/>
+        </p:nvPicPr>
+        <p:blipFill>
+          <a:blip r:embed="rId2"/>
+          <a:stretch>
+            <a:fillRect/>
+          </a:stretch>
+        </p:blipFill>
+        <p:spPr>
+          <a:xfrm>
+            <a:off x="2121927" y="1418030"/>
+            <a:ext cx="7948146" cy="3531545"/>
+          </a:xfrm>
+          <a:prstGeom prst="rect">
+            <a:avLst/>
+          </a:prstGeom>
+        </p:spPr>
+      </p:pic>
+    </p:spTree>
+    <p:extLst>
+      <p:ext uri="{BB962C8B-B14F-4D97-AF65-F5344CB8AC3E}">
+        <p14:creationId xmlns:p14="http://schemas.microsoft.com/office/powerpoint/2010/main" val="3661528477"/>
+      </p:ext>
+    </p:extLst>
+  </p:cSld>
+  <p:clrMapOvr>
+    <a:masterClrMapping/>
+  </p:clrMapOvr>
+</p:sld>
+</file>
+
+<file path=ppt/slides/slide18.xml><?xml version="1.0" encoding="utf-8"?>
+<p:sld xmlns:a="http://schemas.openxmlformats.org/drawingml/2006/main" xmlns:r="http://schemas.openxmlformats.org/officeDocument/2006/relationships" xmlns:p="http://schemas.openxmlformats.org/presentationml/2006/main">
+  <p:cSld>
+    <p:spTree>
+      <p:nvGrpSpPr>
+        <p:cNvPr id="1" name=""/>
+        <p:cNvGrpSpPr/>
+        <p:nvPr/>
+      </p:nvGrpSpPr>
+      <p:grpSpPr>
+        <a:xfrm>
+          <a:off x="0" y="0"/>
+          <a:ext cx="0" cy="0"/>
+          <a:chOff x="0" y="0"/>
+          <a:chExt cx="0" cy="0"/>
+        </a:xfrm>
+      </p:grpSpPr>
+      <p:sp>
+        <p:nvSpPr>
+          <p:cNvPr id="2" name="Title 1">
+            <a:extLst>
+              <a:ext uri="{FF2B5EF4-FFF2-40B4-BE49-F238E27FC236}">
+                <a16:creationId xmlns:a16="http://schemas.microsoft.com/office/drawing/2014/main" id="{316BB2B0-E719-496F-8194-FA50789269B8}"/>
+              </a:ext>
+            </a:extLst>
+          </p:cNvPr>
+          <p:cNvSpPr>
+            <a:spLocks noGrp="1"/>
+          </p:cNvSpPr>
+          <p:nvPr>
+            <p:ph type="title"/>
+          </p:nvPr>
+        </p:nvSpPr>
+        <p:spPr/>
+        <p:txBody>
+          <a:bodyPr/>
+          <a:lstStyle/>
+          <a:p>
+            <a:r>
+              <a:rPr lang="ru-RU" dirty="0"/>
+              <a:t>Бонус</a:t>
+            </a:r>
+          </a:p>
+        </p:txBody>
+      </p:sp>
+      <p:sp>
+        <p:nvSpPr>
+          <p:cNvPr id="3" name="Text Placeholder 2">
+            <a:extLst>
+              <a:ext uri="{FF2B5EF4-FFF2-40B4-BE49-F238E27FC236}">
+                <a16:creationId xmlns:a16="http://schemas.microsoft.com/office/drawing/2014/main" id="{DE15669E-1F45-4BB7-BAAB-200028F44854}"/>
+              </a:ext>
+            </a:extLst>
+          </p:cNvPr>
+          <p:cNvSpPr>
+            <a:spLocks noGrp="1"/>
+          </p:cNvSpPr>
+          <p:nvPr>
+            <p:ph type="body" idx="1"/>
+          </p:nvPr>
+        </p:nvSpPr>
+        <p:spPr>
+          <a:xfrm>
+            <a:off x="871219" y="2782669"/>
+            <a:ext cx="10259060" cy="2154436"/>
+          </a:xfrm>
+        </p:spPr>
+        <p:txBody>
+          <a:bodyPr/>
+          <a:lstStyle/>
+          <a:p>
+            <a:pPr marL="457200" indent="-457200">
+              <a:buFont typeface="Arial" panose="020B0604020202020204" pitchFamily="34" charset="0"/>
+              <a:buChar char="•"/>
+            </a:pPr>
+            <a:r>
+              <a:rPr lang="ru-RU" dirty="0"/>
+              <a:t>Можно попросить сгенерировать оператор </a:t>
+            </a:r>
+            <a:r>
+              <a:rPr lang="en-US" dirty="0"/>
+              <a:t>&lt;=&gt;, </a:t>
+            </a:r>
+            <a:r>
+              <a:rPr lang="ru-RU" dirty="0"/>
+              <a:t>тогда сравнение будет лексикографическое</a:t>
+            </a:r>
+          </a:p>
+          <a:p>
+            <a:pPr marL="457200" indent="-457200">
+              <a:buFont typeface="Arial" panose="020B0604020202020204" pitchFamily="34" charset="0"/>
+              <a:buChar char="•"/>
+            </a:pPr>
+            <a:r>
+              <a:rPr lang="ru-RU" dirty="0"/>
+              <a:t>Оператор </a:t>
+            </a:r>
+            <a:r>
+              <a:rPr lang="en-US" dirty="0"/>
+              <a:t>== </a:t>
+            </a:r>
+            <a:r>
+              <a:rPr lang="ru-RU" dirty="0"/>
+              <a:t>может быть тоже неявно сгенерирован</a:t>
+            </a:r>
+          </a:p>
+          <a:p>
+            <a:pPr marL="457200" indent="-457200">
+              <a:buFont typeface="Arial" panose="020B0604020202020204" pitchFamily="34" charset="0"/>
+              <a:buChar char="•"/>
+            </a:pPr>
+            <a:r>
+              <a:rPr lang="ru-RU" dirty="0"/>
+              <a:t>Благодаря обращению операторы сравнения могут быть функциями-членами класса</a:t>
+            </a:r>
+          </a:p>
+        </p:txBody>
+      </p:sp>
+    </p:spTree>
+    <p:extLst>
+      <p:ext uri="{BB962C8B-B14F-4D97-AF65-F5344CB8AC3E}">
+        <p14:creationId xmlns:p14="http://schemas.microsoft.com/office/powerpoint/2010/main" val="1158791831"/>
+      </p:ext>
+    </p:extLst>
+  </p:cSld>
+  <p:clrMapOvr>
+    <a:masterClrMapping/>
+  </p:clrMapOvr>
+</p:sld>
+</file>
+
+<file path=ppt/slides/slide19.xml><?xml version="1.0" encoding="utf-8"?>
+<p:sld xmlns:a="http://schemas.openxmlformats.org/drawingml/2006/main" xmlns:r="http://schemas.openxmlformats.org/officeDocument/2006/relationships" xmlns:p="http://schemas.openxmlformats.org/presentationml/2006/main" showMasterSp="0">
+  <p:cSld>
+    <p:spTree>
+      <p:nvGrpSpPr>
+        <p:cNvPr id="1" name=""/>
+        <p:cNvGrpSpPr/>
+        <p:nvPr/>
+      </p:nvGrpSpPr>
+      <p:grpSpPr>
+        <a:xfrm>
+          <a:off x="0" y="0"/>
+          <a:ext cx="0" cy="0"/>
+          <a:chOff x="0" y="0"/>
+          <a:chExt cx="0" cy="0"/>
+        </a:xfrm>
+      </p:grpSpPr>
+      <p:sp>
+        <p:nvSpPr>
+          <p:cNvPr id="2" name="object 2"/>
+          <p:cNvSpPr txBox="1">
+            <a:spLocks noGrp="1"/>
+          </p:cNvSpPr>
+          <p:nvPr>
+            <p:ph type="title"/>
+          </p:nvPr>
+        </p:nvSpPr>
+        <p:spPr>
+          <a:prstGeom prst="rect">
+            <a:avLst/>
+          </a:prstGeom>
+        </p:spPr>
+        <p:txBody>
+          <a:bodyPr vert="horz" wrap="square" lIns="0" tIns="12700" rIns="0" bIns="0" rtlCol="0">
+            <a:spAutoFit/>
+          </a:bodyPr>
+          <a:lstStyle/>
+          <a:p>
+            <a:pPr marL="12700">
+              <a:lnSpc>
+                <a:spcPct val="100000"/>
+              </a:lnSpc>
+              <a:spcBef>
+                <a:spcPts val="100"/>
+              </a:spcBef>
+            </a:pPr>
+            <a:r>
+              <a:rPr dirty="0"/>
+              <a:t>Вывод</a:t>
+            </a:r>
+            <a:r>
+              <a:rPr spc="-40" dirty="0"/>
+              <a:t> </a:t>
+            </a:r>
+            <a:r>
+              <a:rPr dirty="0"/>
+              <a:t>в</a:t>
+            </a:r>
+            <a:r>
+              <a:rPr spc="-40" dirty="0"/>
+              <a:t> </a:t>
+            </a:r>
+            <a:r>
+              <a:rPr spc="-85" dirty="0"/>
+              <a:t>поток</a:t>
+            </a:r>
+          </a:p>
+        </p:txBody>
+      </p:sp>
+      <p:sp>
+        <p:nvSpPr>
+          <p:cNvPr id="3" name="object 3"/>
+          <p:cNvSpPr txBox="1"/>
+          <p:nvPr/>
+        </p:nvSpPr>
+        <p:spPr>
+          <a:xfrm>
+            <a:off x="871219" y="1755251"/>
+            <a:ext cx="9998710" cy="2495550"/>
+          </a:xfrm>
+          <a:prstGeom prst="rect">
+            <a:avLst/>
+          </a:prstGeom>
+        </p:spPr>
+        <p:txBody>
+          <a:bodyPr vert="horz" wrap="square" lIns="0" tIns="80010" rIns="0" bIns="0" rtlCol="0">
+            <a:spAutoFit/>
+          </a:bodyPr>
+          <a:lstStyle/>
+          <a:p>
+            <a:pPr marL="241935" indent="-229235">
+              <a:lnSpc>
+                <a:spcPct val="100000"/>
+              </a:lnSpc>
+              <a:spcBef>
+                <a:spcPts val="630"/>
+              </a:spcBef>
+              <a:buChar char="•"/>
+              <a:tabLst>
+                <a:tab pos="241935" algn="l"/>
+              </a:tabLst>
+            </a:pPr>
+            <a:r>
+              <a:rPr sz="2800" dirty="0">
+                <a:latin typeface="Microsoft Sans Serif"/>
+                <a:cs typeface="Microsoft Sans Serif"/>
+              </a:rPr>
+              <a:t>В</a:t>
+            </a:r>
+            <a:r>
+              <a:rPr sz="2800" spc="-85" dirty="0">
+                <a:latin typeface="Microsoft Sans Serif"/>
+                <a:cs typeface="Microsoft Sans Serif"/>
+              </a:rPr>
+              <a:t> </a:t>
+            </a:r>
+            <a:r>
+              <a:rPr sz="2800" dirty="0">
+                <a:latin typeface="Microsoft Sans Serif"/>
+                <a:cs typeface="Microsoft Sans Serif"/>
+              </a:rPr>
+              <a:t>классе</a:t>
+            </a:r>
+            <a:r>
+              <a:rPr sz="2800" spc="-85" dirty="0">
+                <a:latin typeface="Microsoft Sans Serif"/>
+                <a:cs typeface="Microsoft Sans Serif"/>
+              </a:rPr>
+              <a:t> </a:t>
+            </a:r>
+            <a:r>
+              <a:rPr sz="2800" spc="-10" dirty="0">
+                <a:latin typeface="Microsoft Sans Serif"/>
+                <a:cs typeface="Microsoft Sans Serif"/>
+              </a:rPr>
+              <a:t>объявляем</a:t>
+            </a:r>
+            <a:r>
+              <a:rPr sz="2800" spc="-80" dirty="0">
+                <a:latin typeface="Microsoft Sans Serif"/>
+                <a:cs typeface="Microsoft Sans Serif"/>
+              </a:rPr>
+              <a:t> </a:t>
+            </a:r>
+            <a:r>
+              <a:rPr sz="2800" spc="-10" dirty="0">
+                <a:latin typeface="Microsoft Sans Serif"/>
+                <a:cs typeface="Microsoft Sans Serif"/>
+              </a:rPr>
+              <a:t>friend</a:t>
+            </a:r>
+            <a:endParaRPr sz="2800">
+              <a:latin typeface="Microsoft Sans Serif"/>
+              <a:cs typeface="Microsoft Sans Serif"/>
+            </a:endParaRPr>
+          </a:p>
+          <a:p>
+            <a:pPr marL="241935" indent="-229235">
+              <a:lnSpc>
+                <a:spcPct val="100000"/>
+              </a:lnSpc>
+              <a:spcBef>
+                <a:spcPts val="525"/>
+              </a:spcBef>
+              <a:buChar char="•"/>
+              <a:tabLst>
+                <a:tab pos="241935" algn="l"/>
+              </a:tabLst>
+            </a:pPr>
+            <a:r>
+              <a:rPr sz="2800" dirty="0">
+                <a:latin typeface="Microsoft Sans Serif"/>
+                <a:cs typeface="Microsoft Sans Serif"/>
+              </a:rPr>
+              <a:t>Снаружи</a:t>
+            </a:r>
+            <a:r>
+              <a:rPr sz="2800" spc="-185" dirty="0">
+                <a:latin typeface="Microsoft Sans Serif"/>
+                <a:cs typeface="Microsoft Sans Serif"/>
+              </a:rPr>
+              <a:t> </a:t>
+            </a:r>
+            <a:r>
+              <a:rPr sz="2800" spc="-10" dirty="0">
+                <a:latin typeface="Microsoft Sans Serif"/>
+                <a:cs typeface="Microsoft Sans Serif"/>
+              </a:rPr>
+              <a:t>пишем:</a:t>
+            </a:r>
+            <a:endParaRPr sz="2800">
+              <a:latin typeface="Microsoft Sans Serif"/>
+              <a:cs typeface="Microsoft Sans Serif"/>
+            </a:endParaRPr>
+          </a:p>
+          <a:p>
+            <a:pPr marL="241935" indent="-229235">
+              <a:lnSpc>
+                <a:spcPct val="100000"/>
+              </a:lnSpc>
+              <a:spcBef>
+                <a:spcPts val="530"/>
+              </a:spcBef>
+              <a:buChar char="•"/>
+              <a:tabLst>
+                <a:tab pos="241935" algn="l"/>
+              </a:tabLst>
+            </a:pPr>
+            <a:r>
+              <a:rPr sz="2800" dirty="0">
+                <a:latin typeface="Microsoft Sans Serif"/>
+                <a:cs typeface="Microsoft Sans Serif"/>
+              </a:rPr>
+              <a:t>std::ostream&amp;</a:t>
+            </a:r>
+            <a:r>
+              <a:rPr sz="2800" spc="-20" dirty="0">
+                <a:latin typeface="Microsoft Sans Serif"/>
+                <a:cs typeface="Microsoft Sans Serif"/>
+              </a:rPr>
+              <a:t> </a:t>
+            </a:r>
+            <a:r>
+              <a:rPr sz="2800" spc="-10" dirty="0">
+                <a:latin typeface="Microsoft Sans Serif"/>
+                <a:cs typeface="Microsoft Sans Serif"/>
+              </a:rPr>
+              <a:t>operator&lt;&lt;(std::ostream&amp;</a:t>
+            </a:r>
+            <a:r>
+              <a:rPr sz="2800" spc="-20" dirty="0">
+                <a:latin typeface="Microsoft Sans Serif"/>
+                <a:cs typeface="Microsoft Sans Serif"/>
+              </a:rPr>
+              <a:t> </a:t>
+            </a:r>
+            <a:r>
+              <a:rPr sz="2800" dirty="0">
+                <a:latin typeface="Microsoft Sans Serif"/>
+                <a:cs typeface="Microsoft Sans Serif"/>
+              </a:rPr>
+              <a:t>os,</a:t>
+            </a:r>
+            <a:r>
+              <a:rPr sz="2800" spc="-15" dirty="0">
+                <a:latin typeface="Microsoft Sans Serif"/>
+                <a:cs typeface="Microsoft Sans Serif"/>
+              </a:rPr>
+              <a:t> </a:t>
+            </a:r>
+            <a:r>
+              <a:rPr sz="2800" dirty="0">
+                <a:latin typeface="Microsoft Sans Serif"/>
+                <a:cs typeface="Microsoft Sans Serif"/>
+              </a:rPr>
+              <a:t>const</a:t>
+            </a:r>
+            <a:r>
+              <a:rPr sz="2800" spc="-20" dirty="0">
+                <a:latin typeface="Microsoft Sans Serif"/>
+                <a:cs typeface="Microsoft Sans Serif"/>
+              </a:rPr>
+              <a:t> </a:t>
+            </a:r>
+            <a:r>
+              <a:rPr sz="2800" dirty="0">
+                <a:latin typeface="Microsoft Sans Serif"/>
+                <a:cs typeface="Microsoft Sans Serif"/>
+              </a:rPr>
+              <a:t>String&amp;</a:t>
+            </a:r>
+            <a:r>
+              <a:rPr sz="2800" spc="-15" dirty="0">
+                <a:latin typeface="Microsoft Sans Serif"/>
+                <a:cs typeface="Microsoft Sans Serif"/>
+              </a:rPr>
+              <a:t> </a:t>
+            </a:r>
+            <a:r>
+              <a:rPr sz="2800" dirty="0">
+                <a:latin typeface="Microsoft Sans Serif"/>
+                <a:cs typeface="Microsoft Sans Serif"/>
+              </a:rPr>
+              <a:t>s)</a:t>
+            </a:r>
+            <a:r>
+              <a:rPr sz="2800" spc="-20" dirty="0">
+                <a:latin typeface="Microsoft Sans Serif"/>
+                <a:cs typeface="Microsoft Sans Serif"/>
+              </a:rPr>
+              <a:t> </a:t>
+            </a:r>
+            <a:r>
+              <a:rPr sz="2800" spc="-50" dirty="0">
+                <a:latin typeface="Microsoft Sans Serif"/>
+                <a:cs typeface="Microsoft Sans Serif"/>
+              </a:rPr>
+              <a:t>{</a:t>
+            </a:r>
+            <a:endParaRPr sz="2800">
+              <a:latin typeface="Microsoft Sans Serif"/>
+              <a:cs typeface="Microsoft Sans Serif"/>
+            </a:endParaRPr>
+          </a:p>
+          <a:p>
+            <a:pPr marL="241935" indent="-229235">
+              <a:lnSpc>
+                <a:spcPct val="100000"/>
+              </a:lnSpc>
+              <a:spcBef>
+                <a:spcPts val="530"/>
+              </a:spcBef>
+              <a:buChar char="•"/>
+              <a:tabLst>
+                <a:tab pos="241935" algn="l"/>
+              </a:tabLst>
+            </a:pPr>
+            <a:r>
+              <a:rPr sz="2800" spc="-25" dirty="0">
+                <a:latin typeface="Microsoft Sans Serif"/>
+                <a:cs typeface="Microsoft Sans Serif"/>
+              </a:rPr>
+              <a:t>...</a:t>
+            </a:r>
+            <a:endParaRPr sz="2800">
+              <a:latin typeface="Microsoft Sans Serif"/>
+              <a:cs typeface="Microsoft Sans Serif"/>
+            </a:endParaRPr>
+          </a:p>
+          <a:p>
+            <a:pPr marL="241935" indent="-229235">
+              <a:lnSpc>
+                <a:spcPct val="100000"/>
+              </a:lnSpc>
+              <a:spcBef>
+                <a:spcPts val="530"/>
+              </a:spcBef>
+              <a:buChar char="•"/>
+              <a:tabLst>
+                <a:tab pos="241935" algn="l"/>
+              </a:tabLst>
+            </a:pPr>
+            <a:r>
+              <a:rPr sz="2800" dirty="0">
+                <a:latin typeface="Microsoft Sans Serif"/>
+                <a:cs typeface="Microsoft Sans Serif"/>
+              </a:rPr>
+              <a:t>return</a:t>
+            </a:r>
+            <a:r>
+              <a:rPr sz="2800" spc="-5" dirty="0">
+                <a:latin typeface="Microsoft Sans Serif"/>
+                <a:cs typeface="Microsoft Sans Serif"/>
+              </a:rPr>
+              <a:t> </a:t>
+            </a:r>
+            <a:r>
+              <a:rPr sz="2800" dirty="0">
+                <a:latin typeface="Microsoft Sans Serif"/>
+                <a:cs typeface="Microsoft Sans Serif"/>
+              </a:rPr>
+              <a:t>os</a:t>
+            </a:r>
+            <a:r>
+              <a:rPr sz="2800" spc="-5" dirty="0">
+                <a:latin typeface="Microsoft Sans Serif"/>
+                <a:cs typeface="Microsoft Sans Serif"/>
+              </a:rPr>
+              <a:t> </a:t>
+            </a:r>
+            <a:r>
+              <a:rPr sz="2800" dirty="0">
+                <a:latin typeface="Microsoft Sans Serif"/>
+                <a:cs typeface="Microsoft Sans Serif"/>
+              </a:rPr>
+              <a:t>&lt;&lt;</a:t>
+            </a:r>
+            <a:r>
+              <a:rPr sz="2800" spc="-5" dirty="0">
+                <a:latin typeface="Microsoft Sans Serif"/>
+                <a:cs typeface="Microsoft Sans Serif"/>
+              </a:rPr>
+              <a:t> </a:t>
+            </a:r>
+            <a:r>
+              <a:rPr sz="2800" dirty="0">
+                <a:latin typeface="Microsoft Sans Serif"/>
+                <a:cs typeface="Microsoft Sans Serif"/>
+              </a:rPr>
+              <a:t>...</a:t>
+            </a:r>
+            <a:r>
+              <a:rPr sz="2800" spc="-5" dirty="0">
+                <a:latin typeface="Microsoft Sans Serif"/>
+                <a:cs typeface="Microsoft Sans Serif"/>
+              </a:rPr>
+              <a:t> </a:t>
+            </a:r>
+            <a:r>
+              <a:rPr sz="2800" spc="-50" dirty="0">
+                <a:latin typeface="Microsoft Sans Serif"/>
+                <a:cs typeface="Microsoft Sans Serif"/>
+              </a:rPr>
+              <a:t>;</a:t>
+            </a:r>
+            <a:endParaRPr sz="2800">
+              <a:latin typeface="Microsoft Sans Serif"/>
+              <a:cs typeface="Microsoft Sans Serif"/>
+            </a:endParaRPr>
           </a:p>
         </p:txBody>
       </p:sp>
@@ -1598,2267 +4014,7 @@
 </p:sld>
 </file>
 
-<file path=ppt/slides/slide3.xml><?xml version="1.0" encoding="utf-8"?>
-<p:sld xmlns:a="http://schemas.openxmlformats.org/drawingml/2006/main" xmlns:r="http://schemas.openxmlformats.org/officeDocument/2006/relationships" xmlns:p="http://schemas.openxmlformats.org/presentationml/2006/main">
-  <p:cSld>
-    <p:spTree>
-      <p:nvGrpSpPr>
-        <p:cNvPr id="1" name=""/>
-        <p:cNvGrpSpPr/>
-        <p:nvPr/>
-      </p:nvGrpSpPr>
-      <p:grpSpPr>
-        <a:xfrm>
-          <a:off x="0" y="0"/>
-          <a:ext cx="0" cy="0"/>
-          <a:chOff x="0" y="0"/>
-          <a:chExt cx="0" cy="0"/>
-        </a:xfrm>
-      </p:grpSpPr>
-      <p:sp>
-        <p:nvSpPr>
-          <p:cNvPr id="2" name="Title 1">
-            <a:extLst>
-              <a:ext uri="{FF2B5EF4-FFF2-40B4-BE49-F238E27FC236}">
-                <a16:creationId xmlns:a16="http://schemas.microsoft.com/office/drawing/2014/main" id="{8D24AC4D-BD93-4E19-B556-7868D3782B76}"/>
-              </a:ext>
-            </a:extLst>
-          </p:cNvPr>
-          <p:cNvSpPr>
-            <a:spLocks noGrp="1"/>
-          </p:cNvSpPr>
-          <p:nvPr>
-            <p:ph type="title"/>
-          </p:nvPr>
-        </p:nvSpPr>
-        <p:spPr>
-          <a:xfrm>
-            <a:off x="2797809" y="457200"/>
-            <a:ext cx="6596381" cy="1354217"/>
-          </a:xfrm>
-        </p:spPr>
-        <p:txBody>
-          <a:bodyPr/>
-          <a:lstStyle/>
-          <a:p>
-            <a:r>
-              <a:rPr lang="ru-RU" dirty="0"/>
-              <a:t>Оператор присваивания</a:t>
-            </a:r>
-          </a:p>
-        </p:txBody>
-      </p:sp>
-      <p:sp>
-        <p:nvSpPr>
-          <p:cNvPr id="3" name="TextBox 2">
-            <a:extLst>
-              <a:ext uri="{FF2B5EF4-FFF2-40B4-BE49-F238E27FC236}">
-                <a16:creationId xmlns:a16="http://schemas.microsoft.com/office/drawing/2014/main" id="{218103F5-364D-45DC-9EE4-591502156C75}"/>
-              </a:ext>
-            </a:extLst>
-          </p:cNvPr>
-          <p:cNvSpPr txBox="1"/>
-          <p:nvPr/>
-        </p:nvSpPr>
-        <p:spPr>
-          <a:xfrm>
-            <a:off x="2971800" y="2590800"/>
-            <a:ext cx="45719" cy="369332"/>
-          </a:xfrm>
-          <a:prstGeom prst="rect">
-            <a:avLst/>
-          </a:prstGeom>
-          <a:noFill/>
-        </p:spPr>
-        <p:txBody>
-          <a:bodyPr wrap="square" rtlCol="0">
-            <a:spAutoFit/>
-          </a:bodyPr>
-          <a:lstStyle/>
-          <a:p>
-            <a:endParaRPr lang="ru-RU" dirty="0"/>
-          </a:p>
-        </p:txBody>
-      </p:sp>
-      <p:sp>
-        <p:nvSpPr>
-          <p:cNvPr id="4" name="TextBox 3">
-            <a:extLst>
-              <a:ext uri="{FF2B5EF4-FFF2-40B4-BE49-F238E27FC236}">
-                <a16:creationId xmlns:a16="http://schemas.microsoft.com/office/drawing/2014/main" id="{C65CCB56-4018-4CDD-A9E9-7E03C12B3FEF}"/>
-              </a:ext>
-            </a:extLst>
-          </p:cNvPr>
-          <p:cNvSpPr txBox="1"/>
-          <p:nvPr/>
-        </p:nvSpPr>
-        <p:spPr>
-          <a:xfrm>
-            <a:off x="2247899" y="1811417"/>
-            <a:ext cx="7696200" cy="3539430"/>
-          </a:xfrm>
-          <a:prstGeom prst="rect">
-            <a:avLst/>
-          </a:prstGeom>
-          <a:noFill/>
-        </p:spPr>
-        <p:txBody>
-          <a:bodyPr wrap="square" rtlCol="0">
-            <a:spAutoFit/>
-          </a:bodyPr>
-          <a:lstStyle/>
-          <a:p>
-            <a:r>
-              <a:rPr lang="ru-RU" sz="2800" dirty="0"/>
-              <a:t>Присваивание самому себе</a:t>
-            </a:r>
-            <a:r>
-              <a:rPr lang="en-US" sz="2800" dirty="0"/>
-              <a:t>:</a:t>
-            </a:r>
-          </a:p>
-          <a:p>
-            <a:r>
-              <a:rPr lang="en-US" sz="2800" dirty="0">
-                <a:solidFill>
-                  <a:srgbClr val="FF0000"/>
-                </a:solidFill>
-              </a:rPr>
-              <a:t>*this == other </a:t>
-            </a:r>
-            <a:r>
-              <a:rPr lang="en-US" sz="2800" dirty="0">
-                <a:solidFill>
-                  <a:schemeClr val="tx1"/>
-                </a:solidFill>
-              </a:rPr>
-              <a:t>– </a:t>
-            </a:r>
-            <a:r>
-              <a:rPr lang="ru-RU" sz="2800" dirty="0">
-                <a:solidFill>
-                  <a:schemeClr val="tx1"/>
-                </a:solidFill>
-              </a:rPr>
-              <a:t>сравнение объектов</a:t>
-            </a:r>
-            <a:endParaRPr lang="en-US" sz="2800" dirty="0">
-              <a:solidFill>
-                <a:srgbClr val="FF0000"/>
-              </a:solidFill>
-            </a:endParaRPr>
-          </a:p>
-          <a:p>
-            <a:r>
-              <a:rPr lang="en-US" sz="2800" dirty="0">
-                <a:solidFill>
-                  <a:srgbClr val="00B050"/>
-                </a:solidFill>
-              </a:rPr>
-              <a:t>this == &amp;other</a:t>
-            </a:r>
-            <a:r>
-              <a:rPr lang="ru-RU" sz="2800" dirty="0">
-                <a:solidFill>
-                  <a:schemeClr val="tx1"/>
-                </a:solidFill>
-              </a:rPr>
-              <a:t> – сравнение указателей</a:t>
-            </a:r>
-          </a:p>
-          <a:p>
-            <a:endParaRPr lang="en-US" sz="2800" dirty="0">
-              <a:solidFill>
-                <a:schemeClr val="tx1"/>
-              </a:solidFill>
-            </a:endParaRPr>
-          </a:p>
-          <a:p>
-            <a:r>
-              <a:rPr lang="ru-RU" sz="2800" dirty="0">
-                <a:solidFill>
-                  <a:schemeClr val="tx1"/>
-                </a:solidFill>
-              </a:rPr>
-              <a:t>Идиома </a:t>
-            </a:r>
-            <a:r>
-              <a:rPr lang="en-US" sz="2800" dirty="0">
-                <a:solidFill>
-                  <a:schemeClr val="tx1"/>
-                </a:solidFill>
-                <a:hlinkClick r:id="rId2"/>
-              </a:rPr>
-              <a:t>copy-and-swap</a:t>
-            </a:r>
-            <a:r>
-              <a:rPr lang="en-US" sz="2800" dirty="0">
-                <a:solidFill>
-                  <a:schemeClr val="tx1"/>
-                </a:solidFill>
-              </a:rPr>
-              <a:t>:</a:t>
-            </a:r>
-          </a:p>
-          <a:p>
-            <a:pPr marL="342900" indent="-342900">
-              <a:buFont typeface="+mj-lt"/>
-              <a:buAutoNum type="arabicPeriod"/>
-            </a:pPr>
-            <a:r>
-              <a:rPr lang="ru-RU" sz="2800" dirty="0">
-                <a:solidFill>
-                  <a:schemeClr val="tx1"/>
-                </a:solidFill>
-              </a:rPr>
-              <a:t>Принимаем по значению (конструктор копированием)</a:t>
-            </a:r>
-          </a:p>
-          <a:p>
-            <a:pPr marL="342900" indent="-342900">
-              <a:buFont typeface="+mj-lt"/>
-              <a:buAutoNum type="arabicPeriod"/>
-            </a:pPr>
-            <a:r>
-              <a:rPr lang="ru-RU" sz="2800" dirty="0">
-                <a:solidFill>
-                  <a:schemeClr val="tx1"/>
-                </a:solidFill>
-              </a:rPr>
-              <a:t>Делаем </a:t>
-            </a:r>
-            <a:r>
-              <a:rPr lang="en-US" sz="2800" dirty="0">
-                <a:solidFill>
-                  <a:schemeClr val="tx1"/>
-                </a:solidFill>
-              </a:rPr>
-              <a:t>swap </a:t>
-            </a:r>
-            <a:r>
-              <a:rPr lang="ru-RU" sz="2800" dirty="0">
-                <a:solidFill>
-                  <a:schemeClr val="tx1"/>
-                </a:solidFill>
-              </a:rPr>
-              <a:t>полей</a:t>
-            </a:r>
-          </a:p>
-        </p:txBody>
-      </p:sp>
-    </p:spTree>
-    <p:extLst>
-      <p:ext uri="{BB962C8B-B14F-4D97-AF65-F5344CB8AC3E}">
-        <p14:creationId xmlns:p14="http://schemas.microsoft.com/office/powerpoint/2010/main" val="146127656"/>
-      </p:ext>
-    </p:extLst>
-  </p:cSld>
-  <p:clrMapOvr>
-    <a:masterClrMapping/>
-  </p:clrMapOvr>
-</p:sld>
-</file>
-
-<file path=ppt/slides/slide4.xml><?xml version="1.0" encoding="utf-8"?>
-<p:sld xmlns:a="http://schemas.openxmlformats.org/drawingml/2006/main" xmlns:r="http://schemas.openxmlformats.org/officeDocument/2006/relationships" xmlns:p="http://schemas.openxmlformats.org/presentationml/2006/main" showMasterSp="0">
-  <p:cSld>
-    <p:spTree>
-      <p:nvGrpSpPr>
-        <p:cNvPr id="1" name=""/>
-        <p:cNvGrpSpPr/>
-        <p:nvPr/>
-      </p:nvGrpSpPr>
-      <p:grpSpPr>
-        <a:xfrm>
-          <a:off x="0" y="0"/>
-          <a:ext cx="0" cy="0"/>
-          <a:chOff x="0" y="0"/>
-          <a:chExt cx="0" cy="0"/>
-        </a:xfrm>
-      </p:grpSpPr>
-      <p:sp>
-        <p:nvSpPr>
-          <p:cNvPr id="2" name="object 2"/>
-          <p:cNvSpPr txBox="1">
-            <a:spLocks noGrp="1"/>
-          </p:cNvSpPr>
-          <p:nvPr>
-            <p:ph type="title"/>
-          </p:nvPr>
-        </p:nvSpPr>
-        <p:spPr>
-          <a:xfrm>
-            <a:off x="871219" y="642446"/>
-            <a:ext cx="4400550" cy="695960"/>
-          </a:xfrm>
-          <a:prstGeom prst="rect">
-            <a:avLst/>
-          </a:prstGeom>
-        </p:spPr>
-        <p:txBody>
-          <a:bodyPr vert="horz" wrap="square" lIns="0" tIns="12700" rIns="0" bIns="0" rtlCol="0">
-            <a:spAutoFit/>
-          </a:bodyPr>
-          <a:lstStyle/>
-          <a:p>
-            <a:pPr marL="12700">
-              <a:lnSpc>
-                <a:spcPct val="100000"/>
-              </a:lnSpc>
-              <a:spcBef>
-                <a:spcPts val="100"/>
-              </a:spcBef>
-            </a:pPr>
-            <a:r>
-              <a:rPr spc="-10" dirty="0"/>
-              <a:t>Операторы</a:t>
-            </a:r>
-            <a:r>
-              <a:rPr spc="-120" dirty="0"/>
-              <a:t> </a:t>
-            </a:r>
-            <a:r>
-              <a:rPr dirty="0"/>
-              <a:t>+,</a:t>
-            </a:r>
-            <a:r>
-              <a:rPr spc="-114" dirty="0"/>
-              <a:t> </a:t>
-            </a:r>
-            <a:r>
-              <a:rPr spc="-25" dirty="0"/>
-              <a:t>+=</a:t>
-            </a:r>
-          </a:p>
-        </p:txBody>
-      </p:sp>
-      <p:sp>
-        <p:nvSpPr>
-          <p:cNvPr id="3" name="object 3"/>
-          <p:cNvSpPr txBox="1"/>
-          <p:nvPr/>
-        </p:nvSpPr>
-        <p:spPr>
-          <a:xfrm>
-            <a:off x="871219" y="1755251"/>
-            <a:ext cx="10190480" cy="3150863"/>
-          </a:xfrm>
-          <a:prstGeom prst="rect">
-            <a:avLst/>
-          </a:prstGeom>
-        </p:spPr>
-        <p:txBody>
-          <a:bodyPr vert="horz" wrap="square" lIns="0" tIns="80010" rIns="0" bIns="0" rtlCol="0">
-            <a:spAutoFit/>
-          </a:bodyPr>
-          <a:lstStyle/>
-          <a:p>
-            <a:pPr marL="241935" indent="-229235">
-              <a:lnSpc>
-                <a:spcPct val="100000"/>
-              </a:lnSpc>
-              <a:spcBef>
-                <a:spcPts val="630"/>
-              </a:spcBef>
-              <a:buChar char="•"/>
-              <a:tabLst>
-                <a:tab pos="241935" algn="l"/>
-              </a:tabLst>
-            </a:pPr>
-            <a:r>
-              <a:rPr sz="2800" spc="-10" dirty="0">
-                <a:latin typeface="Microsoft Sans Serif"/>
-                <a:cs typeface="Microsoft Sans Serif"/>
-              </a:rPr>
-              <a:t>Выражаем</a:t>
-            </a:r>
-            <a:r>
-              <a:rPr sz="2800" spc="-65" dirty="0">
-                <a:latin typeface="Microsoft Sans Serif"/>
-                <a:cs typeface="Microsoft Sans Serif"/>
-              </a:rPr>
-              <a:t> </a:t>
-            </a:r>
-            <a:r>
-              <a:rPr sz="2800" dirty="0">
-                <a:latin typeface="Microsoft Sans Serif"/>
-                <a:cs typeface="Microsoft Sans Serif"/>
-              </a:rPr>
-              <a:t>+</a:t>
-            </a:r>
-            <a:r>
-              <a:rPr sz="2800" spc="-60" dirty="0">
-                <a:latin typeface="Microsoft Sans Serif"/>
-                <a:cs typeface="Microsoft Sans Serif"/>
-              </a:rPr>
-              <a:t> </a:t>
-            </a:r>
-            <a:r>
-              <a:rPr sz="2800" spc="-20" dirty="0">
-                <a:latin typeface="Microsoft Sans Serif"/>
-                <a:cs typeface="Microsoft Sans Serif"/>
-              </a:rPr>
-              <a:t>через</a:t>
-            </a:r>
-            <a:r>
-              <a:rPr sz="2800" spc="-60" dirty="0">
-                <a:latin typeface="Microsoft Sans Serif"/>
-                <a:cs typeface="Microsoft Sans Serif"/>
-              </a:rPr>
-              <a:t> </a:t>
-            </a:r>
-            <a:r>
-              <a:rPr sz="2800" dirty="0">
-                <a:latin typeface="Microsoft Sans Serif"/>
-                <a:cs typeface="Microsoft Sans Serif"/>
-              </a:rPr>
-              <a:t>+=</a:t>
-            </a:r>
-            <a:r>
-              <a:rPr sz="2800" spc="-60" dirty="0">
-                <a:latin typeface="Microsoft Sans Serif"/>
-                <a:cs typeface="Microsoft Sans Serif"/>
-              </a:rPr>
-              <a:t> </a:t>
-            </a:r>
-            <a:r>
-              <a:rPr lang="ru-RU" sz="2800" spc="725" dirty="0">
-                <a:latin typeface="Microsoft Sans Serif"/>
-                <a:cs typeface="Microsoft Sans Serif"/>
-              </a:rPr>
-              <a:t> - </a:t>
-            </a:r>
-            <a:r>
-              <a:rPr sz="2800" spc="-25" dirty="0" err="1">
-                <a:latin typeface="Microsoft Sans Serif"/>
-                <a:cs typeface="Microsoft Sans Serif"/>
-              </a:rPr>
-              <a:t>экономим</a:t>
-            </a:r>
-            <a:r>
-              <a:rPr sz="2800" spc="-60" dirty="0">
-                <a:latin typeface="Microsoft Sans Serif"/>
-                <a:cs typeface="Microsoft Sans Serif"/>
-              </a:rPr>
-              <a:t> </a:t>
-            </a:r>
-            <a:r>
-              <a:rPr sz="2800" dirty="0">
-                <a:latin typeface="Microsoft Sans Serif"/>
-                <a:cs typeface="Microsoft Sans Serif"/>
-              </a:rPr>
-              <a:t>на</a:t>
-            </a:r>
-            <a:r>
-              <a:rPr sz="2800" spc="-60" dirty="0">
-                <a:latin typeface="Microsoft Sans Serif"/>
-                <a:cs typeface="Microsoft Sans Serif"/>
-              </a:rPr>
-              <a:t> </a:t>
-            </a:r>
-            <a:r>
-              <a:rPr sz="2800" spc="-10" dirty="0">
-                <a:latin typeface="Microsoft Sans Serif"/>
-                <a:cs typeface="Microsoft Sans Serif"/>
-              </a:rPr>
-              <a:t>копировании</a:t>
-            </a:r>
-            <a:endParaRPr sz="2800" dirty="0">
-              <a:latin typeface="Microsoft Sans Serif"/>
-              <a:cs typeface="Microsoft Sans Serif"/>
-            </a:endParaRPr>
-          </a:p>
-          <a:p>
-            <a:pPr marL="241300" marR="5080" indent="-228600">
-              <a:lnSpc>
-                <a:spcPts val="2890"/>
-              </a:lnSpc>
-              <a:spcBef>
-                <a:spcPts val="1015"/>
-              </a:spcBef>
-            </a:pPr>
-            <a:r>
-              <a:rPr sz="2800" dirty="0">
-                <a:latin typeface="Microsoft Sans Serif"/>
-                <a:cs typeface="Microsoft Sans Serif"/>
-              </a:rPr>
-              <a:t>•</a:t>
-            </a:r>
-            <a:r>
-              <a:rPr sz="2800" spc="-20" dirty="0">
-                <a:latin typeface="Microsoft Sans Serif"/>
-                <a:cs typeface="Microsoft Sans Serif"/>
-              </a:rPr>
-              <a:t> </a:t>
-            </a:r>
-            <a:r>
-              <a:rPr sz="2800" dirty="0">
-                <a:latin typeface="Microsoft Sans Serif"/>
-                <a:cs typeface="Microsoft Sans Serif"/>
-              </a:rPr>
-              <a:t>+</a:t>
-            </a:r>
-            <a:r>
-              <a:rPr sz="2800" spc="-55" dirty="0">
-                <a:latin typeface="Microsoft Sans Serif"/>
-                <a:cs typeface="Microsoft Sans Serif"/>
-              </a:rPr>
-              <a:t> </a:t>
-            </a:r>
-            <a:r>
-              <a:rPr sz="2800" dirty="0">
-                <a:latin typeface="Microsoft Sans Serif"/>
-                <a:cs typeface="Microsoft Sans Serif"/>
-              </a:rPr>
-              <a:t>не</a:t>
-            </a:r>
-            <a:r>
-              <a:rPr sz="2800" spc="-55" dirty="0">
-                <a:latin typeface="Microsoft Sans Serif"/>
-                <a:cs typeface="Microsoft Sans Serif"/>
-              </a:rPr>
-              <a:t> </a:t>
-            </a:r>
-            <a:r>
-              <a:rPr sz="2800" dirty="0">
-                <a:latin typeface="Microsoft Sans Serif"/>
-                <a:cs typeface="Microsoft Sans Serif"/>
-              </a:rPr>
-              <a:t>надо</a:t>
-            </a:r>
-            <a:r>
-              <a:rPr sz="2800" spc="-55" dirty="0">
-                <a:latin typeface="Microsoft Sans Serif"/>
-                <a:cs typeface="Microsoft Sans Serif"/>
-              </a:rPr>
-              <a:t> </a:t>
-            </a:r>
-            <a:r>
-              <a:rPr sz="2800" dirty="0">
-                <a:latin typeface="Microsoft Sans Serif"/>
-                <a:cs typeface="Microsoft Sans Serif"/>
-              </a:rPr>
-              <a:t>делать</a:t>
-            </a:r>
-            <a:r>
-              <a:rPr sz="2800" spc="-55" dirty="0">
-                <a:latin typeface="Microsoft Sans Serif"/>
-                <a:cs typeface="Microsoft Sans Serif"/>
-              </a:rPr>
-              <a:t> </a:t>
-            </a:r>
-            <a:r>
-              <a:rPr sz="2800" dirty="0">
-                <a:latin typeface="Microsoft Sans Serif"/>
-                <a:cs typeface="Microsoft Sans Serif"/>
-              </a:rPr>
-              <a:t>членом</a:t>
-            </a:r>
-            <a:r>
-              <a:rPr sz="2800" spc="-55" dirty="0">
-                <a:latin typeface="Microsoft Sans Serif"/>
-                <a:cs typeface="Microsoft Sans Serif"/>
-              </a:rPr>
-              <a:t> </a:t>
-            </a:r>
-            <a:r>
-              <a:rPr sz="2800" dirty="0">
-                <a:latin typeface="Microsoft Sans Serif"/>
-                <a:cs typeface="Microsoft Sans Serif"/>
-              </a:rPr>
-              <a:t>класса,</a:t>
-            </a:r>
-            <a:r>
-              <a:rPr sz="2800" spc="-60" dirty="0">
-                <a:latin typeface="Microsoft Sans Serif"/>
-                <a:cs typeface="Microsoft Sans Serif"/>
-              </a:rPr>
-              <a:t> </a:t>
-            </a:r>
-            <a:r>
-              <a:rPr sz="2800" dirty="0">
-                <a:latin typeface="Microsoft Sans Serif"/>
-                <a:cs typeface="Microsoft Sans Serif"/>
-              </a:rPr>
-              <a:t>ибо</a:t>
-            </a:r>
-            <a:r>
-              <a:rPr sz="2800" spc="-55" dirty="0">
-                <a:latin typeface="Microsoft Sans Serif"/>
-                <a:cs typeface="Microsoft Sans Serif"/>
-              </a:rPr>
-              <a:t> </a:t>
-            </a:r>
-            <a:r>
-              <a:rPr sz="2800" dirty="0">
-                <a:latin typeface="Microsoft Sans Serif"/>
-                <a:cs typeface="Microsoft Sans Serif"/>
-              </a:rPr>
-              <a:t>левый</a:t>
-            </a:r>
-            <a:r>
-              <a:rPr sz="2800" spc="-55" dirty="0">
-                <a:latin typeface="Microsoft Sans Serif"/>
-                <a:cs typeface="Microsoft Sans Serif"/>
-              </a:rPr>
-              <a:t> </a:t>
-            </a:r>
-            <a:r>
-              <a:rPr sz="2800" dirty="0">
-                <a:latin typeface="Microsoft Sans Serif"/>
-                <a:cs typeface="Microsoft Sans Serif"/>
-              </a:rPr>
-              <a:t>операнд</a:t>
-            </a:r>
-            <a:r>
-              <a:rPr sz="2800" spc="-55" dirty="0">
-                <a:latin typeface="Microsoft Sans Serif"/>
-                <a:cs typeface="Microsoft Sans Serif"/>
-              </a:rPr>
-              <a:t> </a:t>
-            </a:r>
-            <a:r>
-              <a:rPr sz="2800" spc="-10" dirty="0">
-                <a:latin typeface="Microsoft Sans Serif"/>
-                <a:cs typeface="Microsoft Sans Serif"/>
-              </a:rPr>
-              <a:t>может </a:t>
-            </a:r>
-            <a:r>
-              <a:rPr sz="2800" dirty="0">
-                <a:latin typeface="Microsoft Sans Serif"/>
-                <a:cs typeface="Microsoft Sans Serif"/>
-              </a:rPr>
-              <a:t>не</a:t>
-            </a:r>
-            <a:r>
-              <a:rPr sz="2800" spc="-60" dirty="0">
-                <a:latin typeface="Microsoft Sans Serif"/>
-                <a:cs typeface="Microsoft Sans Serif"/>
-              </a:rPr>
-              <a:t> </a:t>
-            </a:r>
-            <a:r>
-              <a:rPr sz="2800" dirty="0">
-                <a:latin typeface="Microsoft Sans Serif"/>
-                <a:cs typeface="Microsoft Sans Serif"/>
-              </a:rPr>
-              <a:t>быть</a:t>
-            </a:r>
-            <a:r>
-              <a:rPr sz="2800" spc="-55" dirty="0">
-                <a:latin typeface="Microsoft Sans Serif"/>
-                <a:cs typeface="Microsoft Sans Serif"/>
-              </a:rPr>
-              <a:t> </a:t>
-            </a:r>
-            <a:r>
-              <a:rPr sz="2800" spc="-30" dirty="0">
-                <a:latin typeface="Microsoft Sans Serif"/>
-                <a:cs typeface="Microsoft Sans Serif"/>
-              </a:rPr>
-              <a:t>объектом</a:t>
-            </a:r>
-            <a:r>
-              <a:rPr sz="2800" spc="-55" dirty="0">
-                <a:latin typeface="Microsoft Sans Serif"/>
-                <a:cs typeface="Microsoft Sans Serif"/>
-              </a:rPr>
-              <a:t> </a:t>
-            </a:r>
-            <a:r>
-              <a:rPr sz="2800" spc="-10" dirty="0">
-                <a:latin typeface="Microsoft Sans Serif"/>
-                <a:cs typeface="Microsoft Sans Serif"/>
-              </a:rPr>
-              <a:t>класса</a:t>
-            </a:r>
-            <a:endParaRPr sz="2800" dirty="0">
-              <a:latin typeface="Microsoft Sans Serif"/>
-              <a:cs typeface="Microsoft Sans Serif"/>
-            </a:endParaRPr>
-          </a:p>
-          <a:p>
-            <a:pPr marL="241935" indent="-229235">
-              <a:lnSpc>
-                <a:spcPct val="100000"/>
-              </a:lnSpc>
-              <a:spcBef>
-                <a:spcPts val="509"/>
-              </a:spcBef>
-              <a:buChar char="•"/>
-              <a:tabLst>
-                <a:tab pos="241935" algn="l"/>
-              </a:tabLst>
-            </a:pPr>
-            <a:r>
-              <a:rPr sz="2800" dirty="0">
-                <a:latin typeface="Microsoft Sans Serif"/>
-                <a:cs typeface="Microsoft Sans Serif"/>
-              </a:rPr>
-              <a:t>Нужно</a:t>
-            </a:r>
-            <a:r>
-              <a:rPr sz="2800" spc="-60" dirty="0">
-                <a:latin typeface="Microsoft Sans Serif"/>
-                <a:cs typeface="Microsoft Sans Serif"/>
-              </a:rPr>
-              <a:t> </a:t>
-            </a:r>
-            <a:r>
-              <a:rPr sz="2800" dirty="0">
-                <a:latin typeface="Microsoft Sans Serif"/>
-                <a:cs typeface="Microsoft Sans Serif"/>
-              </a:rPr>
-              <a:t>писать</a:t>
-            </a:r>
-            <a:r>
-              <a:rPr sz="2800" spc="-55" dirty="0">
-                <a:latin typeface="Microsoft Sans Serif"/>
-                <a:cs typeface="Microsoft Sans Serif"/>
-              </a:rPr>
-              <a:t> </a:t>
-            </a:r>
-            <a:r>
-              <a:rPr sz="2800" dirty="0">
-                <a:latin typeface="Microsoft Sans Serif"/>
-                <a:cs typeface="Microsoft Sans Serif"/>
-              </a:rPr>
-              <a:t>a</a:t>
-            </a:r>
-            <a:r>
-              <a:rPr sz="2800" spc="-55" dirty="0">
-                <a:latin typeface="Microsoft Sans Serif"/>
-                <a:cs typeface="Microsoft Sans Serif"/>
-              </a:rPr>
-              <a:t> </a:t>
-            </a:r>
-            <a:r>
-              <a:rPr sz="2800" dirty="0">
-                <a:latin typeface="Microsoft Sans Serif"/>
-                <a:cs typeface="Microsoft Sans Serif"/>
-              </a:rPr>
-              <a:t>+=</a:t>
-            </a:r>
-            <a:r>
-              <a:rPr sz="2800" spc="-60" dirty="0">
-                <a:latin typeface="Microsoft Sans Serif"/>
-                <a:cs typeface="Microsoft Sans Serif"/>
-              </a:rPr>
-              <a:t> </a:t>
-            </a:r>
-            <a:r>
-              <a:rPr sz="2800" dirty="0">
-                <a:latin typeface="Microsoft Sans Serif"/>
-                <a:cs typeface="Microsoft Sans Serif"/>
-              </a:rPr>
-              <a:t>b;</a:t>
-            </a:r>
-            <a:r>
-              <a:rPr sz="2800" spc="-55" dirty="0">
-                <a:latin typeface="Microsoft Sans Serif"/>
-                <a:cs typeface="Microsoft Sans Serif"/>
-              </a:rPr>
-              <a:t> </a:t>
-            </a:r>
-            <a:r>
-              <a:rPr sz="2800" dirty="0">
-                <a:latin typeface="Microsoft Sans Serif"/>
-                <a:cs typeface="Microsoft Sans Serif"/>
-              </a:rPr>
-              <a:t>return</a:t>
-            </a:r>
-            <a:r>
-              <a:rPr sz="2800" spc="-55" dirty="0">
-                <a:latin typeface="Microsoft Sans Serif"/>
-                <a:cs typeface="Microsoft Sans Serif"/>
-              </a:rPr>
-              <a:t> </a:t>
-            </a:r>
-            <a:r>
-              <a:rPr sz="2800" dirty="0">
-                <a:latin typeface="Microsoft Sans Serif"/>
-                <a:cs typeface="Microsoft Sans Serif"/>
-              </a:rPr>
-              <a:t>a;</a:t>
-            </a:r>
-            <a:r>
-              <a:rPr sz="2800" spc="-55" dirty="0">
-                <a:latin typeface="Microsoft Sans Serif"/>
-                <a:cs typeface="Microsoft Sans Serif"/>
-              </a:rPr>
-              <a:t> </a:t>
-            </a:r>
-            <a:r>
-              <a:rPr sz="2800" dirty="0">
-                <a:latin typeface="Microsoft Sans Serif"/>
-                <a:cs typeface="Microsoft Sans Serif"/>
-              </a:rPr>
-              <a:t>вместо</a:t>
-            </a:r>
-            <a:r>
-              <a:rPr sz="2800" spc="-60" dirty="0">
-                <a:latin typeface="Microsoft Sans Serif"/>
-                <a:cs typeface="Microsoft Sans Serif"/>
-              </a:rPr>
-              <a:t> </a:t>
-            </a:r>
-            <a:r>
-              <a:rPr sz="2800" dirty="0">
-                <a:latin typeface="Microsoft Sans Serif"/>
-                <a:cs typeface="Microsoft Sans Serif"/>
-              </a:rPr>
-              <a:t>return</a:t>
-            </a:r>
-            <a:r>
-              <a:rPr sz="2800" spc="-55" dirty="0">
-                <a:latin typeface="Microsoft Sans Serif"/>
-                <a:cs typeface="Microsoft Sans Serif"/>
-              </a:rPr>
-              <a:t> </a:t>
-            </a:r>
-            <a:r>
-              <a:rPr sz="2800" dirty="0">
-                <a:latin typeface="Microsoft Sans Serif"/>
-                <a:cs typeface="Microsoft Sans Serif"/>
-              </a:rPr>
-              <a:t>a+=b;</a:t>
-            </a:r>
-            <a:r>
-              <a:rPr sz="2800" spc="-55" dirty="0">
-                <a:latin typeface="Microsoft Sans Serif"/>
-                <a:cs typeface="Microsoft Sans Serif"/>
-              </a:rPr>
-              <a:t> </a:t>
-            </a:r>
-            <a:r>
-              <a:rPr sz="2800" spc="-10" dirty="0">
-                <a:latin typeface="Microsoft Sans Serif"/>
-                <a:cs typeface="Microsoft Sans Serif"/>
-              </a:rPr>
-              <a:t>(RVO)</a:t>
-            </a:r>
-            <a:endParaRPr sz="2800" dirty="0">
-              <a:latin typeface="Microsoft Sans Serif"/>
-              <a:cs typeface="Microsoft Sans Serif"/>
-            </a:endParaRPr>
-          </a:p>
-          <a:p>
-            <a:pPr marL="241935" indent="-229235">
-              <a:lnSpc>
-                <a:spcPct val="100000"/>
-              </a:lnSpc>
-              <a:spcBef>
-                <a:spcPts val="530"/>
-              </a:spcBef>
-              <a:buChar char="•"/>
-              <a:tabLst>
-                <a:tab pos="241935" algn="l"/>
-              </a:tabLst>
-            </a:pPr>
-            <a:r>
-              <a:rPr sz="2800" dirty="0">
-                <a:latin typeface="Microsoft Sans Serif"/>
-                <a:cs typeface="Microsoft Sans Serif"/>
-              </a:rPr>
-              <a:t>Что</a:t>
-            </a:r>
-            <a:r>
-              <a:rPr sz="2800" spc="-30" dirty="0">
-                <a:latin typeface="Microsoft Sans Serif"/>
-                <a:cs typeface="Microsoft Sans Serif"/>
-              </a:rPr>
-              <a:t> </a:t>
-            </a:r>
-            <a:r>
-              <a:rPr sz="2800" dirty="0">
-                <a:latin typeface="Microsoft Sans Serif"/>
-                <a:cs typeface="Microsoft Sans Serif"/>
-              </a:rPr>
-              <a:t>делать</a:t>
-            </a:r>
-            <a:r>
-              <a:rPr sz="2800" spc="-25" dirty="0">
-                <a:latin typeface="Microsoft Sans Serif"/>
-                <a:cs typeface="Microsoft Sans Serif"/>
-              </a:rPr>
-              <a:t> </a:t>
-            </a:r>
-            <a:r>
-              <a:rPr sz="2800" dirty="0">
-                <a:latin typeface="Microsoft Sans Serif"/>
-                <a:cs typeface="Microsoft Sans Serif"/>
-              </a:rPr>
-              <a:t>с</a:t>
-            </a:r>
-            <a:r>
-              <a:rPr sz="2800" spc="-25" dirty="0">
-                <a:latin typeface="Microsoft Sans Serif"/>
-                <a:cs typeface="Microsoft Sans Serif"/>
-              </a:rPr>
-              <a:t> </a:t>
-            </a:r>
-            <a:r>
-              <a:rPr sz="2800" dirty="0">
-                <a:latin typeface="Microsoft Sans Serif"/>
-                <a:cs typeface="Microsoft Sans Serif"/>
-              </a:rPr>
-              <a:t>a</a:t>
-            </a:r>
-            <a:r>
-              <a:rPr sz="2800" spc="-25" dirty="0">
-                <a:latin typeface="Microsoft Sans Serif"/>
-                <a:cs typeface="Microsoft Sans Serif"/>
-              </a:rPr>
-              <a:t> </a:t>
-            </a:r>
-            <a:r>
-              <a:rPr sz="2800" dirty="0">
-                <a:latin typeface="Microsoft Sans Serif"/>
-                <a:cs typeface="Microsoft Sans Serif"/>
-              </a:rPr>
-              <a:t>+</a:t>
-            </a:r>
-            <a:r>
-              <a:rPr sz="2800" spc="-25" dirty="0">
-                <a:latin typeface="Microsoft Sans Serif"/>
-                <a:cs typeface="Microsoft Sans Serif"/>
-              </a:rPr>
-              <a:t> </a:t>
-            </a:r>
-            <a:r>
-              <a:rPr sz="2800" dirty="0">
-                <a:latin typeface="Microsoft Sans Serif"/>
-                <a:cs typeface="Microsoft Sans Serif"/>
-              </a:rPr>
-              <a:t>b</a:t>
-            </a:r>
-            <a:r>
-              <a:rPr sz="2800" spc="-25" dirty="0">
-                <a:latin typeface="Microsoft Sans Serif"/>
-                <a:cs typeface="Microsoft Sans Serif"/>
-              </a:rPr>
-              <a:t> </a:t>
-            </a:r>
-            <a:r>
-              <a:rPr sz="2800" dirty="0">
-                <a:latin typeface="Microsoft Sans Serif"/>
-                <a:cs typeface="Microsoft Sans Serif"/>
-              </a:rPr>
-              <a:t>=</a:t>
-            </a:r>
-            <a:r>
-              <a:rPr sz="2800" spc="-25" dirty="0">
-                <a:latin typeface="Microsoft Sans Serif"/>
-                <a:cs typeface="Microsoft Sans Serif"/>
-              </a:rPr>
-              <a:t> 5?</a:t>
-            </a:r>
-            <a:endParaRPr sz="2800" dirty="0">
-              <a:latin typeface="Microsoft Sans Serif"/>
-              <a:cs typeface="Microsoft Sans Serif"/>
-            </a:endParaRPr>
-          </a:p>
-          <a:p>
-            <a:pPr marL="697865" lvl="1" indent="-227965">
-              <a:lnSpc>
-                <a:spcPct val="100000"/>
-              </a:lnSpc>
-              <a:spcBef>
-                <a:spcPts val="125"/>
-              </a:spcBef>
-              <a:buChar char="•"/>
-              <a:tabLst>
-                <a:tab pos="697865" algn="l"/>
-              </a:tabLst>
-            </a:pPr>
-            <a:r>
-              <a:rPr sz="2400" spc="-20" dirty="0">
-                <a:latin typeface="Microsoft Sans Serif"/>
-                <a:cs typeface="Microsoft Sans Serif"/>
-              </a:rPr>
-              <a:t>Возвращать</a:t>
-            </a:r>
-            <a:r>
-              <a:rPr sz="2400" spc="-70" dirty="0">
-                <a:latin typeface="Microsoft Sans Serif"/>
-                <a:cs typeface="Microsoft Sans Serif"/>
-              </a:rPr>
-              <a:t> </a:t>
-            </a:r>
-            <a:r>
-              <a:rPr sz="2400" spc="-20" dirty="0">
-                <a:latin typeface="Microsoft Sans Serif"/>
-                <a:cs typeface="Microsoft Sans Serif"/>
-              </a:rPr>
-              <a:t>const</a:t>
-            </a:r>
-            <a:endParaRPr sz="2400" dirty="0">
-              <a:latin typeface="Microsoft Sans Serif"/>
-              <a:cs typeface="Microsoft Sans Serif"/>
-            </a:endParaRPr>
-          </a:p>
-          <a:p>
-            <a:pPr marL="697865" lvl="1" indent="-227965">
-              <a:lnSpc>
-                <a:spcPct val="100000"/>
-              </a:lnSpc>
-              <a:spcBef>
-                <a:spcPts val="150"/>
-              </a:spcBef>
-              <a:buChar char="•"/>
-              <a:tabLst>
-                <a:tab pos="697865" algn="l"/>
-              </a:tabLst>
-            </a:pPr>
-            <a:r>
-              <a:rPr sz="2400" spc="-40" dirty="0">
-                <a:latin typeface="Microsoft Sans Serif"/>
-                <a:cs typeface="Microsoft Sans Serif"/>
-              </a:rPr>
-              <a:t>Докинуть </a:t>
-            </a:r>
-            <a:r>
-              <a:rPr sz="2400" dirty="0">
-                <a:latin typeface="Microsoft Sans Serif"/>
-                <a:cs typeface="Microsoft Sans Serif"/>
-              </a:rPr>
-              <a:t>&amp;</a:t>
-            </a:r>
-            <a:r>
-              <a:rPr sz="2400" spc="-40" dirty="0">
-                <a:latin typeface="Microsoft Sans Serif"/>
-                <a:cs typeface="Microsoft Sans Serif"/>
-              </a:rPr>
-              <a:t> </a:t>
-            </a:r>
-            <a:r>
-              <a:rPr sz="2400" dirty="0">
-                <a:latin typeface="Microsoft Sans Serif"/>
-                <a:cs typeface="Microsoft Sans Serif"/>
-              </a:rPr>
-              <a:t>в</a:t>
-            </a:r>
-            <a:r>
-              <a:rPr sz="2400" spc="-40" dirty="0">
-                <a:latin typeface="Microsoft Sans Serif"/>
-                <a:cs typeface="Microsoft Sans Serif"/>
-              </a:rPr>
-              <a:t> </a:t>
-            </a:r>
-            <a:r>
-              <a:rPr sz="2400" spc="-10" dirty="0" err="1">
-                <a:latin typeface="Microsoft Sans Serif"/>
-                <a:cs typeface="Microsoft Sans Serif"/>
-              </a:rPr>
-              <a:t>оператор</a:t>
-            </a:r>
-            <a:r>
-              <a:rPr lang="en-US" sz="2400" spc="-10" dirty="0">
-                <a:latin typeface="Microsoft Sans Serif"/>
-                <a:cs typeface="Microsoft Sans Serif"/>
-              </a:rPr>
-              <a:t> </a:t>
-            </a:r>
-            <a:r>
-              <a:rPr lang="ru-RU" sz="2400" spc="-10" dirty="0">
-                <a:latin typeface="Microsoft Sans Serif"/>
-                <a:cs typeface="Microsoft Sans Serif"/>
-              </a:rPr>
-              <a:t>присваивания</a:t>
-            </a:r>
-            <a:r>
-              <a:rPr sz="2400" spc="-40" dirty="0">
-                <a:latin typeface="Microsoft Sans Serif"/>
-                <a:cs typeface="Microsoft Sans Serif"/>
-              </a:rPr>
-              <a:t> </a:t>
-            </a:r>
-            <a:r>
-              <a:rPr sz="2400" spc="-10" dirty="0" err="1">
-                <a:latin typeface="Microsoft Sans Serif"/>
-                <a:cs typeface="Microsoft Sans Serif"/>
-              </a:rPr>
-              <a:t>справа</a:t>
-            </a:r>
-            <a:endParaRPr sz="2400" dirty="0">
-              <a:latin typeface="Microsoft Sans Serif"/>
-              <a:cs typeface="Microsoft Sans Serif"/>
-            </a:endParaRPr>
-          </a:p>
-        </p:txBody>
-      </p:sp>
-    </p:spTree>
-  </p:cSld>
-  <p:clrMapOvr>
-    <a:masterClrMapping/>
-  </p:clrMapOvr>
-</p:sld>
-</file>
-
-<file path=ppt/slides/slide5.xml><?xml version="1.0" encoding="utf-8"?>
-<p:sld xmlns:a="http://schemas.openxmlformats.org/drawingml/2006/main" xmlns:r="http://schemas.openxmlformats.org/officeDocument/2006/relationships" xmlns:p="http://schemas.openxmlformats.org/presentationml/2006/main" showMasterSp="0">
-  <p:cSld>
-    <p:spTree>
-      <p:nvGrpSpPr>
-        <p:cNvPr id="1" name=""/>
-        <p:cNvGrpSpPr/>
-        <p:nvPr/>
-      </p:nvGrpSpPr>
-      <p:grpSpPr>
-        <a:xfrm>
-          <a:off x="0" y="0"/>
-          <a:ext cx="0" cy="0"/>
-          <a:chOff x="0" y="0"/>
-          <a:chExt cx="0" cy="0"/>
-        </a:xfrm>
-      </p:grpSpPr>
-      <p:sp>
-        <p:nvSpPr>
-          <p:cNvPr id="2" name="object 2"/>
-          <p:cNvSpPr txBox="1">
-            <a:spLocks noGrp="1"/>
-          </p:cNvSpPr>
-          <p:nvPr>
-            <p:ph type="title"/>
-          </p:nvPr>
-        </p:nvSpPr>
-        <p:spPr>
-          <a:prstGeom prst="rect">
-            <a:avLst/>
-          </a:prstGeom>
-        </p:spPr>
-        <p:txBody>
-          <a:bodyPr vert="horz" wrap="square" lIns="0" tIns="12700" rIns="0" bIns="0" rtlCol="0">
-            <a:spAutoFit/>
-          </a:bodyPr>
-          <a:lstStyle/>
-          <a:p>
-            <a:pPr marL="12700">
-              <a:lnSpc>
-                <a:spcPct val="100000"/>
-              </a:lnSpc>
-              <a:spcBef>
-                <a:spcPts val="100"/>
-              </a:spcBef>
-            </a:pPr>
-            <a:r>
-              <a:rPr spc="-10" dirty="0"/>
-              <a:t>Сравнения</a:t>
-            </a:r>
-          </a:p>
-        </p:txBody>
-      </p:sp>
-      <p:sp>
-        <p:nvSpPr>
-          <p:cNvPr id="3" name="object 3"/>
-          <p:cNvSpPr txBox="1"/>
-          <p:nvPr/>
-        </p:nvSpPr>
-        <p:spPr>
-          <a:xfrm>
-            <a:off x="871219" y="1755251"/>
-            <a:ext cx="6598284" cy="2495550"/>
-          </a:xfrm>
-          <a:prstGeom prst="rect">
-            <a:avLst/>
-          </a:prstGeom>
-        </p:spPr>
-        <p:txBody>
-          <a:bodyPr vert="horz" wrap="square" lIns="0" tIns="80010" rIns="0" bIns="0" rtlCol="0">
-            <a:spAutoFit/>
-          </a:bodyPr>
-          <a:lstStyle/>
-          <a:p>
-            <a:pPr marL="241935" indent="-229235">
-              <a:lnSpc>
-                <a:spcPct val="100000"/>
-              </a:lnSpc>
-              <a:spcBef>
-                <a:spcPts val="630"/>
-              </a:spcBef>
-              <a:buChar char="•"/>
-              <a:tabLst>
-                <a:tab pos="241935" algn="l"/>
-              </a:tabLst>
-            </a:pPr>
-            <a:r>
-              <a:rPr sz="2800" dirty="0">
-                <a:latin typeface="Microsoft Sans Serif"/>
-                <a:cs typeface="Microsoft Sans Serif"/>
-              </a:rPr>
-              <a:t>Обычно</a:t>
-            </a:r>
-            <a:r>
-              <a:rPr sz="2800" spc="-114" dirty="0">
-                <a:latin typeface="Microsoft Sans Serif"/>
-                <a:cs typeface="Microsoft Sans Serif"/>
-              </a:rPr>
-              <a:t> </a:t>
-            </a:r>
-            <a:r>
-              <a:rPr sz="2800" spc="-10" dirty="0">
-                <a:latin typeface="Microsoft Sans Serif"/>
-                <a:cs typeface="Microsoft Sans Serif"/>
-              </a:rPr>
-              <a:t>реализуют</a:t>
-            </a:r>
-            <a:r>
-              <a:rPr sz="2800" spc="-114" dirty="0">
-                <a:latin typeface="Microsoft Sans Serif"/>
-                <a:cs typeface="Microsoft Sans Serif"/>
-              </a:rPr>
-              <a:t> </a:t>
-            </a:r>
-            <a:r>
-              <a:rPr sz="2800" spc="-10" dirty="0">
-                <a:latin typeface="Microsoft Sans Serif"/>
-                <a:cs typeface="Microsoft Sans Serif"/>
-              </a:rPr>
-              <a:t>оператор</a:t>
-            </a:r>
-            <a:r>
-              <a:rPr sz="2800" spc="-114" dirty="0">
-                <a:latin typeface="Microsoft Sans Serif"/>
-                <a:cs typeface="Microsoft Sans Serif"/>
-              </a:rPr>
-              <a:t> </a:t>
-            </a:r>
-            <a:r>
-              <a:rPr sz="2800" spc="-50" dirty="0">
-                <a:latin typeface="Microsoft Sans Serif"/>
-                <a:cs typeface="Microsoft Sans Serif"/>
-              </a:rPr>
-              <a:t>&lt;</a:t>
-            </a:r>
-            <a:endParaRPr sz="2800">
-              <a:latin typeface="Microsoft Sans Serif"/>
-              <a:cs typeface="Microsoft Sans Serif"/>
-            </a:endParaRPr>
-          </a:p>
-          <a:p>
-            <a:pPr marL="241935" indent="-229235">
-              <a:lnSpc>
-                <a:spcPct val="100000"/>
-              </a:lnSpc>
-              <a:spcBef>
-                <a:spcPts val="525"/>
-              </a:spcBef>
-              <a:buChar char="•"/>
-              <a:tabLst>
-                <a:tab pos="241935" algn="l"/>
-              </a:tabLst>
-            </a:pPr>
-            <a:r>
-              <a:rPr sz="2800" dirty="0">
-                <a:latin typeface="Microsoft Sans Serif"/>
-                <a:cs typeface="Microsoft Sans Serif"/>
-              </a:rPr>
-              <a:t>Остальные</a:t>
-            </a:r>
-            <a:r>
-              <a:rPr sz="2800" spc="-135" dirty="0">
-                <a:latin typeface="Microsoft Sans Serif"/>
-                <a:cs typeface="Microsoft Sans Serif"/>
-              </a:rPr>
-              <a:t> </a:t>
-            </a:r>
-            <a:r>
-              <a:rPr sz="2800" spc="-10" dirty="0">
-                <a:latin typeface="Microsoft Sans Serif"/>
-                <a:cs typeface="Microsoft Sans Serif"/>
-              </a:rPr>
-              <a:t>выражаются</a:t>
-            </a:r>
-            <a:r>
-              <a:rPr sz="2800" spc="-135" dirty="0">
-                <a:latin typeface="Microsoft Sans Serif"/>
-                <a:cs typeface="Microsoft Sans Serif"/>
-              </a:rPr>
-              <a:t> </a:t>
-            </a:r>
-            <a:r>
-              <a:rPr sz="2800" spc="-20" dirty="0">
-                <a:latin typeface="Microsoft Sans Serif"/>
-                <a:cs typeface="Microsoft Sans Serif"/>
-              </a:rPr>
-              <a:t>через</a:t>
-            </a:r>
-            <a:r>
-              <a:rPr sz="2800" spc="-130" dirty="0">
-                <a:latin typeface="Microsoft Sans Serif"/>
-                <a:cs typeface="Microsoft Sans Serif"/>
-              </a:rPr>
-              <a:t> </a:t>
-            </a:r>
-            <a:r>
-              <a:rPr sz="2800" spc="-50" dirty="0">
-                <a:latin typeface="Microsoft Sans Serif"/>
-                <a:cs typeface="Microsoft Sans Serif"/>
-              </a:rPr>
-              <a:t>&lt;</a:t>
-            </a:r>
-            <a:endParaRPr sz="2800">
-              <a:latin typeface="Microsoft Sans Serif"/>
-              <a:cs typeface="Microsoft Sans Serif"/>
-            </a:endParaRPr>
-          </a:p>
-          <a:p>
-            <a:pPr marL="241935" indent="-229235">
-              <a:lnSpc>
-                <a:spcPct val="100000"/>
-              </a:lnSpc>
-              <a:spcBef>
-                <a:spcPts val="530"/>
-              </a:spcBef>
-              <a:buChar char="•"/>
-              <a:tabLst>
-                <a:tab pos="241935" algn="l"/>
-              </a:tabLst>
-            </a:pPr>
-            <a:r>
-              <a:rPr sz="2800" dirty="0">
-                <a:latin typeface="Microsoft Sans Serif"/>
-                <a:cs typeface="Microsoft Sans Serif"/>
-              </a:rPr>
-              <a:t>Не</a:t>
-            </a:r>
-            <a:r>
-              <a:rPr sz="2800" spc="-15" dirty="0">
-                <a:latin typeface="Microsoft Sans Serif"/>
-                <a:cs typeface="Microsoft Sans Serif"/>
-              </a:rPr>
-              <a:t> </a:t>
-            </a:r>
-            <a:r>
-              <a:rPr sz="2800" dirty="0">
-                <a:latin typeface="Microsoft Sans Serif"/>
-                <a:cs typeface="Microsoft Sans Serif"/>
-              </a:rPr>
-              <a:t>пишите</a:t>
-            </a:r>
-            <a:r>
-              <a:rPr sz="2800" spc="-10" dirty="0">
-                <a:latin typeface="Microsoft Sans Serif"/>
-                <a:cs typeface="Microsoft Sans Serif"/>
-              </a:rPr>
-              <a:t> </a:t>
-            </a:r>
-            <a:r>
-              <a:rPr sz="2800" dirty="0">
-                <a:latin typeface="Microsoft Sans Serif"/>
-                <a:cs typeface="Microsoft Sans Serif"/>
-              </a:rPr>
-              <a:t>a</a:t>
-            </a:r>
-            <a:r>
-              <a:rPr sz="2800" spc="-10" dirty="0">
-                <a:latin typeface="Microsoft Sans Serif"/>
-                <a:cs typeface="Microsoft Sans Serif"/>
-              </a:rPr>
-              <a:t> </a:t>
-            </a:r>
-            <a:r>
-              <a:rPr sz="2800" dirty="0">
-                <a:latin typeface="Microsoft Sans Serif"/>
-                <a:cs typeface="Microsoft Sans Serif"/>
-              </a:rPr>
-              <a:t>&gt;</a:t>
-            </a:r>
-            <a:r>
-              <a:rPr sz="2800" spc="-10" dirty="0">
-                <a:latin typeface="Microsoft Sans Serif"/>
-                <a:cs typeface="Microsoft Sans Serif"/>
-              </a:rPr>
-              <a:t> </a:t>
-            </a:r>
-            <a:r>
-              <a:rPr sz="2800" dirty="0">
-                <a:latin typeface="Microsoft Sans Serif"/>
-                <a:cs typeface="Microsoft Sans Serif"/>
-              </a:rPr>
-              <a:t>b</a:t>
-            </a:r>
-            <a:r>
-              <a:rPr sz="2800" spc="-10" dirty="0">
-                <a:latin typeface="Microsoft Sans Serif"/>
-                <a:cs typeface="Microsoft Sans Serif"/>
-              </a:rPr>
-              <a:t> </a:t>
-            </a:r>
-            <a:r>
-              <a:rPr sz="2800" spc="-60" dirty="0">
-                <a:latin typeface="Microsoft Sans Serif"/>
-                <a:cs typeface="Microsoft Sans Serif"/>
-              </a:rPr>
-              <a:t>как</a:t>
-            </a:r>
-            <a:r>
-              <a:rPr sz="2800" spc="-10" dirty="0">
-                <a:latin typeface="Microsoft Sans Serif"/>
-                <a:cs typeface="Microsoft Sans Serif"/>
-              </a:rPr>
-              <a:t> </a:t>
-            </a:r>
-            <a:r>
-              <a:rPr sz="2800" dirty="0">
-                <a:latin typeface="Microsoft Sans Serif"/>
-                <a:cs typeface="Microsoft Sans Serif"/>
-              </a:rPr>
-              <a:t>(a</a:t>
-            </a:r>
-            <a:r>
-              <a:rPr sz="2800" spc="-15" dirty="0">
-                <a:latin typeface="Microsoft Sans Serif"/>
-                <a:cs typeface="Microsoft Sans Serif"/>
-              </a:rPr>
-              <a:t> </a:t>
-            </a:r>
-            <a:r>
-              <a:rPr sz="2800" dirty="0">
-                <a:latin typeface="Microsoft Sans Serif"/>
-                <a:cs typeface="Microsoft Sans Serif"/>
-              </a:rPr>
-              <a:t>!=</a:t>
-            </a:r>
-            <a:r>
-              <a:rPr sz="2800" spc="-10" dirty="0">
-                <a:latin typeface="Microsoft Sans Serif"/>
-                <a:cs typeface="Microsoft Sans Serif"/>
-              </a:rPr>
-              <a:t> </a:t>
-            </a:r>
-            <a:r>
-              <a:rPr sz="2800" dirty="0">
-                <a:latin typeface="Microsoft Sans Serif"/>
-                <a:cs typeface="Microsoft Sans Serif"/>
-              </a:rPr>
-              <a:t>b)</a:t>
-            </a:r>
-            <a:r>
-              <a:rPr sz="2800" spc="-10" dirty="0">
-                <a:latin typeface="Microsoft Sans Serif"/>
-                <a:cs typeface="Microsoft Sans Serif"/>
-              </a:rPr>
-              <a:t> </a:t>
-            </a:r>
-            <a:r>
-              <a:rPr sz="2800" dirty="0">
-                <a:latin typeface="Microsoft Sans Serif"/>
-                <a:cs typeface="Microsoft Sans Serif"/>
-              </a:rPr>
-              <a:t>&amp;&amp;</a:t>
-            </a:r>
-            <a:r>
-              <a:rPr sz="2800" spc="-10" dirty="0">
-                <a:latin typeface="Microsoft Sans Serif"/>
-                <a:cs typeface="Microsoft Sans Serif"/>
-              </a:rPr>
-              <a:t> </a:t>
-            </a:r>
-            <a:r>
-              <a:rPr sz="2800" dirty="0">
-                <a:latin typeface="Microsoft Sans Serif"/>
-                <a:cs typeface="Microsoft Sans Serif"/>
-              </a:rPr>
-              <a:t>!(a</a:t>
-            </a:r>
-            <a:r>
-              <a:rPr sz="2800" spc="-10" dirty="0">
-                <a:latin typeface="Microsoft Sans Serif"/>
-                <a:cs typeface="Microsoft Sans Serif"/>
-              </a:rPr>
-              <a:t> </a:t>
-            </a:r>
-            <a:r>
-              <a:rPr sz="2800" dirty="0">
-                <a:latin typeface="Microsoft Sans Serif"/>
-                <a:cs typeface="Microsoft Sans Serif"/>
-              </a:rPr>
-              <a:t>&lt;</a:t>
-            </a:r>
-            <a:r>
-              <a:rPr sz="2800" spc="-10" dirty="0">
-                <a:latin typeface="Microsoft Sans Serif"/>
-                <a:cs typeface="Microsoft Sans Serif"/>
-              </a:rPr>
-              <a:t> </a:t>
-            </a:r>
-            <a:r>
-              <a:rPr sz="2800" spc="-25" dirty="0">
-                <a:latin typeface="Microsoft Sans Serif"/>
-                <a:cs typeface="Microsoft Sans Serif"/>
-              </a:rPr>
-              <a:t>b)</a:t>
-            </a:r>
-            <a:endParaRPr sz="2800">
-              <a:latin typeface="Microsoft Sans Serif"/>
-              <a:cs typeface="Microsoft Sans Serif"/>
-            </a:endParaRPr>
-          </a:p>
-          <a:p>
-            <a:pPr marL="241935" indent="-229235">
-              <a:lnSpc>
-                <a:spcPct val="100000"/>
-              </a:lnSpc>
-              <a:spcBef>
-                <a:spcPts val="530"/>
-              </a:spcBef>
-              <a:buChar char="•"/>
-              <a:tabLst>
-                <a:tab pos="241935" algn="l"/>
-              </a:tabLst>
-            </a:pPr>
-            <a:r>
-              <a:rPr sz="2800" dirty="0">
-                <a:latin typeface="Microsoft Sans Serif"/>
-                <a:cs typeface="Microsoft Sans Serif"/>
-              </a:rPr>
-              <a:t>Лучше</a:t>
-            </a:r>
-            <a:r>
-              <a:rPr sz="2800" spc="-60" dirty="0">
-                <a:latin typeface="Microsoft Sans Serif"/>
-                <a:cs typeface="Microsoft Sans Serif"/>
-              </a:rPr>
-              <a:t> </a:t>
-            </a:r>
-            <a:r>
-              <a:rPr sz="2800" dirty="0">
-                <a:latin typeface="Microsoft Sans Serif"/>
-                <a:cs typeface="Microsoft Sans Serif"/>
-              </a:rPr>
-              <a:t>пишите</a:t>
-            </a:r>
-            <a:r>
-              <a:rPr sz="2800" spc="-65" dirty="0">
-                <a:latin typeface="Microsoft Sans Serif"/>
-                <a:cs typeface="Microsoft Sans Serif"/>
-              </a:rPr>
-              <a:t> </a:t>
-            </a:r>
-            <a:r>
-              <a:rPr sz="2800" dirty="0">
-                <a:latin typeface="Microsoft Sans Serif"/>
-                <a:cs typeface="Microsoft Sans Serif"/>
-              </a:rPr>
-              <a:t>b</a:t>
-            </a:r>
-            <a:r>
-              <a:rPr sz="2800" spc="-60" dirty="0">
-                <a:latin typeface="Microsoft Sans Serif"/>
-                <a:cs typeface="Microsoft Sans Serif"/>
-              </a:rPr>
-              <a:t> </a:t>
-            </a:r>
-            <a:r>
-              <a:rPr sz="2800" dirty="0">
-                <a:latin typeface="Microsoft Sans Serif"/>
-                <a:cs typeface="Microsoft Sans Serif"/>
-              </a:rPr>
-              <a:t>&lt;</a:t>
-            </a:r>
-            <a:r>
-              <a:rPr sz="2800" spc="-60" dirty="0">
-                <a:latin typeface="Microsoft Sans Serif"/>
-                <a:cs typeface="Microsoft Sans Serif"/>
-              </a:rPr>
-              <a:t> a</a:t>
-            </a:r>
-            <a:endParaRPr sz="2800">
-              <a:latin typeface="Microsoft Sans Serif"/>
-              <a:cs typeface="Microsoft Sans Serif"/>
-            </a:endParaRPr>
-          </a:p>
-          <a:p>
-            <a:pPr marL="241935" indent="-229235">
-              <a:lnSpc>
-                <a:spcPct val="100000"/>
-              </a:lnSpc>
-              <a:spcBef>
-                <a:spcPts val="530"/>
-              </a:spcBef>
-              <a:buChar char="•"/>
-              <a:tabLst>
-                <a:tab pos="241935" algn="l"/>
-              </a:tabLst>
-            </a:pPr>
-            <a:r>
-              <a:rPr sz="2800" dirty="0">
-                <a:latin typeface="Microsoft Sans Serif"/>
-                <a:cs typeface="Microsoft Sans Serif"/>
-              </a:rPr>
-              <a:t>Старайтесь</a:t>
-            </a:r>
-            <a:r>
-              <a:rPr sz="2800" spc="-170" dirty="0">
-                <a:latin typeface="Microsoft Sans Serif"/>
-                <a:cs typeface="Microsoft Sans Serif"/>
-              </a:rPr>
-              <a:t> </a:t>
-            </a:r>
-            <a:r>
-              <a:rPr sz="2800" spc="-35" dirty="0">
-                <a:latin typeface="Microsoft Sans Serif"/>
-                <a:cs typeface="Microsoft Sans Serif"/>
-              </a:rPr>
-              <a:t>избегать</a:t>
-            </a:r>
-            <a:r>
-              <a:rPr sz="2800" spc="-150" dirty="0">
-                <a:latin typeface="Microsoft Sans Serif"/>
-                <a:cs typeface="Microsoft Sans Serif"/>
-              </a:rPr>
-              <a:t> </a:t>
-            </a:r>
-            <a:r>
-              <a:rPr sz="2800" spc="-10" dirty="0">
-                <a:latin typeface="Microsoft Sans Serif"/>
-                <a:cs typeface="Microsoft Sans Serif"/>
-              </a:rPr>
-              <a:t>друзей</a:t>
-            </a:r>
-            <a:r>
-              <a:rPr sz="2800" spc="-160" dirty="0">
-                <a:latin typeface="Microsoft Sans Serif"/>
-                <a:cs typeface="Microsoft Sans Serif"/>
-              </a:rPr>
-              <a:t> </a:t>
-            </a:r>
-            <a:r>
-              <a:rPr sz="2800" spc="-10" dirty="0">
-                <a:latin typeface="Microsoft Sans Serif"/>
-                <a:cs typeface="Microsoft Sans Serif"/>
-              </a:rPr>
-              <a:t>(friend)</a:t>
-            </a:r>
-            <a:endParaRPr sz="2800">
-              <a:latin typeface="Microsoft Sans Serif"/>
-              <a:cs typeface="Microsoft Sans Serif"/>
-            </a:endParaRPr>
-          </a:p>
-        </p:txBody>
-      </p:sp>
-    </p:spTree>
-  </p:cSld>
-  <p:clrMapOvr>
-    <a:masterClrMapping/>
-  </p:clrMapOvr>
-</p:sld>
-</file>
-
-<file path=ppt/slides/slide6.xml><?xml version="1.0" encoding="utf-8"?>
-<p:sld xmlns:a="http://schemas.openxmlformats.org/drawingml/2006/main" xmlns:r="http://schemas.openxmlformats.org/officeDocument/2006/relationships" xmlns:p="http://schemas.openxmlformats.org/presentationml/2006/main">
-  <p:cSld>
-    <p:spTree>
-      <p:nvGrpSpPr>
-        <p:cNvPr id="1" name=""/>
-        <p:cNvGrpSpPr/>
-        <p:nvPr/>
-      </p:nvGrpSpPr>
-      <p:grpSpPr>
-        <a:xfrm>
-          <a:off x="0" y="0"/>
-          <a:ext cx="0" cy="0"/>
-          <a:chOff x="0" y="0"/>
-          <a:chExt cx="0" cy="0"/>
-        </a:xfrm>
-      </p:grpSpPr>
-      <p:sp>
-        <p:nvSpPr>
-          <p:cNvPr id="2" name="Title 1">
-            <a:extLst>
-              <a:ext uri="{FF2B5EF4-FFF2-40B4-BE49-F238E27FC236}">
-                <a16:creationId xmlns:a16="http://schemas.microsoft.com/office/drawing/2014/main" id="{DBEC7596-4879-4B45-A82A-AF3E889B689A}"/>
-              </a:ext>
-            </a:extLst>
-          </p:cNvPr>
-          <p:cNvSpPr>
-            <a:spLocks noGrp="1"/>
-          </p:cNvSpPr>
-          <p:nvPr>
-            <p:ph type="title"/>
-          </p:nvPr>
-        </p:nvSpPr>
-        <p:spPr>
-          <a:xfrm>
-            <a:off x="871218" y="642446"/>
-            <a:ext cx="7815582" cy="677108"/>
-          </a:xfrm>
-        </p:spPr>
-        <p:txBody>
-          <a:bodyPr/>
-          <a:lstStyle/>
-          <a:p>
-            <a:r>
-              <a:rPr lang="en-US" dirty="0"/>
-              <a:t>Spaceship operator (</a:t>
-            </a:r>
-            <a:r>
-              <a:rPr lang="en-US" dirty="0">
-                <a:sym typeface="Wingdings" panose="05000000000000000000" pitchFamily="2" charset="2"/>
-              </a:rPr>
-              <a:t>&lt;=&gt;)</a:t>
-            </a:r>
-            <a:endParaRPr lang="ru-RU" dirty="0"/>
-          </a:p>
-        </p:txBody>
-      </p:sp>
-      <p:sp>
-        <p:nvSpPr>
-          <p:cNvPr id="3" name="Text Placeholder 2">
-            <a:extLst>
-              <a:ext uri="{FF2B5EF4-FFF2-40B4-BE49-F238E27FC236}">
-                <a16:creationId xmlns:a16="http://schemas.microsoft.com/office/drawing/2014/main" id="{660E3F46-0617-4E52-B3C6-44FBB76CE016}"/>
-              </a:ext>
-            </a:extLst>
-          </p:cNvPr>
-          <p:cNvSpPr>
-            <a:spLocks noGrp="1"/>
-          </p:cNvSpPr>
-          <p:nvPr>
-            <p:ph type="body" idx="1"/>
-          </p:nvPr>
-        </p:nvSpPr>
-        <p:spPr>
-          <a:xfrm>
-            <a:off x="871219" y="1822455"/>
-            <a:ext cx="10259060" cy="2154436"/>
-          </a:xfrm>
-        </p:spPr>
-        <p:txBody>
-          <a:bodyPr/>
-          <a:lstStyle/>
-          <a:p>
-            <a:endParaRPr lang="ru-RU" dirty="0">
-              <a:hlinkClick r:id="rId2"/>
-            </a:endParaRPr>
-          </a:p>
-          <a:p>
-            <a:pPr marL="457200" indent="-457200">
-              <a:buFont typeface="Arial" panose="020B0604020202020204" pitchFamily="34" charset="0"/>
-              <a:buChar char="•"/>
-            </a:pPr>
-            <a:r>
-              <a:rPr lang="ru-RU" dirty="0">
-                <a:hlinkClick r:id="rId3"/>
-              </a:rPr>
-              <a:t>Подробная статья</a:t>
-            </a:r>
-            <a:endParaRPr lang="ru-RU" dirty="0">
-              <a:hlinkClick r:id="rId2"/>
-            </a:endParaRPr>
-          </a:p>
-          <a:p>
-            <a:pPr marL="457200" indent="-457200">
-              <a:buFont typeface="Arial" panose="020B0604020202020204" pitchFamily="34" charset="0"/>
-              <a:buChar char="•"/>
-            </a:pPr>
-            <a:r>
-              <a:rPr lang="en-US" dirty="0">
-                <a:hlinkClick r:id="rId2"/>
-              </a:rPr>
-              <a:t>std::</a:t>
-            </a:r>
-            <a:r>
-              <a:rPr lang="en-US" dirty="0" err="1">
-                <a:hlinkClick r:id="rId2"/>
-              </a:rPr>
-              <a:t>strong_ordering</a:t>
-            </a:r>
-            <a:r>
-              <a:rPr lang="en-US" dirty="0">
-                <a:hlinkClick r:id="rId2"/>
-              </a:rPr>
-              <a:t>, std::</a:t>
-            </a:r>
-            <a:r>
-              <a:rPr lang="en-US" dirty="0" err="1">
-                <a:hlinkClick r:id="rId2"/>
-              </a:rPr>
-              <a:t>weak_ordering</a:t>
-            </a:r>
-            <a:r>
-              <a:rPr lang="en-US" dirty="0">
-                <a:hlinkClick r:id="rId2"/>
-              </a:rPr>
-              <a:t> </a:t>
-            </a:r>
-            <a:r>
-              <a:rPr lang="ru-RU" dirty="0">
-                <a:hlinkClick r:id="rId2"/>
-              </a:rPr>
-              <a:t>или </a:t>
-            </a:r>
-            <a:r>
-              <a:rPr lang="en-US" dirty="0">
-                <a:hlinkClick r:id="rId2"/>
-              </a:rPr>
-              <a:t>std::</a:t>
-            </a:r>
-            <a:r>
-              <a:rPr lang="en-US" dirty="0" err="1">
-                <a:hlinkClick r:id="rId2"/>
-              </a:rPr>
-              <a:t>partial_ordering</a:t>
-            </a:r>
-            <a:r>
-              <a:rPr lang="en-US" dirty="0">
-                <a:hlinkClick r:id="rId2"/>
-              </a:rPr>
-              <a:t>?</a:t>
-            </a:r>
-            <a:endParaRPr lang="en-US" dirty="0"/>
-          </a:p>
-          <a:p>
-            <a:pPr marL="457200" indent="-457200">
-              <a:buFont typeface="Arial" panose="020B0604020202020204" pitchFamily="34" charset="0"/>
-              <a:buChar char="•"/>
-            </a:pPr>
-            <a:r>
-              <a:rPr lang="ru-RU" dirty="0">
-                <a:hlinkClick r:id="rId4"/>
-              </a:rPr>
-              <a:t>Насколько полезно?</a:t>
-            </a:r>
-            <a:endParaRPr lang="ru-RU" dirty="0"/>
-          </a:p>
-        </p:txBody>
-      </p:sp>
-    </p:spTree>
-    <p:extLst>
-      <p:ext uri="{BB962C8B-B14F-4D97-AF65-F5344CB8AC3E}">
-        <p14:creationId xmlns:p14="http://schemas.microsoft.com/office/powerpoint/2010/main" val="403485468"/>
-      </p:ext>
-    </p:extLst>
-  </p:cSld>
-  <p:clrMapOvr>
-    <a:masterClrMapping/>
-  </p:clrMapOvr>
-</p:sld>
-</file>
-
-<file path=ppt/slides/slide7.xml><?xml version="1.0" encoding="utf-8"?>
-<p:sld xmlns:a="http://schemas.openxmlformats.org/drawingml/2006/main" xmlns:r="http://schemas.openxmlformats.org/officeDocument/2006/relationships" xmlns:p="http://schemas.openxmlformats.org/presentationml/2006/main" showMasterSp="0">
-  <p:cSld>
-    <p:spTree>
-      <p:nvGrpSpPr>
-        <p:cNvPr id="1" name=""/>
-        <p:cNvGrpSpPr/>
-        <p:nvPr/>
-      </p:nvGrpSpPr>
-      <p:grpSpPr>
-        <a:xfrm>
-          <a:off x="0" y="0"/>
-          <a:ext cx="0" cy="0"/>
-          <a:chOff x="0" y="0"/>
-          <a:chExt cx="0" cy="0"/>
-        </a:xfrm>
-      </p:grpSpPr>
-      <p:sp>
-        <p:nvSpPr>
-          <p:cNvPr id="2" name="object 2"/>
-          <p:cNvSpPr txBox="1">
-            <a:spLocks noGrp="1"/>
-          </p:cNvSpPr>
-          <p:nvPr>
-            <p:ph type="title"/>
-          </p:nvPr>
-        </p:nvSpPr>
-        <p:spPr>
-          <a:prstGeom prst="rect">
-            <a:avLst/>
-          </a:prstGeom>
-        </p:spPr>
-        <p:txBody>
-          <a:bodyPr vert="horz" wrap="square" lIns="0" tIns="12700" rIns="0" bIns="0" rtlCol="0">
-            <a:spAutoFit/>
-          </a:bodyPr>
-          <a:lstStyle/>
-          <a:p>
-            <a:pPr marL="12700">
-              <a:lnSpc>
-                <a:spcPct val="100000"/>
-              </a:lnSpc>
-              <a:spcBef>
-                <a:spcPts val="100"/>
-              </a:spcBef>
-            </a:pPr>
-            <a:r>
-              <a:rPr dirty="0"/>
-              <a:t>Вывод</a:t>
-            </a:r>
-            <a:r>
-              <a:rPr spc="-40" dirty="0"/>
-              <a:t> </a:t>
-            </a:r>
-            <a:r>
-              <a:rPr dirty="0"/>
-              <a:t>в</a:t>
-            </a:r>
-            <a:r>
-              <a:rPr spc="-40" dirty="0"/>
-              <a:t> </a:t>
-            </a:r>
-            <a:r>
-              <a:rPr spc="-85" dirty="0"/>
-              <a:t>поток</a:t>
-            </a:r>
-          </a:p>
-        </p:txBody>
-      </p:sp>
-      <p:sp>
-        <p:nvSpPr>
-          <p:cNvPr id="3" name="object 3"/>
-          <p:cNvSpPr txBox="1"/>
-          <p:nvPr/>
-        </p:nvSpPr>
-        <p:spPr>
-          <a:xfrm>
-            <a:off x="871219" y="1755251"/>
-            <a:ext cx="9998710" cy="2495550"/>
-          </a:xfrm>
-          <a:prstGeom prst="rect">
-            <a:avLst/>
-          </a:prstGeom>
-        </p:spPr>
-        <p:txBody>
-          <a:bodyPr vert="horz" wrap="square" lIns="0" tIns="80010" rIns="0" bIns="0" rtlCol="0">
-            <a:spAutoFit/>
-          </a:bodyPr>
-          <a:lstStyle/>
-          <a:p>
-            <a:pPr marL="241935" indent="-229235">
-              <a:lnSpc>
-                <a:spcPct val="100000"/>
-              </a:lnSpc>
-              <a:spcBef>
-                <a:spcPts val="630"/>
-              </a:spcBef>
-              <a:buChar char="•"/>
-              <a:tabLst>
-                <a:tab pos="241935" algn="l"/>
-              </a:tabLst>
-            </a:pPr>
-            <a:r>
-              <a:rPr sz="2800" dirty="0">
-                <a:latin typeface="Microsoft Sans Serif"/>
-                <a:cs typeface="Microsoft Sans Serif"/>
-              </a:rPr>
-              <a:t>В</a:t>
-            </a:r>
-            <a:r>
-              <a:rPr sz="2800" spc="-85" dirty="0">
-                <a:latin typeface="Microsoft Sans Serif"/>
-                <a:cs typeface="Microsoft Sans Serif"/>
-              </a:rPr>
-              <a:t> </a:t>
-            </a:r>
-            <a:r>
-              <a:rPr sz="2800" dirty="0">
-                <a:latin typeface="Microsoft Sans Serif"/>
-                <a:cs typeface="Microsoft Sans Serif"/>
-              </a:rPr>
-              <a:t>классе</a:t>
-            </a:r>
-            <a:r>
-              <a:rPr sz="2800" spc="-85" dirty="0">
-                <a:latin typeface="Microsoft Sans Serif"/>
-                <a:cs typeface="Microsoft Sans Serif"/>
-              </a:rPr>
-              <a:t> </a:t>
-            </a:r>
-            <a:r>
-              <a:rPr sz="2800" spc="-10" dirty="0">
-                <a:latin typeface="Microsoft Sans Serif"/>
-                <a:cs typeface="Microsoft Sans Serif"/>
-              </a:rPr>
-              <a:t>объявляем</a:t>
-            </a:r>
-            <a:r>
-              <a:rPr sz="2800" spc="-80" dirty="0">
-                <a:latin typeface="Microsoft Sans Serif"/>
-                <a:cs typeface="Microsoft Sans Serif"/>
-              </a:rPr>
-              <a:t> </a:t>
-            </a:r>
-            <a:r>
-              <a:rPr sz="2800" spc="-10" dirty="0">
-                <a:latin typeface="Microsoft Sans Serif"/>
-                <a:cs typeface="Microsoft Sans Serif"/>
-              </a:rPr>
-              <a:t>friend</a:t>
-            </a:r>
-            <a:endParaRPr sz="2800">
-              <a:latin typeface="Microsoft Sans Serif"/>
-              <a:cs typeface="Microsoft Sans Serif"/>
-            </a:endParaRPr>
-          </a:p>
-          <a:p>
-            <a:pPr marL="241935" indent="-229235">
-              <a:lnSpc>
-                <a:spcPct val="100000"/>
-              </a:lnSpc>
-              <a:spcBef>
-                <a:spcPts val="525"/>
-              </a:spcBef>
-              <a:buChar char="•"/>
-              <a:tabLst>
-                <a:tab pos="241935" algn="l"/>
-              </a:tabLst>
-            </a:pPr>
-            <a:r>
-              <a:rPr sz="2800" dirty="0">
-                <a:latin typeface="Microsoft Sans Serif"/>
-                <a:cs typeface="Microsoft Sans Serif"/>
-              </a:rPr>
-              <a:t>Снаружи</a:t>
-            </a:r>
-            <a:r>
-              <a:rPr sz="2800" spc="-185" dirty="0">
-                <a:latin typeface="Microsoft Sans Serif"/>
-                <a:cs typeface="Microsoft Sans Serif"/>
-              </a:rPr>
-              <a:t> </a:t>
-            </a:r>
-            <a:r>
-              <a:rPr sz="2800" spc="-10" dirty="0">
-                <a:latin typeface="Microsoft Sans Serif"/>
-                <a:cs typeface="Microsoft Sans Serif"/>
-              </a:rPr>
-              <a:t>пишем:</a:t>
-            </a:r>
-            <a:endParaRPr sz="2800">
-              <a:latin typeface="Microsoft Sans Serif"/>
-              <a:cs typeface="Microsoft Sans Serif"/>
-            </a:endParaRPr>
-          </a:p>
-          <a:p>
-            <a:pPr marL="241935" indent="-229235">
-              <a:lnSpc>
-                <a:spcPct val="100000"/>
-              </a:lnSpc>
-              <a:spcBef>
-                <a:spcPts val="530"/>
-              </a:spcBef>
-              <a:buChar char="•"/>
-              <a:tabLst>
-                <a:tab pos="241935" algn="l"/>
-              </a:tabLst>
-            </a:pPr>
-            <a:r>
-              <a:rPr sz="2800" dirty="0">
-                <a:latin typeface="Microsoft Sans Serif"/>
-                <a:cs typeface="Microsoft Sans Serif"/>
-              </a:rPr>
-              <a:t>std::ostream&amp;</a:t>
-            </a:r>
-            <a:r>
-              <a:rPr sz="2800" spc="-20" dirty="0">
-                <a:latin typeface="Microsoft Sans Serif"/>
-                <a:cs typeface="Microsoft Sans Serif"/>
-              </a:rPr>
-              <a:t> </a:t>
-            </a:r>
-            <a:r>
-              <a:rPr sz="2800" spc="-10" dirty="0">
-                <a:latin typeface="Microsoft Sans Serif"/>
-                <a:cs typeface="Microsoft Sans Serif"/>
-              </a:rPr>
-              <a:t>operator&lt;&lt;(std::ostream&amp;</a:t>
-            </a:r>
-            <a:r>
-              <a:rPr sz="2800" spc="-20" dirty="0">
-                <a:latin typeface="Microsoft Sans Serif"/>
-                <a:cs typeface="Microsoft Sans Serif"/>
-              </a:rPr>
-              <a:t> </a:t>
-            </a:r>
-            <a:r>
-              <a:rPr sz="2800" dirty="0">
-                <a:latin typeface="Microsoft Sans Serif"/>
-                <a:cs typeface="Microsoft Sans Serif"/>
-              </a:rPr>
-              <a:t>os,</a:t>
-            </a:r>
-            <a:r>
-              <a:rPr sz="2800" spc="-15" dirty="0">
-                <a:latin typeface="Microsoft Sans Serif"/>
-                <a:cs typeface="Microsoft Sans Serif"/>
-              </a:rPr>
-              <a:t> </a:t>
-            </a:r>
-            <a:r>
-              <a:rPr sz="2800" dirty="0">
-                <a:latin typeface="Microsoft Sans Serif"/>
-                <a:cs typeface="Microsoft Sans Serif"/>
-              </a:rPr>
-              <a:t>const</a:t>
-            </a:r>
-            <a:r>
-              <a:rPr sz="2800" spc="-20" dirty="0">
-                <a:latin typeface="Microsoft Sans Serif"/>
-                <a:cs typeface="Microsoft Sans Serif"/>
-              </a:rPr>
-              <a:t> </a:t>
-            </a:r>
-            <a:r>
-              <a:rPr sz="2800" dirty="0">
-                <a:latin typeface="Microsoft Sans Serif"/>
-                <a:cs typeface="Microsoft Sans Serif"/>
-              </a:rPr>
-              <a:t>String&amp;</a:t>
-            </a:r>
-            <a:r>
-              <a:rPr sz="2800" spc="-15" dirty="0">
-                <a:latin typeface="Microsoft Sans Serif"/>
-                <a:cs typeface="Microsoft Sans Serif"/>
-              </a:rPr>
-              <a:t> </a:t>
-            </a:r>
-            <a:r>
-              <a:rPr sz="2800" dirty="0">
-                <a:latin typeface="Microsoft Sans Serif"/>
-                <a:cs typeface="Microsoft Sans Serif"/>
-              </a:rPr>
-              <a:t>s)</a:t>
-            </a:r>
-            <a:r>
-              <a:rPr sz="2800" spc="-20" dirty="0">
-                <a:latin typeface="Microsoft Sans Serif"/>
-                <a:cs typeface="Microsoft Sans Serif"/>
-              </a:rPr>
-              <a:t> </a:t>
-            </a:r>
-            <a:r>
-              <a:rPr sz="2800" spc="-50" dirty="0">
-                <a:latin typeface="Microsoft Sans Serif"/>
-                <a:cs typeface="Microsoft Sans Serif"/>
-              </a:rPr>
-              <a:t>{</a:t>
-            </a:r>
-            <a:endParaRPr sz="2800">
-              <a:latin typeface="Microsoft Sans Serif"/>
-              <a:cs typeface="Microsoft Sans Serif"/>
-            </a:endParaRPr>
-          </a:p>
-          <a:p>
-            <a:pPr marL="241935" indent="-229235">
-              <a:lnSpc>
-                <a:spcPct val="100000"/>
-              </a:lnSpc>
-              <a:spcBef>
-                <a:spcPts val="530"/>
-              </a:spcBef>
-              <a:buChar char="•"/>
-              <a:tabLst>
-                <a:tab pos="241935" algn="l"/>
-              </a:tabLst>
-            </a:pPr>
-            <a:r>
-              <a:rPr sz="2800" spc="-25" dirty="0">
-                <a:latin typeface="Microsoft Sans Serif"/>
-                <a:cs typeface="Microsoft Sans Serif"/>
-              </a:rPr>
-              <a:t>...</a:t>
-            </a:r>
-            <a:endParaRPr sz="2800">
-              <a:latin typeface="Microsoft Sans Serif"/>
-              <a:cs typeface="Microsoft Sans Serif"/>
-            </a:endParaRPr>
-          </a:p>
-          <a:p>
-            <a:pPr marL="241935" indent="-229235">
-              <a:lnSpc>
-                <a:spcPct val="100000"/>
-              </a:lnSpc>
-              <a:spcBef>
-                <a:spcPts val="530"/>
-              </a:spcBef>
-              <a:buChar char="•"/>
-              <a:tabLst>
-                <a:tab pos="241935" algn="l"/>
-              </a:tabLst>
-            </a:pPr>
-            <a:r>
-              <a:rPr sz="2800" dirty="0">
-                <a:latin typeface="Microsoft Sans Serif"/>
-                <a:cs typeface="Microsoft Sans Serif"/>
-              </a:rPr>
-              <a:t>return</a:t>
-            </a:r>
-            <a:r>
-              <a:rPr sz="2800" spc="-5" dirty="0">
-                <a:latin typeface="Microsoft Sans Serif"/>
-                <a:cs typeface="Microsoft Sans Serif"/>
-              </a:rPr>
-              <a:t> </a:t>
-            </a:r>
-            <a:r>
-              <a:rPr sz="2800" dirty="0">
-                <a:latin typeface="Microsoft Sans Serif"/>
-                <a:cs typeface="Microsoft Sans Serif"/>
-              </a:rPr>
-              <a:t>os</a:t>
-            </a:r>
-            <a:r>
-              <a:rPr sz="2800" spc="-5" dirty="0">
-                <a:latin typeface="Microsoft Sans Serif"/>
-                <a:cs typeface="Microsoft Sans Serif"/>
-              </a:rPr>
-              <a:t> </a:t>
-            </a:r>
-            <a:r>
-              <a:rPr sz="2800" dirty="0">
-                <a:latin typeface="Microsoft Sans Serif"/>
-                <a:cs typeface="Microsoft Sans Serif"/>
-              </a:rPr>
-              <a:t>&lt;&lt;</a:t>
-            </a:r>
-            <a:r>
-              <a:rPr sz="2800" spc="-5" dirty="0">
-                <a:latin typeface="Microsoft Sans Serif"/>
-                <a:cs typeface="Microsoft Sans Serif"/>
-              </a:rPr>
-              <a:t> </a:t>
-            </a:r>
-            <a:r>
-              <a:rPr sz="2800" dirty="0">
-                <a:latin typeface="Microsoft Sans Serif"/>
-                <a:cs typeface="Microsoft Sans Serif"/>
-              </a:rPr>
-              <a:t>...</a:t>
-            </a:r>
-            <a:r>
-              <a:rPr sz="2800" spc="-5" dirty="0">
-                <a:latin typeface="Microsoft Sans Serif"/>
-                <a:cs typeface="Microsoft Sans Serif"/>
-              </a:rPr>
-              <a:t> </a:t>
-            </a:r>
-            <a:r>
-              <a:rPr sz="2800" spc="-50" dirty="0">
-                <a:latin typeface="Microsoft Sans Serif"/>
-                <a:cs typeface="Microsoft Sans Serif"/>
-              </a:rPr>
-              <a:t>;</a:t>
-            </a:r>
-            <a:endParaRPr sz="2800">
-              <a:latin typeface="Microsoft Sans Serif"/>
-              <a:cs typeface="Microsoft Sans Serif"/>
-            </a:endParaRPr>
-          </a:p>
-        </p:txBody>
-      </p:sp>
-    </p:spTree>
-  </p:cSld>
-  <p:clrMapOvr>
-    <a:masterClrMapping/>
-  </p:clrMapOvr>
-</p:sld>
-</file>
-
-<file path=ppt/slides/slide8.xml><?xml version="1.0" encoding="utf-8"?>
+<file path=ppt/slides/slide20.xml><?xml version="1.0" encoding="utf-8"?>
 <p:sld xmlns:a="http://schemas.openxmlformats.org/drawingml/2006/main" xmlns:r="http://schemas.openxmlformats.org/officeDocument/2006/relationships" xmlns:p="http://schemas.openxmlformats.org/presentationml/2006/main">
   <p:cSld>
     <p:spTree>
@@ -4404,7 +4560,7 @@
 </p:sld>
 </file>
 
-<file path=ppt/slides/slide9.xml><?xml version="1.0" encoding="utf-8"?>
+<file path=ppt/slides/slide21.xml><?xml version="1.0" encoding="utf-8"?>
 <p:sld xmlns:a="http://schemas.openxmlformats.org/drawingml/2006/main" xmlns:r="http://schemas.openxmlformats.org/officeDocument/2006/relationships" xmlns:p="http://schemas.openxmlformats.org/presentationml/2006/main" showMasterSp="0">
   <p:cSld>
     <p:spTree>
@@ -4698,6 +4854,2435 @@
         </p:txBody>
       </p:sp>
     </p:spTree>
+  </p:cSld>
+  <p:clrMapOvr>
+    <a:masterClrMapping/>
+  </p:clrMapOvr>
+</p:sld>
+</file>
+
+<file path=ppt/slides/slide3.xml><?xml version="1.0" encoding="utf-8"?>
+<p:sld xmlns:a="http://schemas.openxmlformats.org/drawingml/2006/main" xmlns:r="http://schemas.openxmlformats.org/officeDocument/2006/relationships" xmlns:p="http://schemas.openxmlformats.org/presentationml/2006/main">
+  <p:cSld>
+    <p:spTree>
+      <p:nvGrpSpPr>
+        <p:cNvPr id="1" name=""/>
+        <p:cNvGrpSpPr/>
+        <p:nvPr/>
+      </p:nvGrpSpPr>
+      <p:grpSpPr>
+        <a:xfrm>
+          <a:off x="0" y="0"/>
+          <a:ext cx="0" cy="0"/>
+          <a:chOff x="0" y="0"/>
+          <a:chExt cx="0" cy="0"/>
+        </a:xfrm>
+      </p:grpSpPr>
+      <p:sp>
+        <p:nvSpPr>
+          <p:cNvPr id="2" name="Title 1">
+            <a:extLst>
+              <a:ext uri="{FF2B5EF4-FFF2-40B4-BE49-F238E27FC236}">
+                <a16:creationId xmlns:a16="http://schemas.microsoft.com/office/drawing/2014/main" id="{8D24AC4D-BD93-4E19-B556-7868D3782B76}"/>
+              </a:ext>
+            </a:extLst>
+          </p:cNvPr>
+          <p:cNvSpPr>
+            <a:spLocks noGrp="1"/>
+          </p:cNvSpPr>
+          <p:nvPr>
+            <p:ph type="title"/>
+          </p:nvPr>
+        </p:nvSpPr>
+        <p:spPr>
+          <a:xfrm>
+            <a:off x="2797809" y="457200"/>
+            <a:ext cx="6596381" cy="1354217"/>
+          </a:xfrm>
+        </p:spPr>
+        <p:txBody>
+          <a:bodyPr/>
+          <a:lstStyle/>
+          <a:p>
+            <a:r>
+              <a:rPr lang="ru-RU" dirty="0"/>
+              <a:t>Оператор присваивания</a:t>
+            </a:r>
+          </a:p>
+        </p:txBody>
+      </p:sp>
+      <p:sp>
+        <p:nvSpPr>
+          <p:cNvPr id="3" name="TextBox 2">
+            <a:extLst>
+              <a:ext uri="{FF2B5EF4-FFF2-40B4-BE49-F238E27FC236}">
+                <a16:creationId xmlns:a16="http://schemas.microsoft.com/office/drawing/2014/main" id="{218103F5-364D-45DC-9EE4-591502156C75}"/>
+              </a:ext>
+            </a:extLst>
+          </p:cNvPr>
+          <p:cNvSpPr txBox="1"/>
+          <p:nvPr/>
+        </p:nvSpPr>
+        <p:spPr>
+          <a:xfrm>
+            <a:off x="2971800" y="2590800"/>
+            <a:ext cx="45719" cy="369332"/>
+          </a:xfrm>
+          <a:prstGeom prst="rect">
+            <a:avLst/>
+          </a:prstGeom>
+          <a:noFill/>
+        </p:spPr>
+        <p:txBody>
+          <a:bodyPr wrap="square" rtlCol="0">
+            <a:spAutoFit/>
+          </a:bodyPr>
+          <a:lstStyle/>
+          <a:p>
+            <a:endParaRPr lang="ru-RU" dirty="0"/>
+          </a:p>
+        </p:txBody>
+      </p:sp>
+      <p:sp>
+        <p:nvSpPr>
+          <p:cNvPr id="4" name="TextBox 3">
+            <a:extLst>
+              <a:ext uri="{FF2B5EF4-FFF2-40B4-BE49-F238E27FC236}">
+                <a16:creationId xmlns:a16="http://schemas.microsoft.com/office/drawing/2014/main" id="{C65CCB56-4018-4CDD-A9E9-7E03C12B3FEF}"/>
+              </a:ext>
+            </a:extLst>
+          </p:cNvPr>
+          <p:cNvSpPr txBox="1"/>
+          <p:nvPr/>
+        </p:nvSpPr>
+        <p:spPr>
+          <a:xfrm>
+            <a:off x="2247899" y="1811417"/>
+            <a:ext cx="7696200" cy="3539430"/>
+          </a:xfrm>
+          <a:prstGeom prst="rect">
+            <a:avLst/>
+          </a:prstGeom>
+          <a:noFill/>
+        </p:spPr>
+        <p:txBody>
+          <a:bodyPr wrap="square" rtlCol="0">
+            <a:spAutoFit/>
+          </a:bodyPr>
+          <a:lstStyle/>
+          <a:p>
+            <a:r>
+              <a:rPr lang="ru-RU" sz="2800" dirty="0"/>
+              <a:t>Присваивание самому себе</a:t>
+            </a:r>
+            <a:r>
+              <a:rPr lang="en-US" sz="2800" dirty="0"/>
+              <a:t>:</a:t>
+            </a:r>
+          </a:p>
+          <a:p>
+            <a:r>
+              <a:rPr lang="en-US" sz="2800" dirty="0">
+                <a:solidFill>
+                  <a:srgbClr val="FF0000"/>
+                </a:solidFill>
+              </a:rPr>
+              <a:t>*this == other </a:t>
+            </a:r>
+            <a:r>
+              <a:rPr lang="en-US" sz="2800" dirty="0">
+                <a:solidFill>
+                  <a:schemeClr val="tx1"/>
+                </a:solidFill>
+              </a:rPr>
+              <a:t>– </a:t>
+            </a:r>
+            <a:r>
+              <a:rPr lang="ru-RU" sz="2800" dirty="0">
+                <a:solidFill>
+                  <a:schemeClr val="tx1"/>
+                </a:solidFill>
+              </a:rPr>
+              <a:t>сравнение объектов</a:t>
+            </a:r>
+            <a:endParaRPr lang="en-US" sz="2800" dirty="0">
+              <a:solidFill>
+                <a:srgbClr val="FF0000"/>
+              </a:solidFill>
+            </a:endParaRPr>
+          </a:p>
+          <a:p>
+            <a:r>
+              <a:rPr lang="en-US" sz="2800" dirty="0">
+                <a:solidFill>
+                  <a:srgbClr val="00B050"/>
+                </a:solidFill>
+              </a:rPr>
+              <a:t>this == &amp;other</a:t>
+            </a:r>
+            <a:r>
+              <a:rPr lang="ru-RU" sz="2800" dirty="0">
+                <a:solidFill>
+                  <a:schemeClr val="tx1"/>
+                </a:solidFill>
+              </a:rPr>
+              <a:t> – сравнение указателей</a:t>
+            </a:r>
+          </a:p>
+          <a:p>
+            <a:endParaRPr lang="en-US" sz="2800" dirty="0">
+              <a:solidFill>
+                <a:schemeClr val="tx1"/>
+              </a:solidFill>
+            </a:endParaRPr>
+          </a:p>
+          <a:p>
+            <a:r>
+              <a:rPr lang="ru-RU" sz="2800" dirty="0">
+                <a:solidFill>
+                  <a:schemeClr val="tx1"/>
+                </a:solidFill>
+              </a:rPr>
+              <a:t>Идиома </a:t>
+            </a:r>
+            <a:r>
+              <a:rPr lang="en-US" sz="2800" dirty="0">
+                <a:solidFill>
+                  <a:schemeClr val="tx1"/>
+                </a:solidFill>
+                <a:hlinkClick r:id="rId2"/>
+              </a:rPr>
+              <a:t>copy-and-swap</a:t>
+            </a:r>
+            <a:r>
+              <a:rPr lang="en-US" sz="2800" dirty="0">
+                <a:solidFill>
+                  <a:schemeClr val="tx1"/>
+                </a:solidFill>
+              </a:rPr>
+              <a:t>:</a:t>
+            </a:r>
+          </a:p>
+          <a:p>
+            <a:pPr marL="342900" indent="-342900">
+              <a:buFont typeface="+mj-lt"/>
+              <a:buAutoNum type="arabicPeriod"/>
+            </a:pPr>
+            <a:r>
+              <a:rPr lang="ru-RU" sz="2800" dirty="0">
+                <a:solidFill>
+                  <a:schemeClr val="tx1"/>
+                </a:solidFill>
+              </a:rPr>
+              <a:t>Принимаем по значению (конструктор копированием)</a:t>
+            </a:r>
+          </a:p>
+          <a:p>
+            <a:pPr marL="342900" indent="-342900">
+              <a:buFont typeface="+mj-lt"/>
+              <a:buAutoNum type="arabicPeriod"/>
+            </a:pPr>
+            <a:r>
+              <a:rPr lang="ru-RU" sz="2800" dirty="0">
+                <a:solidFill>
+                  <a:schemeClr val="tx1"/>
+                </a:solidFill>
+              </a:rPr>
+              <a:t>Делаем </a:t>
+            </a:r>
+            <a:r>
+              <a:rPr lang="en-US" sz="2800" dirty="0">
+                <a:solidFill>
+                  <a:schemeClr val="tx1"/>
+                </a:solidFill>
+              </a:rPr>
+              <a:t>swap </a:t>
+            </a:r>
+            <a:r>
+              <a:rPr lang="ru-RU" sz="2800" dirty="0">
+                <a:solidFill>
+                  <a:schemeClr val="tx1"/>
+                </a:solidFill>
+              </a:rPr>
+              <a:t>полей</a:t>
+            </a:r>
+          </a:p>
+        </p:txBody>
+      </p:sp>
+    </p:spTree>
+    <p:extLst>
+      <p:ext uri="{BB962C8B-B14F-4D97-AF65-F5344CB8AC3E}">
+        <p14:creationId xmlns:p14="http://schemas.microsoft.com/office/powerpoint/2010/main" val="146127656"/>
+      </p:ext>
+    </p:extLst>
+  </p:cSld>
+  <p:clrMapOvr>
+    <a:masterClrMapping/>
+  </p:clrMapOvr>
+</p:sld>
+</file>
+
+<file path=ppt/slides/slide4.xml><?xml version="1.0" encoding="utf-8"?>
+<p:sld xmlns:a="http://schemas.openxmlformats.org/drawingml/2006/main" xmlns:r="http://schemas.openxmlformats.org/officeDocument/2006/relationships" xmlns:p="http://schemas.openxmlformats.org/presentationml/2006/main" showMasterSp="0">
+  <p:cSld>
+    <p:spTree>
+      <p:nvGrpSpPr>
+        <p:cNvPr id="1" name=""/>
+        <p:cNvGrpSpPr/>
+        <p:nvPr/>
+      </p:nvGrpSpPr>
+      <p:grpSpPr>
+        <a:xfrm>
+          <a:off x="0" y="0"/>
+          <a:ext cx="0" cy="0"/>
+          <a:chOff x="0" y="0"/>
+          <a:chExt cx="0" cy="0"/>
+        </a:xfrm>
+      </p:grpSpPr>
+      <p:sp>
+        <p:nvSpPr>
+          <p:cNvPr id="2" name="object 2"/>
+          <p:cNvSpPr txBox="1">
+            <a:spLocks noGrp="1"/>
+          </p:cNvSpPr>
+          <p:nvPr>
+            <p:ph type="title"/>
+          </p:nvPr>
+        </p:nvSpPr>
+        <p:spPr>
+          <a:xfrm>
+            <a:off x="871219" y="642446"/>
+            <a:ext cx="4400550" cy="695960"/>
+          </a:xfrm>
+          <a:prstGeom prst="rect">
+            <a:avLst/>
+          </a:prstGeom>
+        </p:spPr>
+        <p:txBody>
+          <a:bodyPr vert="horz" wrap="square" lIns="0" tIns="12700" rIns="0" bIns="0" rtlCol="0">
+            <a:spAutoFit/>
+          </a:bodyPr>
+          <a:lstStyle/>
+          <a:p>
+            <a:pPr marL="12700">
+              <a:lnSpc>
+                <a:spcPct val="100000"/>
+              </a:lnSpc>
+              <a:spcBef>
+                <a:spcPts val="100"/>
+              </a:spcBef>
+            </a:pPr>
+            <a:r>
+              <a:rPr spc="-10" dirty="0"/>
+              <a:t>Операторы</a:t>
+            </a:r>
+            <a:r>
+              <a:rPr spc="-120" dirty="0"/>
+              <a:t> </a:t>
+            </a:r>
+            <a:r>
+              <a:rPr dirty="0"/>
+              <a:t>+,</a:t>
+            </a:r>
+            <a:r>
+              <a:rPr spc="-114" dirty="0"/>
+              <a:t> </a:t>
+            </a:r>
+            <a:r>
+              <a:rPr spc="-25" dirty="0"/>
+              <a:t>+=</a:t>
+            </a:r>
+          </a:p>
+        </p:txBody>
+      </p:sp>
+      <p:sp>
+        <p:nvSpPr>
+          <p:cNvPr id="3" name="object 3"/>
+          <p:cNvSpPr txBox="1"/>
+          <p:nvPr/>
+        </p:nvSpPr>
+        <p:spPr>
+          <a:xfrm>
+            <a:off x="871219" y="1755251"/>
+            <a:ext cx="10190480" cy="3150863"/>
+          </a:xfrm>
+          <a:prstGeom prst="rect">
+            <a:avLst/>
+          </a:prstGeom>
+        </p:spPr>
+        <p:txBody>
+          <a:bodyPr vert="horz" wrap="square" lIns="0" tIns="80010" rIns="0" bIns="0" rtlCol="0">
+            <a:spAutoFit/>
+          </a:bodyPr>
+          <a:lstStyle/>
+          <a:p>
+            <a:pPr marL="241935" indent="-229235">
+              <a:lnSpc>
+                <a:spcPct val="100000"/>
+              </a:lnSpc>
+              <a:spcBef>
+                <a:spcPts val="630"/>
+              </a:spcBef>
+              <a:buChar char="•"/>
+              <a:tabLst>
+                <a:tab pos="241935" algn="l"/>
+              </a:tabLst>
+            </a:pPr>
+            <a:r>
+              <a:rPr sz="2800" spc="-10" dirty="0">
+                <a:latin typeface="Microsoft Sans Serif"/>
+                <a:cs typeface="Microsoft Sans Serif"/>
+              </a:rPr>
+              <a:t>Выражаем</a:t>
+            </a:r>
+            <a:r>
+              <a:rPr sz="2800" spc="-65" dirty="0">
+                <a:latin typeface="Microsoft Sans Serif"/>
+                <a:cs typeface="Microsoft Sans Serif"/>
+              </a:rPr>
+              <a:t> </a:t>
+            </a:r>
+            <a:r>
+              <a:rPr sz="2800" dirty="0">
+                <a:latin typeface="Microsoft Sans Serif"/>
+                <a:cs typeface="Microsoft Sans Serif"/>
+              </a:rPr>
+              <a:t>+</a:t>
+            </a:r>
+            <a:r>
+              <a:rPr sz="2800" spc="-60" dirty="0">
+                <a:latin typeface="Microsoft Sans Serif"/>
+                <a:cs typeface="Microsoft Sans Serif"/>
+              </a:rPr>
+              <a:t> </a:t>
+            </a:r>
+            <a:r>
+              <a:rPr sz="2800" spc="-20" dirty="0">
+                <a:latin typeface="Microsoft Sans Serif"/>
+                <a:cs typeface="Microsoft Sans Serif"/>
+              </a:rPr>
+              <a:t>через</a:t>
+            </a:r>
+            <a:r>
+              <a:rPr sz="2800" spc="-60" dirty="0">
+                <a:latin typeface="Microsoft Sans Serif"/>
+                <a:cs typeface="Microsoft Sans Serif"/>
+              </a:rPr>
+              <a:t> </a:t>
+            </a:r>
+            <a:r>
+              <a:rPr sz="2800" dirty="0">
+                <a:latin typeface="Microsoft Sans Serif"/>
+                <a:cs typeface="Microsoft Sans Serif"/>
+              </a:rPr>
+              <a:t>+=</a:t>
+            </a:r>
+            <a:r>
+              <a:rPr sz="2800" spc="-60" dirty="0">
+                <a:latin typeface="Microsoft Sans Serif"/>
+                <a:cs typeface="Microsoft Sans Serif"/>
+              </a:rPr>
+              <a:t> </a:t>
+            </a:r>
+            <a:r>
+              <a:rPr lang="ru-RU" sz="2800" spc="725" dirty="0">
+                <a:latin typeface="Microsoft Sans Serif"/>
+                <a:cs typeface="Microsoft Sans Serif"/>
+              </a:rPr>
+              <a:t> - </a:t>
+            </a:r>
+            <a:r>
+              <a:rPr sz="2800" spc="-25" dirty="0" err="1">
+                <a:latin typeface="Microsoft Sans Serif"/>
+                <a:cs typeface="Microsoft Sans Serif"/>
+              </a:rPr>
+              <a:t>экономим</a:t>
+            </a:r>
+            <a:r>
+              <a:rPr sz="2800" spc="-60" dirty="0">
+                <a:latin typeface="Microsoft Sans Serif"/>
+                <a:cs typeface="Microsoft Sans Serif"/>
+              </a:rPr>
+              <a:t> </a:t>
+            </a:r>
+            <a:r>
+              <a:rPr sz="2800" dirty="0">
+                <a:latin typeface="Microsoft Sans Serif"/>
+                <a:cs typeface="Microsoft Sans Serif"/>
+              </a:rPr>
+              <a:t>на</a:t>
+            </a:r>
+            <a:r>
+              <a:rPr sz="2800" spc="-60" dirty="0">
+                <a:latin typeface="Microsoft Sans Serif"/>
+                <a:cs typeface="Microsoft Sans Serif"/>
+              </a:rPr>
+              <a:t> </a:t>
+            </a:r>
+            <a:r>
+              <a:rPr sz="2800" spc="-10" dirty="0">
+                <a:latin typeface="Microsoft Sans Serif"/>
+                <a:cs typeface="Microsoft Sans Serif"/>
+              </a:rPr>
+              <a:t>копировании</a:t>
+            </a:r>
+            <a:endParaRPr sz="2800" dirty="0">
+              <a:latin typeface="Microsoft Sans Serif"/>
+              <a:cs typeface="Microsoft Sans Serif"/>
+            </a:endParaRPr>
+          </a:p>
+          <a:p>
+            <a:pPr marL="241300" marR="5080" indent="-228600">
+              <a:lnSpc>
+                <a:spcPts val="2890"/>
+              </a:lnSpc>
+              <a:spcBef>
+                <a:spcPts val="1015"/>
+              </a:spcBef>
+            </a:pPr>
+            <a:r>
+              <a:rPr sz="2800" dirty="0">
+                <a:latin typeface="Microsoft Sans Serif"/>
+                <a:cs typeface="Microsoft Sans Serif"/>
+              </a:rPr>
+              <a:t>•</a:t>
+            </a:r>
+            <a:r>
+              <a:rPr sz="2800" spc="-20" dirty="0">
+                <a:latin typeface="Microsoft Sans Serif"/>
+                <a:cs typeface="Microsoft Sans Serif"/>
+              </a:rPr>
+              <a:t> </a:t>
+            </a:r>
+            <a:r>
+              <a:rPr sz="2800" dirty="0">
+                <a:latin typeface="Microsoft Sans Serif"/>
+                <a:cs typeface="Microsoft Sans Serif"/>
+              </a:rPr>
+              <a:t>+</a:t>
+            </a:r>
+            <a:r>
+              <a:rPr sz="2800" spc="-55" dirty="0">
+                <a:latin typeface="Microsoft Sans Serif"/>
+                <a:cs typeface="Microsoft Sans Serif"/>
+              </a:rPr>
+              <a:t> </a:t>
+            </a:r>
+            <a:r>
+              <a:rPr sz="2800" dirty="0">
+                <a:latin typeface="Microsoft Sans Serif"/>
+                <a:cs typeface="Microsoft Sans Serif"/>
+              </a:rPr>
+              <a:t>не</a:t>
+            </a:r>
+            <a:r>
+              <a:rPr sz="2800" spc="-55" dirty="0">
+                <a:latin typeface="Microsoft Sans Serif"/>
+                <a:cs typeface="Microsoft Sans Serif"/>
+              </a:rPr>
+              <a:t> </a:t>
+            </a:r>
+            <a:r>
+              <a:rPr sz="2800" dirty="0">
+                <a:latin typeface="Microsoft Sans Serif"/>
+                <a:cs typeface="Microsoft Sans Serif"/>
+              </a:rPr>
+              <a:t>надо</a:t>
+            </a:r>
+            <a:r>
+              <a:rPr sz="2800" spc="-55" dirty="0">
+                <a:latin typeface="Microsoft Sans Serif"/>
+                <a:cs typeface="Microsoft Sans Serif"/>
+              </a:rPr>
+              <a:t> </a:t>
+            </a:r>
+            <a:r>
+              <a:rPr sz="2800" dirty="0">
+                <a:latin typeface="Microsoft Sans Serif"/>
+                <a:cs typeface="Microsoft Sans Serif"/>
+              </a:rPr>
+              <a:t>делать</a:t>
+            </a:r>
+            <a:r>
+              <a:rPr sz="2800" spc="-55" dirty="0">
+                <a:latin typeface="Microsoft Sans Serif"/>
+                <a:cs typeface="Microsoft Sans Serif"/>
+              </a:rPr>
+              <a:t> </a:t>
+            </a:r>
+            <a:r>
+              <a:rPr sz="2800" dirty="0">
+                <a:latin typeface="Microsoft Sans Serif"/>
+                <a:cs typeface="Microsoft Sans Serif"/>
+              </a:rPr>
+              <a:t>членом</a:t>
+            </a:r>
+            <a:r>
+              <a:rPr sz="2800" spc="-55" dirty="0">
+                <a:latin typeface="Microsoft Sans Serif"/>
+                <a:cs typeface="Microsoft Sans Serif"/>
+              </a:rPr>
+              <a:t> </a:t>
+            </a:r>
+            <a:r>
+              <a:rPr sz="2800" dirty="0">
+                <a:latin typeface="Microsoft Sans Serif"/>
+                <a:cs typeface="Microsoft Sans Serif"/>
+              </a:rPr>
+              <a:t>класса,</a:t>
+            </a:r>
+            <a:r>
+              <a:rPr sz="2800" spc="-60" dirty="0">
+                <a:latin typeface="Microsoft Sans Serif"/>
+                <a:cs typeface="Microsoft Sans Serif"/>
+              </a:rPr>
+              <a:t> </a:t>
+            </a:r>
+            <a:r>
+              <a:rPr sz="2800" dirty="0">
+                <a:latin typeface="Microsoft Sans Serif"/>
+                <a:cs typeface="Microsoft Sans Serif"/>
+              </a:rPr>
+              <a:t>ибо</a:t>
+            </a:r>
+            <a:r>
+              <a:rPr sz="2800" spc="-55" dirty="0">
+                <a:latin typeface="Microsoft Sans Serif"/>
+                <a:cs typeface="Microsoft Sans Serif"/>
+              </a:rPr>
+              <a:t> </a:t>
+            </a:r>
+            <a:r>
+              <a:rPr sz="2800" dirty="0">
+                <a:latin typeface="Microsoft Sans Serif"/>
+                <a:cs typeface="Microsoft Sans Serif"/>
+              </a:rPr>
+              <a:t>левый</a:t>
+            </a:r>
+            <a:r>
+              <a:rPr sz="2800" spc="-55" dirty="0">
+                <a:latin typeface="Microsoft Sans Serif"/>
+                <a:cs typeface="Microsoft Sans Serif"/>
+              </a:rPr>
+              <a:t> </a:t>
+            </a:r>
+            <a:r>
+              <a:rPr sz="2800" dirty="0">
+                <a:latin typeface="Microsoft Sans Serif"/>
+                <a:cs typeface="Microsoft Sans Serif"/>
+              </a:rPr>
+              <a:t>операнд</a:t>
+            </a:r>
+            <a:r>
+              <a:rPr sz="2800" spc="-55" dirty="0">
+                <a:latin typeface="Microsoft Sans Serif"/>
+                <a:cs typeface="Microsoft Sans Serif"/>
+              </a:rPr>
+              <a:t> </a:t>
+            </a:r>
+            <a:r>
+              <a:rPr sz="2800" spc="-10" dirty="0">
+                <a:latin typeface="Microsoft Sans Serif"/>
+                <a:cs typeface="Microsoft Sans Serif"/>
+              </a:rPr>
+              <a:t>может </a:t>
+            </a:r>
+            <a:r>
+              <a:rPr sz="2800" dirty="0">
+                <a:latin typeface="Microsoft Sans Serif"/>
+                <a:cs typeface="Microsoft Sans Serif"/>
+              </a:rPr>
+              <a:t>не</a:t>
+            </a:r>
+            <a:r>
+              <a:rPr sz="2800" spc="-60" dirty="0">
+                <a:latin typeface="Microsoft Sans Serif"/>
+                <a:cs typeface="Microsoft Sans Serif"/>
+              </a:rPr>
+              <a:t> </a:t>
+            </a:r>
+            <a:r>
+              <a:rPr sz="2800" dirty="0">
+                <a:latin typeface="Microsoft Sans Serif"/>
+                <a:cs typeface="Microsoft Sans Serif"/>
+              </a:rPr>
+              <a:t>быть</a:t>
+            </a:r>
+            <a:r>
+              <a:rPr sz="2800" spc="-55" dirty="0">
+                <a:latin typeface="Microsoft Sans Serif"/>
+                <a:cs typeface="Microsoft Sans Serif"/>
+              </a:rPr>
+              <a:t> </a:t>
+            </a:r>
+            <a:r>
+              <a:rPr sz="2800" spc="-30" dirty="0">
+                <a:latin typeface="Microsoft Sans Serif"/>
+                <a:cs typeface="Microsoft Sans Serif"/>
+              </a:rPr>
+              <a:t>объектом</a:t>
+            </a:r>
+            <a:r>
+              <a:rPr sz="2800" spc="-55" dirty="0">
+                <a:latin typeface="Microsoft Sans Serif"/>
+                <a:cs typeface="Microsoft Sans Serif"/>
+              </a:rPr>
+              <a:t> </a:t>
+            </a:r>
+            <a:r>
+              <a:rPr sz="2800" spc="-10" dirty="0">
+                <a:latin typeface="Microsoft Sans Serif"/>
+                <a:cs typeface="Microsoft Sans Serif"/>
+              </a:rPr>
+              <a:t>класса</a:t>
+            </a:r>
+            <a:endParaRPr sz="2800" dirty="0">
+              <a:latin typeface="Microsoft Sans Serif"/>
+              <a:cs typeface="Microsoft Sans Serif"/>
+            </a:endParaRPr>
+          </a:p>
+          <a:p>
+            <a:pPr marL="241935" indent="-229235">
+              <a:lnSpc>
+                <a:spcPct val="100000"/>
+              </a:lnSpc>
+              <a:spcBef>
+                <a:spcPts val="509"/>
+              </a:spcBef>
+              <a:buChar char="•"/>
+              <a:tabLst>
+                <a:tab pos="241935" algn="l"/>
+              </a:tabLst>
+            </a:pPr>
+            <a:r>
+              <a:rPr sz="2800" dirty="0">
+                <a:latin typeface="Microsoft Sans Serif"/>
+                <a:cs typeface="Microsoft Sans Serif"/>
+              </a:rPr>
+              <a:t>Нужно</a:t>
+            </a:r>
+            <a:r>
+              <a:rPr sz="2800" spc="-60" dirty="0">
+                <a:latin typeface="Microsoft Sans Serif"/>
+                <a:cs typeface="Microsoft Sans Serif"/>
+              </a:rPr>
+              <a:t> </a:t>
+            </a:r>
+            <a:r>
+              <a:rPr sz="2800" dirty="0">
+                <a:latin typeface="Microsoft Sans Serif"/>
+                <a:cs typeface="Microsoft Sans Serif"/>
+              </a:rPr>
+              <a:t>писать</a:t>
+            </a:r>
+            <a:r>
+              <a:rPr sz="2800" spc="-55" dirty="0">
+                <a:latin typeface="Microsoft Sans Serif"/>
+                <a:cs typeface="Microsoft Sans Serif"/>
+              </a:rPr>
+              <a:t> </a:t>
+            </a:r>
+            <a:r>
+              <a:rPr sz="2800" dirty="0">
+                <a:latin typeface="Microsoft Sans Serif"/>
+                <a:cs typeface="Microsoft Sans Serif"/>
+              </a:rPr>
+              <a:t>a</a:t>
+            </a:r>
+            <a:r>
+              <a:rPr sz="2800" spc="-55" dirty="0">
+                <a:latin typeface="Microsoft Sans Serif"/>
+                <a:cs typeface="Microsoft Sans Serif"/>
+              </a:rPr>
+              <a:t> </a:t>
+            </a:r>
+            <a:r>
+              <a:rPr sz="2800" dirty="0">
+                <a:latin typeface="Microsoft Sans Serif"/>
+                <a:cs typeface="Microsoft Sans Serif"/>
+              </a:rPr>
+              <a:t>+=</a:t>
+            </a:r>
+            <a:r>
+              <a:rPr sz="2800" spc="-60" dirty="0">
+                <a:latin typeface="Microsoft Sans Serif"/>
+                <a:cs typeface="Microsoft Sans Serif"/>
+              </a:rPr>
+              <a:t> </a:t>
+            </a:r>
+            <a:r>
+              <a:rPr sz="2800" dirty="0">
+                <a:latin typeface="Microsoft Sans Serif"/>
+                <a:cs typeface="Microsoft Sans Serif"/>
+              </a:rPr>
+              <a:t>b;</a:t>
+            </a:r>
+            <a:r>
+              <a:rPr sz="2800" spc="-55" dirty="0">
+                <a:latin typeface="Microsoft Sans Serif"/>
+                <a:cs typeface="Microsoft Sans Serif"/>
+              </a:rPr>
+              <a:t> </a:t>
+            </a:r>
+            <a:r>
+              <a:rPr sz="2800" dirty="0">
+                <a:latin typeface="Microsoft Sans Serif"/>
+                <a:cs typeface="Microsoft Sans Serif"/>
+              </a:rPr>
+              <a:t>return</a:t>
+            </a:r>
+            <a:r>
+              <a:rPr sz="2800" spc="-55" dirty="0">
+                <a:latin typeface="Microsoft Sans Serif"/>
+                <a:cs typeface="Microsoft Sans Serif"/>
+              </a:rPr>
+              <a:t> </a:t>
+            </a:r>
+            <a:r>
+              <a:rPr sz="2800" dirty="0">
+                <a:latin typeface="Microsoft Sans Serif"/>
+                <a:cs typeface="Microsoft Sans Serif"/>
+              </a:rPr>
+              <a:t>a;</a:t>
+            </a:r>
+            <a:r>
+              <a:rPr sz="2800" spc="-55" dirty="0">
+                <a:latin typeface="Microsoft Sans Serif"/>
+                <a:cs typeface="Microsoft Sans Serif"/>
+              </a:rPr>
+              <a:t> </a:t>
+            </a:r>
+            <a:r>
+              <a:rPr sz="2800" dirty="0">
+                <a:latin typeface="Microsoft Sans Serif"/>
+                <a:cs typeface="Microsoft Sans Serif"/>
+              </a:rPr>
+              <a:t>вместо</a:t>
+            </a:r>
+            <a:r>
+              <a:rPr sz="2800" spc="-60" dirty="0">
+                <a:latin typeface="Microsoft Sans Serif"/>
+                <a:cs typeface="Microsoft Sans Serif"/>
+              </a:rPr>
+              <a:t> </a:t>
+            </a:r>
+            <a:r>
+              <a:rPr sz="2800" dirty="0">
+                <a:latin typeface="Microsoft Sans Serif"/>
+                <a:cs typeface="Microsoft Sans Serif"/>
+              </a:rPr>
+              <a:t>return</a:t>
+            </a:r>
+            <a:r>
+              <a:rPr sz="2800" spc="-55" dirty="0">
+                <a:latin typeface="Microsoft Sans Serif"/>
+                <a:cs typeface="Microsoft Sans Serif"/>
+              </a:rPr>
+              <a:t> </a:t>
+            </a:r>
+            <a:r>
+              <a:rPr sz="2800" dirty="0">
+                <a:latin typeface="Microsoft Sans Serif"/>
+                <a:cs typeface="Microsoft Sans Serif"/>
+              </a:rPr>
+              <a:t>a+=b;</a:t>
+            </a:r>
+            <a:r>
+              <a:rPr sz="2800" spc="-55" dirty="0">
+                <a:latin typeface="Microsoft Sans Serif"/>
+                <a:cs typeface="Microsoft Sans Serif"/>
+              </a:rPr>
+              <a:t> </a:t>
+            </a:r>
+            <a:r>
+              <a:rPr sz="2800" spc="-10" dirty="0">
+                <a:latin typeface="Microsoft Sans Serif"/>
+                <a:cs typeface="Microsoft Sans Serif"/>
+              </a:rPr>
+              <a:t>(RVO)</a:t>
+            </a:r>
+            <a:endParaRPr sz="2800" dirty="0">
+              <a:latin typeface="Microsoft Sans Serif"/>
+              <a:cs typeface="Microsoft Sans Serif"/>
+            </a:endParaRPr>
+          </a:p>
+          <a:p>
+            <a:pPr marL="241935" indent="-229235">
+              <a:lnSpc>
+                <a:spcPct val="100000"/>
+              </a:lnSpc>
+              <a:spcBef>
+                <a:spcPts val="530"/>
+              </a:spcBef>
+              <a:buChar char="•"/>
+              <a:tabLst>
+                <a:tab pos="241935" algn="l"/>
+              </a:tabLst>
+            </a:pPr>
+            <a:r>
+              <a:rPr sz="2800" dirty="0">
+                <a:latin typeface="Microsoft Sans Serif"/>
+                <a:cs typeface="Microsoft Sans Serif"/>
+              </a:rPr>
+              <a:t>Что</a:t>
+            </a:r>
+            <a:r>
+              <a:rPr sz="2800" spc="-30" dirty="0">
+                <a:latin typeface="Microsoft Sans Serif"/>
+                <a:cs typeface="Microsoft Sans Serif"/>
+              </a:rPr>
+              <a:t> </a:t>
+            </a:r>
+            <a:r>
+              <a:rPr sz="2800" dirty="0">
+                <a:latin typeface="Microsoft Sans Serif"/>
+                <a:cs typeface="Microsoft Sans Serif"/>
+              </a:rPr>
+              <a:t>делать</a:t>
+            </a:r>
+            <a:r>
+              <a:rPr sz="2800" spc="-25" dirty="0">
+                <a:latin typeface="Microsoft Sans Serif"/>
+                <a:cs typeface="Microsoft Sans Serif"/>
+              </a:rPr>
+              <a:t> </a:t>
+            </a:r>
+            <a:r>
+              <a:rPr sz="2800" dirty="0">
+                <a:latin typeface="Microsoft Sans Serif"/>
+                <a:cs typeface="Microsoft Sans Serif"/>
+              </a:rPr>
+              <a:t>с</a:t>
+            </a:r>
+            <a:r>
+              <a:rPr sz="2800" spc="-25" dirty="0">
+                <a:latin typeface="Microsoft Sans Serif"/>
+                <a:cs typeface="Microsoft Sans Serif"/>
+              </a:rPr>
+              <a:t> </a:t>
+            </a:r>
+            <a:r>
+              <a:rPr sz="2800" dirty="0">
+                <a:latin typeface="Microsoft Sans Serif"/>
+                <a:cs typeface="Microsoft Sans Serif"/>
+              </a:rPr>
+              <a:t>a</a:t>
+            </a:r>
+            <a:r>
+              <a:rPr sz="2800" spc="-25" dirty="0">
+                <a:latin typeface="Microsoft Sans Serif"/>
+                <a:cs typeface="Microsoft Sans Serif"/>
+              </a:rPr>
+              <a:t> </a:t>
+            </a:r>
+            <a:r>
+              <a:rPr sz="2800" dirty="0">
+                <a:latin typeface="Microsoft Sans Serif"/>
+                <a:cs typeface="Microsoft Sans Serif"/>
+              </a:rPr>
+              <a:t>+</a:t>
+            </a:r>
+            <a:r>
+              <a:rPr sz="2800" spc="-25" dirty="0">
+                <a:latin typeface="Microsoft Sans Serif"/>
+                <a:cs typeface="Microsoft Sans Serif"/>
+              </a:rPr>
+              <a:t> </a:t>
+            </a:r>
+            <a:r>
+              <a:rPr sz="2800" dirty="0">
+                <a:latin typeface="Microsoft Sans Serif"/>
+                <a:cs typeface="Microsoft Sans Serif"/>
+              </a:rPr>
+              <a:t>b</a:t>
+            </a:r>
+            <a:r>
+              <a:rPr sz="2800" spc="-25" dirty="0">
+                <a:latin typeface="Microsoft Sans Serif"/>
+                <a:cs typeface="Microsoft Sans Serif"/>
+              </a:rPr>
+              <a:t> </a:t>
+            </a:r>
+            <a:r>
+              <a:rPr sz="2800" dirty="0">
+                <a:latin typeface="Microsoft Sans Serif"/>
+                <a:cs typeface="Microsoft Sans Serif"/>
+              </a:rPr>
+              <a:t>=</a:t>
+            </a:r>
+            <a:r>
+              <a:rPr sz="2800" spc="-25" dirty="0">
+                <a:latin typeface="Microsoft Sans Serif"/>
+                <a:cs typeface="Microsoft Sans Serif"/>
+              </a:rPr>
+              <a:t> 5?</a:t>
+            </a:r>
+            <a:endParaRPr sz="2800" dirty="0">
+              <a:latin typeface="Microsoft Sans Serif"/>
+              <a:cs typeface="Microsoft Sans Serif"/>
+            </a:endParaRPr>
+          </a:p>
+          <a:p>
+            <a:pPr marL="697865" lvl="1" indent="-227965">
+              <a:lnSpc>
+                <a:spcPct val="100000"/>
+              </a:lnSpc>
+              <a:spcBef>
+                <a:spcPts val="125"/>
+              </a:spcBef>
+              <a:buChar char="•"/>
+              <a:tabLst>
+                <a:tab pos="697865" algn="l"/>
+              </a:tabLst>
+            </a:pPr>
+            <a:r>
+              <a:rPr sz="2400" spc="-20" dirty="0">
+                <a:latin typeface="Microsoft Sans Serif"/>
+                <a:cs typeface="Microsoft Sans Serif"/>
+              </a:rPr>
+              <a:t>Возвращать</a:t>
+            </a:r>
+            <a:r>
+              <a:rPr sz="2400" spc="-70" dirty="0">
+                <a:latin typeface="Microsoft Sans Serif"/>
+                <a:cs typeface="Microsoft Sans Serif"/>
+              </a:rPr>
+              <a:t> </a:t>
+            </a:r>
+            <a:r>
+              <a:rPr sz="2400" spc="-20" dirty="0">
+                <a:latin typeface="Microsoft Sans Serif"/>
+                <a:cs typeface="Microsoft Sans Serif"/>
+              </a:rPr>
+              <a:t>const</a:t>
+            </a:r>
+            <a:endParaRPr sz="2400" dirty="0">
+              <a:latin typeface="Microsoft Sans Serif"/>
+              <a:cs typeface="Microsoft Sans Serif"/>
+            </a:endParaRPr>
+          </a:p>
+          <a:p>
+            <a:pPr marL="697865" lvl="1" indent="-227965">
+              <a:lnSpc>
+                <a:spcPct val="100000"/>
+              </a:lnSpc>
+              <a:spcBef>
+                <a:spcPts val="150"/>
+              </a:spcBef>
+              <a:buChar char="•"/>
+              <a:tabLst>
+                <a:tab pos="697865" algn="l"/>
+              </a:tabLst>
+            </a:pPr>
+            <a:r>
+              <a:rPr sz="2400" spc="-40" dirty="0">
+                <a:latin typeface="Microsoft Sans Serif"/>
+                <a:cs typeface="Microsoft Sans Serif"/>
+              </a:rPr>
+              <a:t>Докинуть </a:t>
+            </a:r>
+            <a:r>
+              <a:rPr sz="2400" dirty="0">
+                <a:latin typeface="Microsoft Sans Serif"/>
+                <a:cs typeface="Microsoft Sans Serif"/>
+              </a:rPr>
+              <a:t>&amp;</a:t>
+            </a:r>
+            <a:r>
+              <a:rPr sz="2400" spc="-40" dirty="0">
+                <a:latin typeface="Microsoft Sans Serif"/>
+                <a:cs typeface="Microsoft Sans Serif"/>
+              </a:rPr>
+              <a:t> </a:t>
+            </a:r>
+            <a:r>
+              <a:rPr sz="2400" dirty="0">
+                <a:latin typeface="Microsoft Sans Serif"/>
+                <a:cs typeface="Microsoft Sans Serif"/>
+              </a:rPr>
+              <a:t>в</a:t>
+            </a:r>
+            <a:r>
+              <a:rPr sz="2400" spc="-40" dirty="0">
+                <a:latin typeface="Microsoft Sans Serif"/>
+                <a:cs typeface="Microsoft Sans Serif"/>
+              </a:rPr>
+              <a:t> </a:t>
+            </a:r>
+            <a:r>
+              <a:rPr sz="2400" spc="-10" dirty="0" err="1">
+                <a:latin typeface="Microsoft Sans Serif"/>
+                <a:cs typeface="Microsoft Sans Serif"/>
+              </a:rPr>
+              <a:t>оператор</a:t>
+            </a:r>
+            <a:r>
+              <a:rPr lang="en-US" sz="2400" spc="-10" dirty="0">
+                <a:latin typeface="Microsoft Sans Serif"/>
+                <a:cs typeface="Microsoft Sans Serif"/>
+              </a:rPr>
+              <a:t> </a:t>
+            </a:r>
+            <a:r>
+              <a:rPr lang="ru-RU" sz="2400" spc="-10" dirty="0">
+                <a:latin typeface="Microsoft Sans Serif"/>
+                <a:cs typeface="Microsoft Sans Serif"/>
+              </a:rPr>
+              <a:t>присваивания</a:t>
+            </a:r>
+            <a:r>
+              <a:rPr sz="2400" spc="-40" dirty="0">
+                <a:latin typeface="Microsoft Sans Serif"/>
+                <a:cs typeface="Microsoft Sans Serif"/>
+              </a:rPr>
+              <a:t> </a:t>
+            </a:r>
+            <a:r>
+              <a:rPr sz="2400" spc="-10" dirty="0" err="1">
+                <a:latin typeface="Microsoft Sans Serif"/>
+                <a:cs typeface="Microsoft Sans Serif"/>
+              </a:rPr>
+              <a:t>справа</a:t>
+            </a:r>
+            <a:endParaRPr sz="2400" dirty="0">
+              <a:latin typeface="Microsoft Sans Serif"/>
+              <a:cs typeface="Microsoft Sans Serif"/>
+            </a:endParaRPr>
+          </a:p>
+        </p:txBody>
+      </p:sp>
+    </p:spTree>
+  </p:cSld>
+  <p:clrMapOvr>
+    <a:masterClrMapping/>
+  </p:clrMapOvr>
+</p:sld>
+</file>
+
+<file path=ppt/slides/slide5.xml><?xml version="1.0" encoding="utf-8"?>
+<p:sld xmlns:a="http://schemas.openxmlformats.org/drawingml/2006/main" xmlns:r="http://schemas.openxmlformats.org/officeDocument/2006/relationships" xmlns:p="http://schemas.openxmlformats.org/presentationml/2006/main" showMasterSp="0">
+  <p:cSld>
+    <p:spTree>
+      <p:nvGrpSpPr>
+        <p:cNvPr id="1" name=""/>
+        <p:cNvGrpSpPr/>
+        <p:nvPr/>
+      </p:nvGrpSpPr>
+      <p:grpSpPr>
+        <a:xfrm>
+          <a:off x="0" y="0"/>
+          <a:ext cx="0" cy="0"/>
+          <a:chOff x="0" y="0"/>
+          <a:chExt cx="0" cy="0"/>
+        </a:xfrm>
+      </p:grpSpPr>
+      <p:sp>
+        <p:nvSpPr>
+          <p:cNvPr id="2" name="object 2"/>
+          <p:cNvSpPr txBox="1">
+            <a:spLocks noGrp="1"/>
+          </p:cNvSpPr>
+          <p:nvPr>
+            <p:ph type="title"/>
+          </p:nvPr>
+        </p:nvSpPr>
+        <p:spPr>
+          <a:prstGeom prst="rect">
+            <a:avLst/>
+          </a:prstGeom>
+        </p:spPr>
+        <p:txBody>
+          <a:bodyPr vert="horz" wrap="square" lIns="0" tIns="12700" rIns="0" bIns="0" rtlCol="0">
+            <a:spAutoFit/>
+          </a:bodyPr>
+          <a:lstStyle/>
+          <a:p>
+            <a:pPr marL="12700">
+              <a:lnSpc>
+                <a:spcPct val="100000"/>
+              </a:lnSpc>
+              <a:spcBef>
+                <a:spcPts val="100"/>
+              </a:spcBef>
+            </a:pPr>
+            <a:r>
+              <a:rPr spc="-10" dirty="0"/>
+              <a:t>Сравнения</a:t>
+            </a:r>
+          </a:p>
+        </p:txBody>
+      </p:sp>
+      <p:sp>
+        <p:nvSpPr>
+          <p:cNvPr id="3" name="object 3"/>
+          <p:cNvSpPr txBox="1"/>
+          <p:nvPr/>
+        </p:nvSpPr>
+        <p:spPr>
+          <a:xfrm>
+            <a:off x="871219" y="1755251"/>
+            <a:ext cx="6598284" cy="2495550"/>
+          </a:xfrm>
+          <a:prstGeom prst="rect">
+            <a:avLst/>
+          </a:prstGeom>
+        </p:spPr>
+        <p:txBody>
+          <a:bodyPr vert="horz" wrap="square" lIns="0" tIns="80010" rIns="0" bIns="0" rtlCol="0">
+            <a:spAutoFit/>
+          </a:bodyPr>
+          <a:lstStyle/>
+          <a:p>
+            <a:pPr marL="241935" indent="-229235">
+              <a:lnSpc>
+                <a:spcPct val="100000"/>
+              </a:lnSpc>
+              <a:spcBef>
+                <a:spcPts val="630"/>
+              </a:spcBef>
+              <a:buChar char="•"/>
+              <a:tabLst>
+                <a:tab pos="241935" algn="l"/>
+              </a:tabLst>
+            </a:pPr>
+            <a:r>
+              <a:rPr sz="2800" dirty="0">
+                <a:latin typeface="Microsoft Sans Serif"/>
+                <a:cs typeface="Microsoft Sans Serif"/>
+              </a:rPr>
+              <a:t>Обычно</a:t>
+            </a:r>
+            <a:r>
+              <a:rPr sz="2800" spc="-114" dirty="0">
+                <a:latin typeface="Microsoft Sans Serif"/>
+                <a:cs typeface="Microsoft Sans Serif"/>
+              </a:rPr>
+              <a:t> </a:t>
+            </a:r>
+            <a:r>
+              <a:rPr sz="2800" spc="-10" dirty="0">
+                <a:latin typeface="Microsoft Sans Serif"/>
+                <a:cs typeface="Microsoft Sans Serif"/>
+              </a:rPr>
+              <a:t>реализуют</a:t>
+            </a:r>
+            <a:r>
+              <a:rPr sz="2800" spc="-114" dirty="0">
+                <a:latin typeface="Microsoft Sans Serif"/>
+                <a:cs typeface="Microsoft Sans Serif"/>
+              </a:rPr>
+              <a:t> </a:t>
+            </a:r>
+            <a:r>
+              <a:rPr sz="2800" spc="-10" dirty="0">
+                <a:latin typeface="Microsoft Sans Serif"/>
+                <a:cs typeface="Microsoft Sans Serif"/>
+              </a:rPr>
+              <a:t>оператор</a:t>
+            </a:r>
+            <a:r>
+              <a:rPr sz="2800" spc="-114" dirty="0">
+                <a:latin typeface="Microsoft Sans Serif"/>
+                <a:cs typeface="Microsoft Sans Serif"/>
+              </a:rPr>
+              <a:t> </a:t>
+            </a:r>
+            <a:r>
+              <a:rPr sz="2800" spc="-50" dirty="0">
+                <a:latin typeface="Microsoft Sans Serif"/>
+                <a:cs typeface="Microsoft Sans Serif"/>
+              </a:rPr>
+              <a:t>&lt;</a:t>
+            </a:r>
+            <a:endParaRPr sz="2800">
+              <a:latin typeface="Microsoft Sans Serif"/>
+              <a:cs typeface="Microsoft Sans Serif"/>
+            </a:endParaRPr>
+          </a:p>
+          <a:p>
+            <a:pPr marL="241935" indent="-229235">
+              <a:lnSpc>
+                <a:spcPct val="100000"/>
+              </a:lnSpc>
+              <a:spcBef>
+                <a:spcPts val="525"/>
+              </a:spcBef>
+              <a:buChar char="•"/>
+              <a:tabLst>
+                <a:tab pos="241935" algn="l"/>
+              </a:tabLst>
+            </a:pPr>
+            <a:r>
+              <a:rPr sz="2800" dirty="0">
+                <a:latin typeface="Microsoft Sans Serif"/>
+                <a:cs typeface="Microsoft Sans Serif"/>
+              </a:rPr>
+              <a:t>Остальные</a:t>
+            </a:r>
+            <a:r>
+              <a:rPr sz="2800" spc="-135" dirty="0">
+                <a:latin typeface="Microsoft Sans Serif"/>
+                <a:cs typeface="Microsoft Sans Serif"/>
+              </a:rPr>
+              <a:t> </a:t>
+            </a:r>
+            <a:r>
+              <a:rPr sz="2800" spc="-10" dirty="0">
+                <a:latin typeface="Microsoft Sans Serif"/>
+                <a:cs typeface="Microsoft Sans Serif"/>
+              </a:rPr>
+              <a:t>выражаются</a:t>
+            </a:r>
+            <a:r>
+              <a:rPr sz="2800" spc="-135" dirty="0">
+                <a:latin typeface="Microsoft Sans Serif"/>
+                <a:cs typeface="Microsoft Sans Serif"/>
+              </a:rPr>
+              <a:t> </a:t>
+            </a:r>
+            <a:r>
+              <a:rPr sz="2800" spc="-20" dirty="0">
+                <a:latin typeface="Microsoft Sans Serif"/>
+                <a:cs typeface="Microsoft Sans Serif"/>
+              </a:rPr>
+              <a:t>через</a:t>
+            </a:r>
+            <a:r>
+              <a:rPr sz="2800" spc="-130" dirty="0">
+                <a:latin typeface="Microsoft Sans Serif"/>
+                <a:cs typeface="Microsoft Sans Serif"/>
+              </a:rPr>
+              <a:t> </a:t>
+            </a:r>
+            <a:r>
+              <a:rPr sz="2800" spc="-50" dirty="0">
+                <a:latin typeface="Microsoft Sans Serif"/>
+                <a:cs typeface="Microsoft Sans Serif"/>
+              </a:rPr>
+              <a:t>&lt;</a:t>
+            </a:r>
+            <a:endParaRPr sz="2800">
+              <a:latin typeface="Microsoft Sans Serif"/>
+              <a:cs typeface="Microsoft Sans Serif"/>
+            </a:endParaRPr>
+          </a:p>
+          <a:p>
+            <a:pPr marL="241935" indent="-229235">
+              <a:lnSpc>
+                <a:spcPct val="100000"/>
+              </a:lnSpc>
+              <a:spcBef>
+                <a:spcPts val="530"/>
+              </a:spcBef>
+              <a:buChar char="•"/>
+              <a:tabLst>
+                <a:tab pos="241935" algn="l"/>
+              </a:tabLst>
+            </a:pPr>
+            <a:r>
+              <a:rPr sz="2800" dirty="0">
+                <a:latin typeface="Microsoft Sans Serif"/>
+                <a:cs typeface="Microsoft Sans Serif"/>
+              </a:rPr>
+              <a:t>Не</a:t>
+            </a:r>
+            <a:r>
+              <a:rPr sz="2800" spc="-15" dirty="0">
+                <a:latin typeface="Microsoft Sans Serif"/>
+                <a:cs typeface="Microsoft Sans Serif"/>
+              </a:rPr>
+              <a:t> </a:t>
+            </a:r>
+            <a:r>
+              <a:rPr sz="2800" dirty="0">
+                <a:latin typeface="Microsoft Sans Serif"/>
+                <a:cs typeface="Microsoft Sans Serif"/>
+              </a:rPr>
+              <a:t>пишите</a:t>
+            </a:r>
+            <a:r>
+              <a:rPr sz="2800" spc="-10" dirty="0">
+                <a:latin typeface="Microsoft Sans Serif"/>
+                <a:cs typeface="Microsoft Sans Serif"/>
+              </a:rPr>
+              <a:t> </a:t>
+            </a:r>
+            <a:r>
+              <a:rPr sz="2800" dirty="0">
+                <a:latin typeface="Microsoft Sans Serif"/>
+                <a:cs typeface="Microsoft Sans Serif"/>
+              </a:rPr>
+              <a:t>a</a:t>
+            </a:r>
+            <a:r>
+              <a:rPr sz="2800" spc="-10" dirty="0">
+                <a:latin typeface="Microsoft Sans Serif"/>
+                <a:cs typeface="Microsoft Sans Serif"/>
+              </a:rPr>
+              <a:t> </a:t>
+            </a:r>
+            <a:r>
+              <a:rPr sz="2800" dirty="0">
+                <a:latin typeface="Microsoft Sans Serif"/>
+                <a:cs typeface="Microsoft Sans Serif"/>
+              </a:rPr>
+              <a:t>&gt;</a:t>
+            </a:r>
+            <a:r>
+              <a:rPr sz="2800" spc="-10" dirty="0">
+                <a:latin typeface="Microsoft Sans Serif"/>
+                <a:cs typeface="Microsoft Sans Serif"/>
+              </a:rPr>
+              <a:t> </a:t>
+            </a:r>
+            <a:r>
+              <a:rPr sz="2800" dirty="0">
+                <a:latin typeface="Microsoft Sans Serif"/>
+                <a:cs typeface="Microsoft Sans Serif"/>
+              </a:rPr>
+              <a:t>b</a:t>
+            </a:r>
+            <a:r>
+              <a:rPr sz="2800" spc="-10" dirty="0">
+                <a:latin typeface="Microsoft Sans Serif"/>
+                <a:cs typeface="Microsoft Sans Serif"/>
+              </a:rPr>
+              <a:t> </a:t>
+            </a:r>
+            <a:r>
+              <a:rPr sz="2800" spc="-60" dirty="0">
+                <a:latin typeface="Microsoft Sans Serif"/>
+                <a:cs typeface="Microsoft Sans Serif"/>
+              </a:rPr>
+              <a:t>как</a:t>
+            </a:r>
+            <a:r>
+              <a:rPr sz="2800" spc="-10" dirty="0">
+                <a:latin typeface="Microsoft Sans Serif"/>
+                <a:cs typeface="Microsoft Sans Serif"/>
+              </a:rPr>
+              <a:t> </a:t>
+            </a:r>
+            <a:r>
+              <a:rPr sz="2800" dirty="0">
+                <a:latin typeface="Microsoft Sans Serif"/>
+                <a:cs typeface="Microsoft Sans Serif"/>
+              </a:rPr>
+              <a:t>(a</a:t>
+            </a:r>
+            <a:r>
+              <a:rPr sz="2800" spc="-15" dirty="0">
+                <a:latin typeface="Microsoft Sans Serif"/>
+                <a:cs typeface="Microsoft Sans Serif"/>
+              </a:rPr>
+              <a:t> </a:t>
+            </a:r>
+            <a:r>
+              <a:rPr sz="2800" dirty="0">
+                <a:latin typeface="Microsoft Sans Serif"/>
+                <a:cs typeface="Microsoft Sans Serif"/>
+              </a:rPr>
+              <a:t>!=</a:t>
+            </a:r>
+            <a:r>
+              <a:rPr sz="2800" spc="-10" dirty="0">
+                <a:latin typeface="Microsoft Sans Serif"/>
+                <a:cs typeface="Microsoft Sans Serif"/>
+              </a:rPr>
+              <a:t> </a:t>
+            </a:r>
+            <a:r>
+              <a:rPr sz="2800" dirty="0">
+                <a:latin typeface="Microsoft Sans Serif"/>
+                <a:cs typeface="Microsoft Sans Serif"/>
+              </a:rPr>
+              <a:t>b)</a:t>
+            </a:r>
+            <a:r>
+              <a:rPr sz="2800" spc="-10" dirty="0">
+                <a:latin typeface="Microsoft Sans Serif"/>
+                <a:cs typeface="Microsoft Sans Serif"/>
+              </a:rPr>
+              <a:t> </a:t>
+            </a:r>
+            <a:r>
+              <a:rPr sz="2800" dirty="0">
+                <a:latin typeface="Microsoft Sans Serif"/>
+                <a:cs typeface="Microsoft Sans Serif"/>
+              </a:rPr>
+              <a:t>&amp;&amp;</a:t>
+            </a:r>
+            <a:r>
+              <a:rPr sz="2800" spc="-10" dirty="0">
+                <a:latin typeface="Microsoft Sans Serif"/>
+                <a:cs typeface="Microsoft Sans Serif"/>
+              </a:rPr>
+              <a:t> </a:t>
+            </a:r>
+            <a:r>
+              <a:rPr sz="2800" dirty="0">
+                <a:latin typeface="Microsoft Sans Serif"/>
+                <a:cs typeface="Microsoft Sans Serif"/>
+              </a:rPr>
+              <a:t>!(a</a:t>
+            </a:r>
+            <a:r>
+              <a:rPr sz="2800" spc="-10" dirty="0">
+                <a:latin typeface="Microsoft Sans Serif"/>
+                <a:cs typeface="Microsoft Sans Serif"/>
+              </a:rPr>
+              <a:t> </a:t>
+            </a:r>
+            <a:r>
+              <a:rPr sz="2800" dirty="0">
+                <a:latin typeface="Microsoft Sans Serif"/>
+                <a:cs typeface="Microsoft Sans Serif"/>
+              </a:rPr>
+              <a:t>&lt;</a:t>
+            </a:r>
+            <a:r>
+              <a:rPr sz="2800" spc="-10" dirty="0">
+                <a:latin typeface="Microsoft Sans Serif"/>
+                <a:cs typeface="Microsoft Sans Serif"/>
+              </a:rPr>
+              <a:t> </a:t>
+            </a:r>
+            <a:r>
+              <a:rPr sz="2800" spc="-25" dirty="0">
+                <a:latin typeface="Microsoft Sans Serif"/>
+                <a:cs typeface="Microsoft Sans Serif"/>
+              </a:rPr>
+              <a:t>b)</a:t>
+            </a:r>
+            <a:endParaRPr sz="2800">
+              <a:latin typeface="Microsoft Sans Serif"/>
+              <a:cs typeface="Microsoft Sans Serif"/>
+            </a:endParaRPr>
+          </a:p>
+          <a:p>
+            <a:pPr marL="241935" indent="-229235">
+              <a:lnSpc>
+                <a:spcPct val="100000"/>
+              </a:lnSpc>
+              <a:spcBef>
+                <a:spcPts val="530"/>
+              </a:spcBef>
+              <a:buChar char="•"/>
+              <a:tabLst>
+                <a:tab pos="241935" algn="l"/>
+              </a:tabLst>
+            </a:pPr>
+            <a:r>
+              <a:rPr sz="2800" dirty="0">
+                <a:latin typeface="Microsoft Sans Serif"/>
+                <a:cs typeface="Microsoft Sans Serif"/>
+              </a:rPr>
+              <a:t>Лучше</a:t>
+            </a:r>
+            <a:r>
+              <a:rPr sz="2800" spc="-60" dirty="0">
+                <a:latin typeface="Microsoft Sans Serif"/>
+                <a:cs typeface="Microsoft Sans Serif"/>
+              </a:rPr>
+              <a:t> </a:t>
+            </a:r>
+            <a:r>
+              <a:rPr sz="2800" dirty="0">
+                <a:latin typeface="Microsoft Sans Serif"/>
+                <a:cs typeface="Microsoft Sans Serif"/>
+              </a:rPr>
+              <a:t>пишите</a:t>
+            </a:r>
+            <a:r>
+              <a:rPr sz="2800" spc="-65" dirty="0">
+                <a:latin typeface="Microsoft Sans Serif"/>
+                <a:cs typeface="Microsoft Sans Serif"/>
+              </a:rPr>
+              <a:t> </a:t>
+            </a:r>
+            <a:r>
+              <a:rPr sz="2800" dirty="0">
+                <a:latin typeface="Microsoft Sans Serif"/>
+                <a:cs typeface="Microsoft Sans Serif"/>
+              </a:rPr>
+              <a:t>b</a:t>
+            </a:r>
+            <a:r>
+              <a:rPr sz="2800" spc="-60" dirty="0">
+                <a:latin typeface="Microsoft Sans Serif"/>
+                <a:cs typeface="Microsoft Sans Serif"/>
+              </a:rPr>
+              <a:t> </a:t>
+            </a:r>
+            <a:r>
+              <a:rPr sz="2800" dirty="0">
+                <a:latin typeface="Microsoft Sans Serif"/>
+                <a:cs typeface="Microsoft Sans Serif"/>
+              </a:rPr>
+              <a:t>&lt;</a:t>
+            </a:r>
+            <a:r>
+              <a:rPr sz="2800" spc="-60" dirty="0">
+                <a:latin typeface="Microsoft Sans Serif"/>
+                <a:cs typeface="Microsoft Sans Serif"/>
+              </a:rPr>
+              <a:t> a</a:t>
+            </a:r>
+            <a:endParaRPr sz="2800">
+              <a:latin typeface="Microsoft Sans Serif"/>
+              <a:cs typeface="Microsoft Sans Serif"/>
+            </a:endParaRPr>
+          </a:p>
+          <a:p>
+            <a:pPr marL="241935" indent="-229235">
+              <a:lnSpc>
+                <a:spcPct val="100000"/>
+              </a:lnSpc>
+              <a:spcBef>
+                <a:spcPts val="530"/>
+              </a:spcBef>
+              <a:buChar char="•"/>
+              <a:tabLst>
+                <a:tab pos="241935" algn="l"/>
+              </a:tabLst>
+            </a:pPr>
+            <a:r>
+              <a:rPr sz="2800" dirty="0">
+                <a:latin typeface="Microsoft Sans Serif"/>
+                <a:cs typeface="Microsoft Sans Serif"/>
+              </a:rPr>
+              <a:t>Старайтесь</a:t>
+            </a:r>
+            <a:r>
+              <a:rPr sz="2800" spc="-170" dirty="0">
+                <a:latin typeface="Microsoft Sans Serif"/>
+                <a:cs typeface="Microsoft Sans Serif"/>
+              </a:rPr>
+              <a:t> </a:t>
+            </a:r>
+            <a:r>
+              <a:rPr sz="2800" spc="-35" dirty="0">
+                <a:latin typeface="Microsoft Sans Serif"/>
+                <a:cs typeface="Microsoft Sans Serif"/>
+              </a:rPr>
+              <a:t>избегать</a:t>
+            </a:r>
+            <a:r>
+              <a:rPr sz="2800" spc="-150" dirty="0">
+                <a:latin typeface="Microsoft Sans Serif"/>
+                <a:cs typeface="Microsoft Sans Serif"/>
+              </a:rPr>
+              <a:t> </a:t>
+            </a:r>
+            <a:r>
+              <a:rPr sz="2800" spc="-10" dirty="0">
+                <a:latin typeface="Microsoft Sans Serif"/>
+                <a:cs typeface="Microsoft Sans Serif"/>
+              </a:rPr>
+              <a:t>друзей</a:t>
+            </a:r>
+            <a:r>
+              <a:rPr sz="2800" spc="-160" dirty="0">
+                <a:latin typeface="Microsoft Sans Serif"/>
+                <a:cs typeface="Microsoft Sans Serif"/>
+              </a:rPr>
+              <a:t> </a:t>
+            </a:r>
+            <a:r>
+              <a:rPr sz="2800" spc="-10" dirty="0">
+                <a:latin typeface="Microsoft Sans Serif"/>
+                <a:cs typeface="Microsoft Sans Serif"/>
+              </a:rPr>
+              <a:t>(friend)</a:t>
+            </a:r>
+            <a:endParaRPr sz="2800">
+              <a:latin typeface="Microsoft Sans Serif"/>
+              <a:cs typeface="Microsoft Sans Serif"/>
+            </a:endParaRPr>
+          </a:p>
+        </p:txBody>
+      </p:sp>
+    </p:spTree>
+  </p:cSld>
+  <p:clrMapOvr>
+    <a:masterClrMapping/>
+  </p:clrMapOvr>
+</p:sld>
+</file>
+
+<file path=ppt/slides/slide6.xml><?xml version="1.0" encoding="utf-8"?>
+<p:sld xmlns:a="http://schemas.openxmlformats.org/drawingml/2006/main" xmlns:r="http://schemas.openxmlformats.org/officeDocument/2006/relationships" xmlns:p="http://schemas.openxmlformats.org/presentationml/2006/main">
+  <p:cSld>
+    <p:spTree>
+      <p:nvGrpSpPr>
+        <p:cNvPr id="1" name=""/>
+        <p:cNvGrpSpPr/>
+        <p:nvPr/>
+      </p:nvGrpSpPr>
+      <p:grpSpPr>
+        <a:xfrm>
+          <a:off x="0" y="0"/>
+          <a:ext cx="0" cy="0"/>
+          <a:chOff x="0" y="0"/>
+          <a:chExt cx="0" cy="0"/>
+        </a:xfrm>
+      </p:grpSpPr>
+      <p:sp>
+        <p:nvSpPr>
+          <p:cNvPr id="2" name="Title 1">
+            <a:extLst>
+              <a:ext uri="{FF2B5EF4-FFF2-40B4-BE49-F238E27FC236}">
+                <a16:creationId xmlns:a16="http://schemas.microsoft.com/office/drawing/2014/main" id="{DBEC7596-4879-4B45-A82A-AF3E889B689A}"/>
+              </a:ext>
+            </a:extLst>
+          </p:cNvPr>
+          <p:cNvSpPr>
+            <a:spLocks noGrp="1"/>
+          </p:cNvSpPr>
+          <p:nvPr>
+            <p:ph type="title"/>
+          </p:nvPr>
+        </p:nvSpPr>
+        <p:spPr>
+          <a:xfrm>
+            <a:off x="871218" y="642446"/>
+            <a:ext cx="7815582" cy="677108"/>
+          </a:xfrm>
+        </p:spPr>
+        <p:txBody>
+          <a:bodyPr/>
+          <a:lstStyle/>
+          <a:p>
+            <a:r>
+              <a:rPr lang="en-US" dirty="0"/>
+              <a:t>Spaceship operator (</a:t>
+            </a:r>
+            <a:r>
+              <a:rPr lang="en-US" dirty="0">
+                <a:sym typeface="Wingdings" panose="05000000000000000000" pitchFamily="2" charset="2"/>
+              </a:rPr>
+              <a:t>&lt;=&gt;)</a:t>
+            </a:r>
+            <a:endParaRPr lang="ru-RU" dirty="0"/>
+          </a:p>
+        </p:txBody>
+      </p:sp>
+      <p:sp>
+        <p:nvSpPr>
+          <p:cNvPr id="3" name="Text Placeholder 2">
+            <a:extLst>
+              <a:ext uri="{FF2B5EF4-FFF2-40B4-BE49-F238E27FC236}">
+                <a16:creationId xmlns:a16="http://schemas.microsoft.com/office/drawing/2014/main" id="{660E3F46-0617-4E52-B3C6-44FBB76CE016}"/>
+              </a:ext>
+            </a:extLst>
+          </p:cNvPr>
+          <p:cNvSpPr>
+            <a:spLocks noGrp="1"/>
+          </p:cNvSpPr>
+          <p:nvPr>
+            <p:ph type="body" idx="1"/>
+          </p:nvPr>
+        </p:nvSpPr>
+        <p:spPr>
+          <a:xfrm>
+            <a:off x="871219" y="1822455"/>
+            <a:ext cx="10259060" cy="2585323"/>
+          </a:xfrm>
+        </p:spPr>
+        <p:txBody>
+          <a:bodyPr/>
+          <a:lstStyle/>
+          <a:p>
+            <a:endParaRPr lang="ru-RU" dirty="0">
+              <a:hlinkClick r:id="rId2"/>
+            </a:endParaRPr>
+          </a:p>
+          <a:p>
+            <a:pPr marL="457200" indent="-457200">
+              <a:buFont typeface="Arial" panose="020B0604020202020204" pitchFamily="34" charset="0"/>
+              <a:buChar char="•"/>
+            </a:pPr>
+            <a:r>
+              <a:rPr lang="ru-RU" dirty="0">
+                <a:hlinkClick r:id="rId3"/>
+              </a:rPr>
+              <a:t>Беглый взгляд</a:t>
+            </a:r>
+            <a:endParaRPr lang="ru-RU" dirty="0">
+              <a:hlinkClick r:id="rId2"/>
+            </a:endParaRPr>
+          </a:p>
+          <a:p>
+            <a:pPr marL="457200" indent="-457200">
+              <a:buFont typeface="Arial" panose="020B0604020202020204" pitchFamily="34" charset="0"/>
+              <a:buChar char="•"/>
+            </a:pPr>
+            <a:r>
+              <a:rPr lang="ru-RU" dirty="0">
+                <a:hlinkClick r:id="rId2"/>
+              </a:rPr>
+              <a:t>Подробная статья</a:t>
+            </a:r>
+            <a:endParaRPr lang="ru-RU" dirty="0">
+              <a:hlinkClick r:id="rId4"/>
+            </a:endParaRPr>
+          </a:p>
+          <a:p>
+            <a:pPr marL="457200" indent="-457200">
+              <a:buFont typeface="Arial" panose="020B0604020202020204" pitchFamily="34" charset="0"/>
+              <a:buChar char="•"/>
+            </a:pPr>
+            <a:r>
+              <a:rPr lang="en-US" dirty="0">
+                <a:hlinkClick r:id="rId4"/>
+              </a:rPr>
+              <a:t>std::</a:t>
+            </a:r>
+            <a:r>
+              <a:rPr lang="en-US" dirty="0" err="1">
+                <a:hlinkClick r:id="rId4"/>
+              </a:rPr>
+              <a:t>strong_ordering</a:t>
+            </a:r>
+            <a:r>
+              <a:rPr lang="en-US" dirty="0">
+                <a:hlinkClick r:id="rId4"/>
+              </a:rPr>
+              <a:t>, std::</a:t>
+            </a:r>
+            <a:r>
+              <a:rPr lang="en-US" dirty="0" err="1">
+                <a:hlinkClick r:id="rId4"/>
+              </a:rPr>
+              <a:t>weak_ordering</a:t>
+            </a:r>
+            <a:r>
+              <a:rPr lang="en-US" dirty="0">
+                <a:hlinkClick r:id="rId4"/>
+              </a:rPr>
+              <a:t> </a:t>
+            </a:r>
+            <a:r>
+              <a:rPr lang="ru-RU" dirty="0">
+                <a:hlinkClick r:id="rId4"/>
+              </a:rPr>
+              <a:t>или </a:t>
+            </a:r>
+            <a:r>
+              <a:rPr lang="en-US" dirty="0">
+                <a:hlinkClick r:id="rId4"/>
+              </a:rPr>
+              <a:t>std::</a:t>
+            </a:r>
+            <a:r>
+              <a:rPr lang="en-US" dirty="0" err="1">
+                <a:hlinkClick r:id="rId4"/>
+              </a:rPr>
+              <a:t>partial_ordering</a:t>
+            </a:r>
+            <a:r>
+              <a:rPr lang="en-US" dirty="0">
+                <a:hlinkClick r:id="rId4"/>
+              </a:rPr>
+              <a:t>?</a:t>
+            </a:r>
+            <a:endParaRPr lang="en-US" dirty="0"/>
+          </a:p>
+          <a:p>
+            <a:pPr marL="457200" indent="-457200">
+              <a:buFont typeface="Arial" panose="020B0604020202020204" pitchFamily="34" charset="0"/>
+              <a:buChar char="•"/>
+            </a:pPr>
+            <a:r>
+              <a:rPr lang="ru-RU" dirty="0">
+                <a:hlinkClick r:id="rId5"/>
+              </a:rPr>
+              <a:t>Насколько полезно?</a:t>
+            </a:r>
+            <a:endParaRPr lang="ru-RU" dirty="0"/>
+          </a:p>
+        </p:txBody>
+      </p:sp>
+    </p:spTree>
+    <p:extLst>
+      <p:ext uri="{BB962C8B-B14F-4D97-AF65-F5344CB8AC3E}">
+        <p14:creationId xmlns:p14="http://schemas.microsoft.com/office/powerpoint/2010/main" val="403485468"/>
+      </p:ext>
+    </p:extLst>
+  </p:cSld>
+  <p:clrMapOvr>
+    <a:masterClrMapping/>
+  </p:clrMapOvr>
+</p:sld>
+</file>
+
+<file path=ppt/slides/slide7.xml><?xml version="1.0" encoding="utf-8"?>
+<p:sld xmlns:a="http://schemas.openxmlformats.org/drawingml/2006/main" xmlns:r="http://schemas.openxmlformats.org/officeDocument/2006/relationships" xmlns:p="http://schemas.openxmlformats.org/presentationml/2006/main">
+  <p:cSld>
+    <p:spTree>
+      <p:nvGrpSpPr>
+        <p:cNvPr id="1" name=""/>
+        <p:cNvGrpSpPr/>
+        <p:nvPr/>
+      </p:nvGrpSpPr>
+      <p:grpSpPr>
+        <a:xfrm>
+          <a:off x="0" y="0"/>
+          <a:ext cx="0" cy="0"/>
+          <a:chOff x="0" y="0"/>
+          <a:chExt cx="0" cy="0"/>
+        </a:xfrm>
+      </p:grpSpPr>
+      <p:sp>
+        <p:nvSpPr>
+          <p:cNvPr id="2" name="Title 1">
+            <a:extLst>
+              <a:ext uri="{FF2B5EF4-FFF2-40B4-BE49-F238E27FC236}">
+                <a16:creationId xmlns:a16="http://schemas.microsoft.com/office/drawing/2014/main" id="{5057426E-3484-4C80-B5E7-BC694116FD0D}"/>
+              </a:ext>
+            </a:extLst>
+          </p:cNvPr>
+          <p:cNvSpPr>
+            <a:spLocks noGrp="1"/>
+          </p:cNvSpPr>
+          <p:nvPr>
+            <p:ph type="title"/>
+          </p:nvPr>
+        </p:nvSpPr>
+        <p:spPr>
+          <a:xfrm>
+            <a:off x="871218" y="642446"/>
+            <a:ext cx="7815581" cy="695960"/>
+          </a:xfrm>
+        </p:spPr>
+        <p:txBody>
+          <a:bodyPr/>
+          <a:lstStyle/>
+          <a:p>
+            <a:r>
+              <a:rPr lang="en-US" dirty="0"/>
+              <a:t>&lt;=&gt;: </a:t>
+            </a:r>
+            <a:r>
+              <a:rPr lang="ru-RU" dirty="0"/>
+              <a:t>идея</a:t>
+            </a:r>
+          </a:p>
+        </p:txBody>
+      </p:sp>
+      <p:pic>
+        <p:nvPicPr>
+          <p:cNvPr id="7" name="Picture 6">
+            <a:extLst>
+              <a:ext uri="{FF2B5EF4-FFF2-40B4-BE49-F238E27FC236}">
+                <a16:creationId xmlns:a16="http://schemas.microsoft.com/office/drawing/2014/main" id="{747789CB-4FD4-4C36-A5E0-C495E9D1B3AC}"/>
+              </a:ext>
+            </a:extLst>
+          </p:cNvPr>
+          <p:cNvPicPr>
+            <a:picLocks noChangeAspect="1"/>
+          </p:cNvPicPr>
+          <p:nvPr/>
+        </p:nvPicPr>
+        <p:blipFill>
+          <a:blip r:embed="rId2"/>
+          <a:stretch>
+            <a:fillRect/>
+          </a:stretch>
+        </p:blipFill>
+        <p:spPr>
+          <a:xfrm>
+            <a:off x="5486400" y="146948"/>
+            <a:ext cx="5924281" cy="6564104"/>
+          </a:xfrm>
+          <a:prstGeom prst="rect">
+            <a:avLst/>
+          </a:prstGeom>
+        </p:spPr>
+      </p:pic>
+      <p:sp>
+        <p:nvSpPr>
+          <p:cNvPr id="8" name="TextBox 7">
+            <a:extLst>
+              <a:ext uri="{FF2B5EF4-FFF2-40B4-BE49-F238E27FC236}">
+                <a16:creationId xmlns:a16="http://schemas.microsoft.com/office/drawing/2014/main" id="{0695E273-4C80-463B-87DF-8351E31A312D}"/>
+              </a:ext>
+            </a:extLst>
+          </p:cNvPr>
+          <p:cNvSpPr txBox="1"/>
+          <p:nvPr/>
+        </p:nvSpPr>
+        <p:spPr>
+          <a:xfrm flipH="1">
+            <a:off x="871218" y="2438400"/>
+            <a:ext cx="3121663" cy="1384995"/>
+          </a:xfrm>
+          <a:prstGeom prst="rect">
+            <a:avLst/>
+          </a:prstGeom>
+          <a:noFill/>
+        </p:spPr>
+        <p:txBody>
+          <a:bodyPr wrap="square" rtlCol="0">
+            <a:spAutoFit/>
+          </a:bodyPr>
+          <a:lstStyle/>
+          <a:p>
+            <a:r>
+              <a:rPr lang="ru-RU" sz="2800" dirty="0"/>
+              <a:t>Хотим упростить перегрузку операторов</a:t>
+            </a:r>
+          </a:p>
+        </p:txBody>
+      </p:sp>
+    </p:spTree>
+    <p:extLst>
+      <p:ext uri="{BB962C8B-B14F-4D97-AF65-F5344CB8AC3E}">
+        <p14:creationId xmlns:p14="http://schemas.microsoft.com/office/powerpoint/2010/main" val="658826052"/>
+      </p:ext>
+    </p:extLst>
+  </p:cSld>
+  <p:clrMapOvr>
+    <a:masterClrMapping/>
+  </p:clrMapOvr>
+</p:sld>
+</file>
+
+<file path=ppt/slides/slide8.xml><?xml version="1.0" encoding="utf-8"?>
+<p:sld xmlns:a="http://schemas.openxmlformats.org/drawingml/2006/main" xmlns:r="http://schemas.openxmlformats.org/officeDocument/2006/relationships" xmlns:p="http://schemas.openxmlformats.org/presentationml/2006/main">
+  <p:cSld>
+    <p:spTree>
+      <p:nvGrpSpPr>
+        <p:cNvPr id="1" name=""/>
+        <p:cNvGrpSpPr/>
+        <p:nvPr/>
+      </p:nvGrpSpPr>
+      <p:grpSpPr>
+        <a:xfrm>
+          <a:off x="0" y="0"/>
+          <a:ext cx="0" cy="0"/>
+          <a:chOff x="0" y="0"/>
+          <a:chExt cx="0" cy="0"/>
+        </a:xfrm>
+      </p:grpSpPr>
+      <p:sp>
+        <p:nvSpPr>
+          <p:cNvPr id="2" name="Title 1">
+            <a:extLst>
+              <a:ext uri="{FF2B5EF4-FFF2-40B4-BE49-F238E27FC236}">
+                <a16:creationId xmlns:a16="http://schemas.microsoft.com/office/drawing/2014/main" id="{BD852F46-E1A7-4F92-A04D-99E87AAF9369}"/>
+              </a:ext>
+            </a:extLst>
+          </p:cNvPr>
+          <p:cNvSpPr>
+            <a:spLocks noGrp="1"/>
+          </p:cNvSpPr>
+          <p:nvPr>
+            <p:ph type="title"/>
+          </p:nvPr>
+        </p:nvSpPr>
+        <p:spPr/>
+        <p:txBody>
+          <a:bodyPr/>
+          <a:lstStyle/>
+          <a:p>
+            <a:r>
+              <a:rPr lang="en-US" dirty="0"/>
+              <a:t>&lt;=&gt;: orderings</a:t>
+            </a:r>
+            <a:endParaRPr lang="ru-RU" dirty="0"/>
+          </a:p>
+        </p:txBody>
+      </p:sp>
+      <p:sp>
+        <p:nvSpPr>
+          <p:cNvPr id="3" name="Text Placeholder 2">
+            <a:extLst>
+              <a:ext uri="{FF2B5EF4-FFF2-40B4-BE49-F238E27FC236}">
+                <a16:creationId xmlns:a16="http://schemas.microsoft.com/office/drawing/2014/main" id="{6E57DDB4-C413-4040-8E05-1DB23FA97E88}"/>
+              </a:ext>
+            </a:extLst>
+          </p:cNvPr>
+          <p:cNvSpPr>
+            <a:spLocks noGrp="1"/>
+          </p:cNvSpPr>
+          <p:nvPr>
+            <p:ph type="body" idx="1"/>
+          </p:nvPr>
+        </p:nvSpPr>
+        <p:spPr>
+          <a:xfrm>
+            <a:off x="871219" y="1822455"/>
+            <a:ext cx="10259060" cy="3447098"/>
+          </a:xfrm>
+        </p:spPr>
+        <p:txBody>
+          <a:bodyPr/>
+          <a:lstStyle/>
+          <a:p>
+            <a:r>
+              <a:rPr lang="ru-RU" dirty="0"/>
+              <a:t>Правда ли, что</a:t>
+            </a:r>
+            <a:r>
+              <a:rPr lang="en-US" dirty="0"/>
+              <a:t>:</a:t>
+            </a:r>
+          </a:p>
+          <a:p>
+            <a:endParaRPr lang="en-US" dirty="0"/>
+          </a:p>
+          <a:p>
+            <a:pPr marL="514350" indent="-514350">
+              <a:buAutoNum type="alphaLcParenR"/>
+            </a:pPr>
+            <a:r>
+              <a:rPr lang="en-US" dirty="0"/>
+              <a:t>x == y </a:t>
+            </a:r>
+            <a:r>
+              <a:rPr lang="en-US" dirty="0">
+                <a:sym typeface="Wingdings" panose="05000000000000000000" pitchFamily="2" charset="2"/>
+              </a:rPr>
+              <a:t> !(x &lt; y) &amp;&amp; !(y &lt; x)</a:t>
+            </a:r>
+          </a:p>
+          <a:p>
+            <a:pPr marL="514350" indent="-514350">
+              <a:buAutoNum type="alphaLcParenR"/>
+            </a:pPr>
+            <a:r>
+              <a:rPr lang="en-US" dirty="0">
+                <a:sym typeface="Wingdings" panose="05000000000000000000" pitchFamily="2" charset="2"/>
+              </a:rPr>
+              <a:t>x == y  x </a:t>
+            </a:r>
+            <a:r>
+              <a:rPr lang="ru-RU" dirty="0">
+                <a:sym typeface="Wingdings" panose="05000000000000000000" pitchFamily="2" charset="2"/>
+              </a:rPr>
+              <a:t>неотличимо от </a:t>
+            </a:r>
+            <a:r>
+              <a:rPr lang="en-US" dirty="0">
+                <a:sym typeface="Wingdings" panose="05000000000000000000" pitchFamily="2" charset="2"/>
+              </a:rPr>
+              <a:t>y</a:t>
+            </a:r>
+            <a:endParaRPr lang="ru-RU" dirty="0">
+              <a:sym typeface="Wingdings" panose="05000000000000000000" pitchFamily="2" charset="2"/>
+            </a:endParaRPr>
+          </a:p>
+          <a:p>
+            <a:pPr marL="514350" indent="-514350">
+              <a:buAutoNum type="alphaLcParenR"/>
+            </a:pPr>
+            <a:endParaRPr lang="ru-RU" dirty="0">
+              <a:sym typeface="Wingdings" panose="05000000000000000000" pitchFamily="2" charset="2"/>
+            </a:endParaRPr>
+          </a:p>
+          <a:p>
+            <a:pPr marL="514350" indent="-514350">
+              <a:buAutoNum type="alphaLcParenR"/>
+            </a:pPr>
+            <a:endParaRPr lang="ru-RU" dirty="0">
+              <a:sym typeface="Wingdings" panose="05000000000000000000" pitchFamily="2" charset="2"/>
+            </a:endParaRPr>
+          </a:p>
+          <a:p>
+            <a:r>
+              <a:rPr lang="en-US" dirty="0">
+                <a:sym typeface="Wingdings" panose="05000000000000000000" pitchFamily="2" charset="2"/>
+              </a:rPr>
+              <a:t>“</a:t>
+            </a:r>
+            <a:r>
+              <a:rPr lang="ru-RU" dirty="0">
+                <a:sym typeface="Wingdings" panose="05000000000000000000" pitchFamily="2" charset="2"/>
+              </a:rPr>
+              <a:t>Неотличимо</a:t>
+            </a:r>
+            <a:r>
+              <a:rPr lang="en-US" dirty="0">
+                <a:sym typeface="Wingdings" panose="05000000000000000000" pitchFamily="2" charset="2"/>
+              </a:rPr>
+              <a:t>”</a:t>
+            </a:r>
+            <a:r>
+              <a:rPr lang="ru-RU" dirty="0">
+                <a:sym typeface="Wingdings" panose="05000000000000000000" pitchFamily="2" charset="2"/>
+              </a:rPr>
+              <a:t> – с помощью </a:t>
+            </a:r>
+            <a:r>
+              <a:rPr lang="en-US" dirty="0">
+                <a:sym typeface="Wingdings" panose="05000000000000000000" pitchFamily="2" charset="2"/>
+              </a:rPr>
+              <a:t>const public </a:t>
+            </a:r>
+            <a:r>
+              <a:rPr lang="ru-RU" dirty="0">
+                <a:sym typeface="Wingdings" panose="05000000000000000000" pitchFamily="2" charset="2"/>
+              </a:rPr>
+              <a:t>полей и методов класса</a:t>
+            </a:r>
+          </a:p>
+        </p:txBody>
+      </p:sp>
+    </p:spTree>
+    <p:extLst>
+      <p:ext uri="{BB962C8B-B14F-4D97-AF65-F5344CB8AC3E}">
+        <p14:creationId xmlns:p14="http://schemas.microsoft.com/office/powerpoint/2010/main" val="749605299"/>
+      </p:ext>
+    </p:extLst>
+  </p:cSld>
+  <p:clrMapOvr>
+    <a:masterClrMapping/>
+  </p:clrMapOvr>
+</p:sld>
+</file>
+
+<file path=ppt/slides/slide9.xml><?xml version="1.0" encoding="utf-8"?>
+<p:sld xmlns:a="http://schemas.openxmlformats.org/drawingml/2006/main" xmlns:r="http://schemas.openxmlformats.org/officeDocument/2006/relationships" xmlns:p="http://schemas.openxmlformats.org/presentationml/2006/main">
+  <p:cSld>
+    <p:spTree>
+      <p:nvGrpSpPr>
+        <p:cNvPr id="1" name=""/>
+        <p:cNvGrpSpPr/>
+        <p:nvPr/>
+      </p:nvGrpSpPr>
+      <p:grpSpPr>
+        <a:xfrm>
+          <a:off x="0" y="0"/>
+          <a:ext cx="0" cy="0"/>
+          <a:chOff x="0" y="0"/>
+          <a:chExt cx="0" cy="0"/>
+        </a:xfrm>
+      </p:grpSpPr>
+      <p:sp>
+        <p:nvSpPr>
+          <p:cNvPr id="2" name="Title 1">
+            <a:extLst>
+              <a:ext uri="{FF2B5EF4-FFF2-40B4-BE49-F238E27FC236}">
+                <a16:creationId xmlns:a16="http://schemas.microsoft.com/office/drawing/2014/main" id="{BD852F46-E1A7-4F92-A04D-99E87AAF9369}"/>
+              </a:ext>
+            </a:extLst>
+          </p:cNvPr>
+          <p:cNvSpPr>
+            <a:spLocks noGrp="1"/>
+          </p:cNvSpPr>
+          <p:nvPr>
+            <p:ph type="title"/>
+          </p:nvPr>
+        </p:nvSpPr>
+        <p:spPr/>
+        <p:txBody>
+          <a:bodyPr/>
+          <a:lstStyle/>
+          <a:p>
+            <a:r>
+              <a:rPr lang="en-US" dirty="0"/>
+              <a:t>&lt;=&gt;: orderings</a:t>
+            </a:r>
+            <a:endParaRPr lang="ru-RU" dirty="0"/>
+          </a:p>
+        </p:txBody>
+      </p:sp>
+      <p:sp>
+        <p:nvSpPr>
+          <p:cNvPr id="3" name="Text Placeholder 2">
+            <a:extLst>
+              <a:ext uri="{FF2B5EF4-FFF2-40B4-BE49-F238E27FC236}">
+                <a16:creationId xmlns:a16="http://schemas.microsoft.com/office/drawing/2014/main" id="{6E57DDB4-C413-4040-8E05-1DB23FA97E88}"/>
+              </a:ext>
+            </a:extLst>
+          </p:cNvPr>
+          <p:cNvSpPr>
+            <a:spLocks noGrp="1"/>
+          </p:cNvSpPr>
+          <p:nvPr>
+            <p:ph type="body" idx="1"/>
+          </p:nvPr>
+        </p:nvSpPr>
+        <p:spPr>
+          <a:xfrm>
+            <a:off x="871219" y="1822455"/>
+            <a:ext cx="10259060" cy="4308872"/>
+          </a:xfrm>
+        </p:spPr>
+        <p:txBody>
+          <a:bodyPr/>
+          <a:lstStyle/>
+          <a:p>
+            <a:r>
+              <a:rPr lang="ru-RU" dirty="0"/>
+              <a:t>Правда ли, что</a:t>
+            </a:r>
+            <a:r>
+              <a:rPr lang="en-US" dirty="0"/>
+              <a:t>:</a:t>
+            </a:r>
+          </a:p>
+          <a:p>
+            <a:endParaRPr lang="en-US" dirty="0"/>
+          </a:p>
+          <a:p>
+            <a:pPr marL="514350" indent="-514350">
+              <a:buAutoNum type="alphaLcParenR"/>
+            </a:pPr>
+            <a:r>
+              <a:rPr lang="en-US" dirty="0"/>
+              <a:t>x == y </a:t>
+            </a:r>
+            <a:r>
+              <a:rPr lang="en-US" dirty="0">
+                <a:sym typeface="Wingdings" panose="05000000000000000000" pitchFamily="2" charset="2"/>
+              </a:rPr>
+              <a:t> !(x &lt; y) &amp;&amp; !(y &lt; x) – </a:t>
+            </a:r>
+            <a:r>
+              <a:rPr lang="ru-RU" dirty="0">
+                <a:sym typeface="Wingdings" panose="05000000000000000000" pitchFamily="2" charset="2"/>
+              </a:rPr>
+              <a:t>только в ЛУМ. </a:t>
+            </a:r>
+          </a:p>
+          <a:p>
+            <a:r>
+              <a:rPr lang="ru-RU" dirty="0">
+                <a:sym typeface="Wingdings" panose="05000000000000000000" pitchFamily="2" charset="2"/>
+              </a:rPr>
+              <a:t>	Пример</a:t>
+            </a:r>
+            <a:r>
+              <a:rPr lang="en-US" dirty="0">
+                <a:sym typeface="Wingdings" panose="05000000000000000000" pitchFamily="2" charset="2"/>
+              </a:rPr>
+              <a:t>: float</a:t>
+            </a:r>
+          </a:p>
+          <a:p>
+            <a:pPr marL="514350" indent="-514350">
+              <a:buAutoNum type="alphaLcParenR"/>
+            </a:pPr>
+            <a:r>
+              <a:rPr lang="en-US" dirty="0">
+                <a:sym typeface="Wingdings" panose="05000000000000000000" pitchFamily="2" charset="2"/>
+              </a:rPr>
+              <a:t>x == y  x </a:t>
+            </a:r>
+            <a:r>
+              <a:rPr lang="ru-RU" dirty="0">
+                <a:sym typeface="Wingdings" panose="05000000000000000000" pitchFamily="2" charset="2"/>
+              </a:rPr>
+              <a:t>неотличимо от </a:t>
+            </a:r>
+            <a:r>
+              <a:rPr lang="en-US" dirty="0">
+                <a:sym typeface="Wingdings" panose="05000000000000000000" pitchFamily="2" charset="2"/>
+              </a:rPr>
+              <a:t>y – </a:t>
+            </a:r>
+            <a:r>
+              <a:rPr lang="ru-RU" dirty="0">
+                <a:sym typeface="Wingdings" panose="05000000000000000000" pitchFamily="2" charset="2"/>
+              </a:rPr>
+              <a:t>не всегда. </a:t>
+            </a:r>
+          </a:p>
+          <a:p>
+            <a:r>
+              <a:rPr lang="ru-RU" dirty="0">
+                <a:sym typeface="Wingdings" panose="05000000000000000000" pitchFamily="2" charset="2"/>
+              </a:rPr>
+              <a:t>	Пример</a:t>
+            </a:r>
+            <a:r>
+              <a:rPr lang="en-US" dirty="0">
+                <a:sym typeface="Wingdings" panose="05000000000000000000" pitchFamily="2" charset="2"/>
+              </a:rPr>
+              <a:t>: </a:t>
+            </a:r>
+            <a:r>
+              <a:rPr lang="ru-RU" dirty="0">
+                <a:sym typeface="Wingdings" panose="05000000000000000000" pitchFamily="2" charset="2"/>
+              </a:rPr>
+              <a:t>точки на плоскости при сравнении только по одной координате</a:t>
+            </a:r>
+            <a:endParaRPr lang="en-US" dirty="0">
+              <a:sym typeface="Wingdings" panose="05000000000000000000" pitchFamily="2" charset="2"/>
+            </a:endParaRPr>
+          </a:p>
+          <a:p>
+            <a:endParaRPr lang="en-US" dirty="0">
+              <a:sym typeface="Wingdings" panose="05000000000000000000" pitchFamily="2" charset="2"/>
+            </a:endParaRPr>
+          </a:p>
+          <a:p>
+            <a:r>
+              <a:rPr lang="en-US" dirty="0">
+                <a:sym typeface="Wingdings" panose="05000000000000000000" pitchFamily="2" charset="2"/>
+              </a:rPr>
+              <a:t>“==” – </a:t>
+            </a:r>
+            <a:r>
+              <a:rPr lang="en-US" dirty="0">
+                <a:solidFill>
+                  <a:srgbClr val="00B050"/>
+                </a:solidFill>
+                <a:sym typeface="Wingdings" panose="05000000000000000000" pitchFamily="2" charset="2"/>
+              </a:rPr>
+              <a:t>equivalence</a:t>
+            </a:r>
+          </a:p>
+          <a:p>
+            <a:r>
+              <a:rPr lang="en-US" dirty="0">
+                <a:sym typeface="Wingdings" panose="05000000000000000000" pitchFamily="2" charset="2"/>
+              </a:rPr>
+              <a:t>“</a:t>
+            </a:r>
+            <a:r>
+              <a:rPr lang="ru-RU" dirty="0">
+                <a:sym typeface="Wingdings" panose="05000000000000000000" pitchFamily="2" charset="2"/>
+              </a:rPr>
+              <a:t>неотличимо</a:t>
+            </a:r>
+            <a:r>
+              <a:rPr lang="en-US" dirty="0">
+                <a:sym typeface="Wingdings" panose="05000000000000000000" pitchFamily="2" charset="2"/>
+              </a:rPr>
+              <a:t>”</a:t>
+            </a:r>
+            <a:r>
+              <a:rPr lang="ru-RU" dirty="0">
+                <a:sym typeface="Wingdings" panose="05000000000000000000" pitchFamily="2" charset="2"/>
+              </a:rPr>
+              <a:t> - </a:t>
+            </a:r>
+            <a:r>
+              <a:rPr lang="en-US" dirty="0">
+                <a:solidFill>
+                  <a:srgbClr val="00B050"/>
+                </a:solidFill>
+                <a:sym typeface="Wingdings" panose="05000000000000000000" pitchFamily="2" charset="2"/>
+              </a:rPr>
+              <a:t>equality</a:t>
+            </a:r>
+            <a:endParaRPr lang="ru-RU" dirty="0">
+              <a:solidFill>
+                <a:srgbClr val="00B050"/>
+              </a:solidFill>
+            </a:endParaRPr>
+          </a:p>
+        </p:txBody>
+      </p:sp>
+    </p:spTree>
+    <p:extLst>
+      <p:ext uri="{BB962C8B-B14F-4D97-AF65-F5344CB8AC3E}">
+        <p14:creationId xmlns:p14="http://schemas.microsoft.com/office/powerpoint/2010/main" val="1624388854"/>
+      </p:ext>
+    </p:extLst>
   </p:cSld>
   <p:clrMapOvr>
     <a:masterClrMapping/>
@@ -4986,4 +7571,299 @@
   <a:objectDefaults/>
   <a:extraClrSchemeLst/>
 </a:theme>
+</file>
+
+<file path=ppt/theme/theme2.xml><?xml version="1.0" encoding="utf-8"?>
+<a:theme xmlns:a="http://schemas.openxmlformats.org/drawingml/2006/main" name="Office Theme">
+  <a:themeElements>
+    <a:clrScheme name="Office">
+      <a:dk1>
+        <a:sysClr val="windowText" lastClr="000000"/>
+      </a:dk1>
+      <a:lt1>
+        <a:sysClr val="window" lastClr="FFFFFF"/>
+      </a:lt1>
+      <a:dk2>
+        <a:srgbClr val="44546A"/>
+      </a:dk2>
+      <a:lt2>
+        <a:srgbClr val="E7E6E6"/>
+      </a:lt2>
+      <a:accent1>
+        <a:srgbClr val="4472C4"/>
+      </a:accent1>
+      <a:accent2>
+        <a:srgbClr val="ED7D31"/>
+      </a:accent2>
+      <a:accent3>
+        <a:srgbClr val="A5A5A5"/>
+      </a:accent3>
+      <a:accent4>
+        <a:srgbClr val="FFC000"/>
+      </a:accent4>
+      <a:accent5>
+        <a:srgbClr val="5B9BD5"/>
+      </a:accent5>
+      <a:accent6>
+        <a:srgbClr val="70AD47"/>
+      </a:accent6>
+      <a:hlink>
+        <a:srgbClr val="0563C1"/>
+      </a:hlink>
+      <a:folHlink>
+        <a:srgbClr val="954F72"/>
+      </a:folHlink>
+    </a:clrScheme>
+    <a:fontScheme name="Office">
+      <a:majorFont>
+        <a:latin typeface="Calibri Light" panose="020F0302020204030204"/>
+        <a:ea typeface=""/>
+        <a:cs typeface=""/>
+        <a:font script="Jpan" typeface="游ゴシック Light"/>
+        <a:font script="Hang" typeface="맑은 고딕"/>
+        <a:font script="Hans" typeface="等线 Light"/>
+        <a:font script="Hant" typeface="新細明體"/>
+        <a:font script="Arab" typeface="Times New Roman"/>
+        <a:font script="Hebr" typeface="Times New Roman"/>
+        <a:font script="Thai" typeface="Angsana New"/>
+        <a:font script="Ethi" typeface="Nyala"/>
+        <a:font script="Beng" typeface="Vrinda"/>
+        <a:font script="Gujr" typeface="Shruti"/>
+        <a:font script="Khmr" typeface="MoolBoran"/>
+        <a:font script="Knda" typeface="Tunga"/>
+        <a:font script="Guru" typeface="Raavi"/>
+        <a:font script="Cans" typeface="Euphemia"/>
+        <a:font script="Cher" typeface="Plantagenet Cherokee"/>
+        <a:font script="Yiii" typeface="Microsoft Yi Baiti"/>
+        <a:font script="Tibt" typeface="Microsoft Himalaya"/>
+        <a:font script="Thaa" typeface="MV Boli"/>
+        <a:font script="Deva" typeface="Mangal"/>
+        <a:font script="Telu" typeface="Gautami"/>
+        <a:font script="Taml" typeface="Latha"/>
+        <a:font script="Syrc" typeface="Estrangelo Edessa"/>
+        <a:font script="Orya" typeface="Kalinga"/>
+        <a:font script="Mlym" typeface="Kartika"/>
+        <a:font script="Laoo" typeface="DokChampa"/>
+        <a:font script="Sinh" typeface="Iskoola Pota"/>
+        <a:font script="Mong" typeface="Mongolian Baiti"/>
+        <a:font script="Viet" typeface="Times New Roman"/>
+        <a:font script="Uigh" typeface="Microsoft Uighur"/>
+        <a:font script="Geor" typeface="Sylfaen"/>
+        <a:font script="Armn" typeface="Arial"/>
+        <a:font script="Bugi" typeface="Leelawadee UI"/>
+        <a:font script="Bopo" typeface="Microsoft JhengHei"/>
+        <a:font script="Java" typeface="Javanese Text"/>
+        <a:font script="Lisu" typeface="Segoe UI"/>
+        <a:font script="Mymr" typeface="Myanmar Text"/>
+        <a:font script="Nkoo" typeface="Ebrima"/>
+        <a:font script="Olck" typeface="Nirmala UI"/>
+        <a:font script="Osma" typeface="Ebrima"/>
+        <a:font script="Phag" typeface="Phagspa"/>
+        <a:font script="Syrn" typeface="Estrangelo Edessa"/>
+        <a:font script="Syrj" typeface="Estrangelo Edessa"/>
+        <a:font script="Syre" typeface="Estrangelo Edessa"/>
+        <a:font script="Sora" typeface="Nirmala UI"/>
+        <a:font script="Tale" typeface="Microsoft Tai Le"/>
+        <a:font script="Talu" typeface="Microsoft New Tai Lue"/>
+        <a:font script="Tfng" typeface="Ebrima"/>
+      </a:majorFont>
+      <a:minorFont>
+        <a:latin typeface="Calibri" panose="020F0502020204030204"/>
+        <a:ea typeface=""/>
+        <a:cs typeface=""/>
+        <a:font script="Jpan" typeface="游ゴシック"/>
+        <a:font script="Hang" typeface="맑은 고딕"/>
+        <a:font script="Hans" typeface="等线"/>
+        <a:font script="Hant" typeface="新細明體"/>
+        <a:font script="Arab" typeface="Arial"/>
+        <a:font script="Hebr" typeface="Arial"/>
+        <a:font script="Thai" typeface="Cordia New"/>
+        <a:font script="Ethi" typeface="Nyala"/>
+        <a:font script="Beng" typeface="Vrinda"/>
+        <a:font script="Gujr" typeface="Shruti"/>
+        <a:font script="Khmr" typeface="DaunPenh"/>
+        <a:font script="Knda" typeface="Tunga"/>
+        <a:font script="Guru" typeface="Raavi"/>
+        <a:font script="Cans" typeface="Euphemia"/>
+        <a:font script="Cher" typeface="Plantagenet Cherokee"/>
+        <a:font script="Yiii" typeface="Microsoft Yi Baiti"/>
+        <a:font script="Tibt" typeface="Microsoft Himalaya"/>
+        <a:font script="Thaa" typeface="MV Boli"/>
+        <a:font script="Deva" typeface="Mangal"/>
+        <a:font script="Telu" typeface="Gautami"/>
+        <a:font script="Taml" typeface="Latha"/>
+        <a:font script="Syrc" typeface="Estrangelo Edessa"/>
+        <a:font script="Orya" typeface="Kalinga"/>
+        <a:font script="Mlym" typeface="Kartika"/>
+        <a:font script="Laoo" typeface="DokChampa"/>
+        <a:font script="Sinh" typeface="Iskoola Pota"/>
+        <a:font script="Mong" typeface="Mongolian Baiti"/>
+        <a:font script="Viet" typeface="Arial"/>
+        <a:font script="Uigh" typeface="Microsoft Uighur"/>
+        <a:font script="Geor" typeface="Sylfaen"/>
+        <a:font script="Armn" typeface="Arial"/>
+        <a:font script="Bugi" typeface="Leelawadee UI"/>
+        <a:font script="Bopo" typeface="Microsoft JhengHei"/>
+        <a:font script="Java" typeface="Javanese Text"/>
+        <a:font script="Lisu" typeface="Segoe UI"/>
+        <a:font script="Mymr" typeface="Myanmar Text"/>
+        <a:font script="Nkoo" typeface="Ebrima"/>
+        <a:font script="Olck" typeface="Nirmala UI"/>
+        <a:font script="Osma" typeface="Ebrima"/>
+        <a:font script="Phag" typeface="Phagspa"/>
+        <a:font script="Syrn" typeface="Estrangelo Edessa"/>
+        <a:font script="Syrj" typeface="Estrangelo Edessa"/>
+        <a:font script="Syre" typeface="Estrangelo Edessa"/>
+        <a:font script="Sora" typeface="Nirmala UI"/>
+        <a:font script="Tale" typeface="Microsoft Tai Le"/>
+        <a:font script="Talu" typeface="Microsoft New Tai Lue"/>
+        <a:font script="Tfng" typeface="Ebrima"/>
+      </a:minorFont>
+    </a:fontScheme>
+    <a:fmtScheme name="Office">
+      <a:fillStyleLst>
+        <a:solidFill>
+          <a:schemeClr val="phClr"/>
+        </a:solidFill>
+        <a:gradFill rotWithShape="1">
+          <a:gsLst>
+            <a:gs pos="0">
+              <a:schemeClr val="phClr">
+                <a:lumMod val="110000"/>
+                <a:satMod val="105000"/>
+                <a:tint val="67000"/>
+              </a:schemeClr>
+            </a:gs>
+            <a:gs pos="50000">
+              <a:schemeClr val="phClr">
+                <a:lumMod val="105000"/>
+                <a:satMod val="103000"/>
+                <a:tint val="73000"/>
+              </a:schemeClr>
+            </a:gs>
+            <a:gs pos="100000">
+              <a:schemeClr val="phClr">
+                <a:lumMod val="105000"/>
+                <a:satMod val="109000"/>
+                <a:tint val="81000"/>
+              </a:schemeClr>
+            </a:gs>
+          </a:gsLst>
+          <a:lin ang="5400000" scaled="0"/>
+        </a:gradFill>
+        <a:gradFill rotWithShape="1">
+          <a:gsLst>
+            <a:gs pos="0">
+              <a:schemeClr val="phClr">
+                <a:satMod val="103000"/>
+                <a:lumMod val="102000"/>
+                <a:tint val="94000"/>
+              </a:schemeClr>
+            </a:gs>
+            <a:gs pos="50000">
+              <a:schemeClr val="phClr">
+                <a:satMod val="110000"/>
+                <a:lumMod val="100000"/>
+                <a:shade val="100000"/>
+              </a:schemeClr>
+            </a:gs>
+            <a:gs pos="100000">
+              <a:schemeClr val="phClr">
+                <a:lumMod val="99000"/>
+                <a:satMod val="120000"/>
+                <a:shade val="78000"/>
+              </a:schemeClr>
+            </a:gs>
+          </a:gsLst>
+          <a:lin ang="5400000" scaled="0"/>
+        </a:gradFill>
+      </a:fillStyleLst>
+      <a:lnStyleLst>
+        <a:ln w="6350" cap="flat" cmpd="sng" algn="ctr">
+          <a:solidFill>
+            <a:schemeClr val="phClr"/>
+          </a:solidFill>
+          <a:prstDash val="solid"/>
+          <a:miter lim="800000"/>
+        </a:ln>
+        <a:ln w="12700" cap="flat" cmpd="sng" algn="ctr">
+          <a:solidFill>
+            <a:schemeClr val="phClr"/>
+          </a:solidFill>
+          <a:prstDash val="solid"/>
+          <a:miter lim="800000"/>
+        </a:ln>
+        <a:ln w="19050" cap="flat" cmpd="sng" algn="ctr">
+          <a:solidFill>
+            <a:schemeClr val="phClr"/>
+          </a:solidFill>
+          <a:prstDash val="solid"/>
+          <a:miter lim="800000"/>
+        </a:ln>
+      </a:lnStyleLst>
+      <a:effectStyleLst>
+        <a:effectStyle>
+          <a:effectLst/>
+        </a:effectStyle>
+        <a:effectStyle>
+          <a:effectLst/>
+        </a:effectStyle>
+        <a:effectStyle>
+          <a:effectLst>
+            <a:outerShdw blurRad="57150" dist="19050" dir="5400000" algn="ctr" rotWithShape="0">
+              <a:srgbClr val="000000">
+                <a:alpha val="63000"/>
+              </a:srgbClr>
+            </a:outerShdw>
+          </a:effectLst>
+        </a:effectStyle>
+      </a:effectStyleLst>
+      <a:bgFillStyleLst>
+        <a:solidFill>
+          <a:schemeClr val="phClr"/>
+        </a:solidFill>
+        <a:solidFill>
+          <a:schemeClr val="phClr">
+            <a:tint val="95000"/>
+            <a:satMod val="170000"/>
+          </a:schemeClr>
+        </a:solidFill>
+        <a:gradFill rotWithShape="1">
+          <a:gsLst>
+            <a:gs pos="0">
+              <a:schemeClr val="phClr">
+                <a:tint val="93000"/>
+                <a:satMod val="150000"/>
+                <a:shade val="98000"/>
+                <a:lumMod val="102000"/>
+              </a:schemeClr>
+            </a:gs>
+            <a:gs pos="50000">
+              <a:schemeClr val="phClr">
+                <a:tint val="98000"/>
+                <a:satMod val="130000"/>
+                <a:shade val="90000"/>
+                <a:lumMod val="103000"/>
+              </a:schemeClr>
+            </a:gs>
+            <a:gs pos="100000">
+              <a:schemeClr val="phClr">
+                <a:shade val="63000"/>
+                <a:satMod val="120000"/>
+              </a:schemeClr>
+            </a:gs>
+          </a:gsLst>
+          <a:lin ang="5400000" scaled="0"/>
+        </a:gradFill>
+      </a:bgFillStyleLst>
+    </a:fmtScheme>
+  </a:themeElements>
+  <a:objectDefaults/>
+  <a:extraClrSchemeLst/>
+  <a:extLst>
+    <a:ext uri="{05A4C25C-085E-4340-85A3-A5531E510DB2}">
+      <thm15:themeFamily xmlns:thm15="http://schemas.microsoft.com/office/thememl/2012/main" name="Office Theme" id="{62F939B6-93AF-4DB8-9C6B-D6C7DFDC589F}" vid="{4A3C46E8-61CC-4603-A589-7422A47A8E4A}"/>
+    </a:ext>
+  </a:extLst>
+</a:theme>
 </file>